--- a/lectures/04-Expressions/CS1910_Expressions_Lecture.pptx
+++ b/lectures/04-Expressions/CS1910_Expressions_Lecture.pptx
@@ -5,48 +5,47 @@
     <p:sldMasterId id="2147483696" r:id="rId1"/>
   </p:sldMasterIdLst>
   <p:notesMasterIdLst>
-    <p:notesMasterId r:id="rId41"/>
+    <p:notesMasterId r:id="rId40"/>
   </p:notesMasterIdLst>
   <p:sldIdLst>
     <p:sldId id="313" r:id="rId2"/>
-    <p:sldId id="257" r:id="rId3"/>
-    <p:sldId id="260" r:id="rId4"/>
-    <p:sldId id="258" r:id="rId5"/>
-    <p:sldId id="259" r:id="rId6"/>
-    <p:sldId id="261" r:id="rId7"/>
-    <p:sldId id="281" r:id="rId8"/>
-    <p:sldId id="282" r:id="rId9"/>
-    <p:sldId id="293" r:id="rId10"/>
-    <p:sldId id="295" r:id="rId11"/>
-    <p:sldId id="297" r:id="rId12"/>
-    <p:sldId id="298" r:id="rId13"/>
-    <p:sldId id="304" r:id="rId14"/>
-    <p:sldId id="344" r:id="rId15"/>
-    <p:sldId id="345" r:id="rId16"/>
-    <p:sldId id="305" r:id="rId17"/>
-    <p:sldId id="307" r:id="rId18"/>
-    <p:sldId id="346" r:id="rId19"/>
-    <p:sldId id="308" r:id="rId20"/>
-    <p:sldId id="306" r:id="rId21"/>
-    <p:sldId id="299" r:id="rId22"/>
-    <p:sldId id="300" r:id="rId23"/>
-    <p:sldId id="303" r:id="rId24"/>
-    <p:sldId id="262" r:id="rId25"/>
-    <p:sldId id="265" r:id="rId26"/>
-    <p:sldId id="347" r:id="rId27"/>
-    <p:sldId id="348" r:id="rId28"/>
-    <p:sldId id="349" r:id="rId29"/>
-    <p:sldId id="269" r:id="rId30"/>
-    <p:sldId id="350" r:id="rId31"/>
-    <p:sldId id="271" r:id="rId32"/>
-    <p:sldId id="268" r:id="rId33"/>
-    <p:sldId id="273" r:id="rId34"/>
-    <p:sldId id="266" r:id="rId35"/>
-    <p:sldId id="280" r:id="rId36"/>
-    <p:sldId id="310" r:id="rId37"/>
-    <p:sldId id="311" r:id="rId38"/>
-    <p:sldId id="291" r:id="rId39"/>
-    <p:sldId id="312" r:id="rId40"/>
+    <p:sldId id="260" r:id="rId3"/>
+    <p:sldId id="258" r:id="rId4"/>
+    <p:sldId id="259" r:id="rId5"/>
+    <p:sldId id="261" r:id="rId6"/>
+    <p:sldId id="281" r:id="rId7"/>
+    <p:sldId id="282" r:id="rId8"/>
+    <p:sldId id="293" r:id="rId9"/>
+    <p:sldId id="295" r:id="rId10"/>
+    <p:sldId id="297" r:id="rId11"/>
+    <p:sldId id="298" r:id="rId12"/>
+    <p:sldId id="304" r:id="rId13"/>
+    <p:sldId id="344" r:id="rId14"/>
+    <p:sldId id="345" r:id="rId15"/>
+    <p:sldId id="305" r:id="rId16"/>
+    <p:sldId id="307" r:id="rId17"/>
+    <p:sldId id="346" r:id="rId18"/>
+    <p:sldId id="308" r:id="rId19"/>
+    <p:sldId id="306" r:id="rId20"/>
+    <p:sldId id="299" r:id="rId21"/>
+    <p:sldId id="300" r:id="rId22"/>
+    <p:sldId id="303" r:id="rId23"/>
+    <p:sldId id="262" r:id="rId24"/>
+    <p:sldId id="265" r:id="rId25"/>
+    <p:sldId id="347" r:id="rId26"/>
+    <p:sldId id="348" r:id="rId27"/>
+    <p:sldId id="349" r:id="rId28"/>
+    <p:sldId id="269" r:id="rId29"/>
+    <p:sldId id="350" r:id="rId30"/>
+    <p:sldId id="271" r:id="rId31"/>
+    <p:sldId id="268" r:id="rId32"/>
+    <p:sldId id="273" r:id="rId33"/>
+    <p:sldId id="266" r:id="rId34"/>
+    <p:sldId id="280" r:id="rId35"/>
+    <p:sldId id="310" r:id="rId36"/>
+    <p:sldId id="311" r:id="rId37"/>
+    <p:sldId id="291" r:id="rId38"/>
+    <p:sldId id="312" r:id="rId39"/>
   </p:sldIdLst>
   <p:sldSz cx="12192000" cy="6858000"/>
   <p:notesSz cx="6858000" cy="9144000"/>
@@ -153,58 +152,44 @@
 </p:presentation>
 </file>
 
+<file path=ppt/revisionInfo.xml><?xml version="1.0" encoding="utf-8"?>
+<p1510:revInfo xmlns:a="http://schemas.openxmlformats.org/drawingml/2006/main" xmlns:r="http://schemas.openxmlformats.org/officeDocument/2006/relationships" xmlns:p1510="http://schemas.microsoft.com/office/powerpoint/2015/10/main">
+  <p1510:revLst>
+    <p1510:client id="{A7738572-869D-654C-80E9-15D211BEE2C6}" v="2" dt="2026-09-17T00:53:28.216"/>
+  </p1510:revLst>
+</p1510:revInfo>
+</file>
+
 <file path=ppt/changesInfos/changesInfo1.xml><?xml version="1.0" encoding="utf-8"?>
 <pc:chgInfo xmlns:a="http://schemas.openxmlformats.org/drawingml/2006/main" xmlns:r="http://schemas.openxmlformats.org/officeDocument/2006/relationships" xmlns:ac="http://schemas.microsoft.com/office/drawing/2013/main/command" xmlns:pc="http://schemas.microsoft.com/office/powerpoint/2013/main/command">
   <pc:docChgLst>
-    <pc:chgData name="Christopher Power" userId="83706efc-52ec-4aad-b93a-e27c6e901a30" providerId="ADAL" clId="{97D26654-64D5-4042-8583-A5886BB6B01E}"/>
-    <pc:docChg chg="undo custSel addSld delSld modSld">
-      <pc:chgData name="Christopher Power" userId="83706efc-52ec-4aad-b93a-e27c6e901a30" providerId="ADAL" clId="{97D26654-64D5-4042-8583-A5886BB6B01E}" dt="2026-07-23T02:10:53.343" v="354" actId="20577"/>
+    <pc:chgData name="Christopher Power" userId="83706efc-52ec-4aad-b93a-e27c6e901a30" providerId="ADAL" clId="{334A65D2-812A-5EDD-A5B2-F31A17A4407D}"/>
+    <pc:docChg chg="delSld modSld">
+      <pc:chgData name="Christopher Power" userId="83706efc-52ec-4aad-b93a-e27c6e901a30" providerId="ADAL" clId="{334A65D2-812A-5EDD-A5B2-F31A17A4407D}" dt="2026-09-17T00:53:28.207" v="2" actId="20577"/>
       <pc:docMkLst>
         <pc:docMk/>
       </pc:docMkLst>
-      <pc:sldChg chg="addSp delSp modSp add del mod setBg delDesignElem">
-        <pc:chgData name="Christopher Power" userId="83706efc-52ec-4aad-b93a-e27c6e901a30" providerId="ADAL" clId="{97D26654-64D5-4042-8583-A5886BB6B01E}" dt="2026-07-23T02:10:53.343" v="354" actId="20577"/>
+      <pc:sldChg chg="del">
+        <pc:chgData name="Christopher Power" userId="83706efc-52ec-4aad-b93a-e27c6e901a30" providerId="ADAL" clId="{334A65D2-812A-5EDD-A5B2-F31A17A4407D}" dt="2026-09-17T00:50:30.471" v="0" actId="2696"/>
         <pc:sldMkLst>
           <pc:docMk/>
-          <pc:sldMk cId="3002068836" sldId="313"/>
+          <pc:sldMk cId="2078530638" sldId="257"/>
+        </pc:sldMkLst>
+      </pc:sldChg>
+      <pc:sldChg chg="modSp mod">
+        <pc:chgData name="Christopher Power" userId="83706efc-52ec-4aad-b93a-e27c6e901a30" providerId="ADAL" clId="{334A65D2-812A-5EDD-A5B2-F31A17A4407D}" dt="2026-09-17T00:53:28.207" v="2" actId="20577"/>
+        <pc:sldMkLst>
+          <pc:docMk/>
+          <pc:sldMk cId="645151527" sldId="260"/>
         </pc:sldMkLst>
         <pc:spChg chg="mod">
-          <ac:chgData name="Christopher Power" userId="83706efc-52ec-4aad-b93a-e27c6e901a30" providerId="ADAL" clId="{97D26654-64D5-4042-8583-A5886BB6B01E}" dt="2026-07-23T02:10:45.886" v="346" actId="20577"/>
+          <ac:chgData name="Christopher Power" userId="83706efc-52ec-4aad-b93a-e27c6e901a30" providerId="ADAL" clId="{334A65D2-812A-5EDD-A5B2-F31A17A4407D}" dt="2026-09-17T00:53:28.207" v="2" actId="20577"/>
           <ac:spMkLst>
             <pc:docMk/>
-            <pc:sldMk cId="3002068836" sldId="313"/>
-            <ac:spMk id="2" creationId="{C93DC5BA-038A-1370-693A-933684213ED6}"/>
+            <pc:sldMk cId="645151527" sldId="260"/>
+            <ac:spMk id="3" creationId="{52BF1C45-1BC6-1344-58B8-103FD029F2E3}"/>
           </ac:spMkLst>
         </pc:spChg>
-        <pc:spChg chg="mod">
-          <ac:chgData name="Christopher Power" userId="83706efc-52ec-4aad-b93a-e27c6e901a30" providerId="ADAL" clId="{97D26654-64D5-4042-8583-A5886BB6B01E}" dt="2026-07-23T02:10:53.343" v="354" actId="20577"/>
-          <ac:spMkLst>
-            <pc:docMk/>
-            <pc:sldMk cId="3002068836" sldId="313"/>
-            <ac:spMk id="3" creationId="{C5AB9C7C-BEF1-C07A-6A77-DBDD71480AAD}"/>
-          </ac:spMkLst>
-        </pc:spChg>
-      </pc:sldChg>
-      <pc:sldChg chg="addSp delSp modSp add del mod">
-        <pc:chgData name="Christopher Power" userId="83706efc-52ec-4aad-b93a-e27c6e901a30" providerId="ADAL" clId="{97D26654-64D5-4042-8583-A5886BB6B01E}" dt="2026-07-23T00:11:52.079" v="327" actId="47"/>
-        <pc:sldMkLst>
-          <pc:docMk/>
-          <pc:sldMk cId="1144124753" sldId="314"/>
-        </pc:sldMkLst>
-      </pc:sldChg>
-      <pc:sldChg chg="addSp modSp add del mod">
-        <pc:chgData name="Christopher Power" userId="83706efc-52ec-4aad-b93a-e27c6e901a30" providerId="ADAL" clId="{97D26654-64D5-4042-8583-A5886BB6B01E}" dt="2026-07-23T00:11:48.047" v="326" actId="47"/>
-        <pc:sldMkLst>
-          <pc:docMk/>
-          <pc:sldMk cId="662383138" sldId="343"/>
-        </pc:sldMkLst>
-      </pc:sldChg>
-      <pc:sldChg chg="new del">
-        <pc:chgData name="Christopher Power" userId="83706efc-52ec-4aad-b93a-e27c6e901a30" providerId="ADAL" clId="{97D26654-64D5-4042-8583-A5886BB6B01E}" dt="2026-07-23T02:10:38.061" v="329" actId="680"/>
-        <pc:sldMkLst>
-          <pc:docMk/>
-          <pc:sldMk cId="897411803" sldId="351"/>
-        </pc:sldMkLst>
       </pc:sldChg>
     </pc:docChg>
   </pc:docChgLst>
@@ -293,7 +278,7 @@
           <a:p>
             <a:fld id="{BB85323A-822E-E84A-9FEB-A103DD03B04F}" type="datetimeFigureOut">
               <a:rPr lang="en-US" smtClean="0"/>
-              <a:t>7/22/2026</a:t>
+              <a:t>9/16/26</a:t>
             </a:fld>
             <a:endParaRPr lang="en-US"/>
           </a:p>
@@ -632,7 +617,7 @@
           <a:p>
             <a:fld id="{7B4F92D9-E9D5-EA45-93E3-E28E893B5AE2}" type="slidenum">
               <a:rPr lang="en-US" smtClean="0"/>
-              <a:t>9</a:t>
+              <a:t>8</a:t>
             </a:fld>
             <a:endParaRPr lang="en-US"/>
           </a:p>
@@ -775,7 +760,7 @@
           <a:p>
             <a:fld id="{7B4F92D9-E9D5-EA45-93E3-E28E893B5AE2}" type="slidenum">
               <a:rPr lang="en-US" smtClean="0"/>
-              <a:t>17</a:t>
+              <a:t>16</a:t>
             </a:fld>
             <a:endParaRPr lang="en-US"/>
           </a:p>
@@ -957,7 +942,7 @@
           <a:p>
             <a:fld id="{1160EA64-D806-43AC-9DF2-F8C432F32B4C}" type="datetimeFigureOut">
               <a:rPr lang="en-US" dirty="0"/>
-              <a:t>7/22/2026</a:t>
+              <a:t>9/16/26</a:t>
             </a:fld>
             <a:endParaRPr lang="en-US" dirty="0"/>
           </a:p>
@@ -1123,7 +1108,7 @@
           <a:p>
             <a:fld id="{E9F9C37B-1D36-470B-8223-D6C91242EC14}" type="datetimeFigureOut">
               <a:rPr lang="en-US" dirty="0"/>
-              <a:t>7/22/2026</a:t>
+              <a:t>9/16/26</a:t>
             </a:fld>
             <a:endParaRPr lang="en-US" dirty="0"/>
           </a:p>
@@ -1298,7 +1283,7 @@
           <a:p>
             <a:fld id="{67C6F52A-A82B-47A2-A83A-8C4C91F2D59F}" type="datetimeFigureOut">
               <a:rPr lang="en-US" dirty="0"/>
-              <a:t>7/22/2026</a:t>
+              <a:t>9/16/26</a:t>
             </a:fld>
             <a:endParaRPr lang="en-US" dirty="0"/>
           </a:p>
@@ -1463,7 +1448,7 @@
           <a:p>
             <a:fld id="{F070A7B3-6521-4DCA-87E5-044747A908C1}" type="datetimeFigureOut">
               <a:rPr lang="en-US" dirty="0"/>
-              <a:t>7/22/2026</a:t>
+              <a:t>9/16/26</a:t>
             </a:fld>
             <a:endParaRPr lang="en-US" dirty="0"/>
           </a:p>
@@ -1727,7 +1712,7 @@
           <a:p>
             <a:fld id="{1160EA64-D806-43AC-9DF2-F8C432F32B4C}" type="datetimeFigureOut">
               <a:rPr lang="en-US" dirty="0"/>
-              <a:t>7/22/2026</a:t>
+              <a:t>9/16/26</a:t>
             </a:fld>
             <a:endParaRPr lang="en-US" dirty="0"/>
           </a:p>
@@ -1955,7 +1940,7 @@
           <a:p>
             <a:fld id="{AB134690-1557-4C89-A502-4959FE7FAD70}" type="datetimeFigureOut">
               <a:rPr lang="en-US" dirty="0"/>
-              <a:t>7/22/2026</a:t>
+              <a:t>9/16/26</a:t>
             </a:fld>
             <a:endParaRPr lang="en-US" dirty="0"/>
           </a:p>
@@ -2309,7 +2294,7 @@
           <a:p>
             <a:fld id="{4F7D4976-E339-4826-83B7-FBD03F55ECF8}" type="datetimeFigureOut">
               <a:rPr lang="en-US" dirty="0"/>
-              <a:t>7/22/2026</a:t>
+              <a:t>9/16/26</a:t>
             </a:fld>
             <a:endParaRPr lang="en-US" dirty="0"/>
           </a:p>
@@ -2445,7 +2430,7 @@
           <a:p>
             <a:fld id="{E1037C31-9E7A-4F99-8774-A0E530DE1A42}" type="datetimeFigureOut">
               <a:rPr lang="en-US" dirty="0"/>
-              <a:t>7/22/2026</a:t>
+              <a:t>9/16/26</a:t>
             </a:fld>
             <a:endParaRPr lang="en-US" dirty="0"/>
           </a:p>
@@ -2535,7 +2520,7 @@
           <a:p>
             <a:fld id="{C278504F-A551-4DE0-9316-4DCD1D8CC752}" type="datetimeFigureOut">
               <a:rPr lang="en-US" dirty="0"/>
-              <a:t>7/22/2026</a:t>
+              <a:t>9/16/26</a:t>
             </a:fld>
             <a:endParaRPr lang="en-US" dirty="0"/>
           </a:p>
@@ -2887,7 +2872,7 @@
           <a:p>
             <a:fld id="{D1BE4249-C0D0-4B06-8692-E8BB871AF643}" type="datetimeFigureOut">
               <a:rPr lang="en-US" dirty="0"/>
-              <a:t>7/22/2026</a:t>
+              <a:t>9/16/26</a:t>
             </a:fld>
             <a:endParaRPr lang="en-US" dirty="0"/>
           </a:p>
@@ -3239,7 +3224,7 @@
           <a:p>
             <a:fld id="{042B0DB6-F5C7-45FB-8CF3-31B45F9C2DAC}" type="datetimeFigureOut">
               <a:rPr lang="en-US" dirty="0"/>
-              <a:t>7/22/2026</a:t>
+              <a:t>9/16/26</a:t>
             </a:fld>
             <a:endParaRPr lang="en-US" dirty="0"/>
           </a:p>
@@ -3476,7 +3461,7 @@
           <a:p>
             <a:fld id="{1160EA64-D806-43AC-9DF2-F8C432F32B4C}" type="datetimeFigureOut">
               <a:rPr lang="en-US" dirty="0"/>
-              <a:t>7/22/2026</a:t>
+              <a:t>9/16/26</a:t>
             </a:fld>
             <a:endParaRPr lang="en-US" dirty="0"/>
           </a:p>
@@ -4151,13 +4136,7 @@
     </p:bg>
     <p:spTree>
       <p:nvGrpSpPr>
-        <p:cNvPr id="1" name="">
-          <a:extLst>
-            <a:ext uri="{FF2B5EF4-FFF2-40B4-BE49-F238E27FC236}">
-              <a16:creationId xmlns:a16="http://schemas.microsoft.com/office/drawing/2014/main" id="{972F4FE0-3C7F-E749-2FBC-B976BFA9C564}"/>
-            </a:ext>
-          </a:extLst>
-        </p:cNvPr>
+        <p:cNvPr id="1" name=""/>
         <p:cNvGrpSpPr/>
         <p:nvPr/>
       </p:nvGrpSpPr>
@@ -4171,7 +4150,7 @@
       </p:grpSpPr>
       <p:sp>
         <p:nvSpPr>
-          <p:cNvPr id="9" name="Rectangle 8">
+          <p:cNvPr id="8" name="Rectangle 7">
             <a:extLst>
               <a:ext uri="{FF2B5EF4-FFF2-40B4-BE49-F238E27FC236}">
                 <a16:creationId xmlns:a16="http://schemas.microsoft.com/office/drawing/2014/main" id="{2AEFFFF2-9EB4-4B6C-B9F8-2BA3EF89A21C}"/>
@@ -4294,7 +4273,7 @@
       </p:sp>
       <p:sp>
         <p:nvSpPr>
-          <p:cNvPr id="11" name="Oval 10">
+          <p:cNvPr id="12" name="Oval 11">
             <a:extLst>
               <a:ext uri="{FF2B5EF4-FFF2-40B4-BE49-F238E27FC236}">
                 <a16:creationId xmlns:a16="http://schemas.microsoft.com/office/drawing/2014/main" id="{BAC87F6E-526A-49B5-995D-42DB656594C9}"/>
@@ -4364,7 +4343,7 @@
           <p:cNvPr id="2" name="Title 1">
             <a:extLst>
               <a:ext uri="{FF2B5EF4-FFF2-40B4-BE49-F238E27FC236}">
-                <a16:creationId xmlns:a16="http://schemas.microsoft.com/office/drawing/2014/main" id="{93DCFF69-D55E-A196-66FD-40D15AFC9785}"/>
+                <a16:creationId xmlns:a16="http://schemas.microsoft.com/office/drawing/2014/main" id="{83EE997A-2346-F0D9-BBBD-34A5651C6605}"/>
               </a:ext>
             </a:extLst>
           </p:cNvPr>
@@ -4393,31 +4372,134 @@
           </a:ln>
         </p:spPr>
         <p:txBody>
-          <a:bodyPr vert="horz" lIns="182880" tIns="182880" rIns="182880" bIns="182880" rtlCol="0" anchor="ctr">
+          <a:bodyPr>
             <a:normAutofit/>
           </a:bodyPr>
           <a:lstStyle/>
           <a:p>
             <a:r>
-              <a:rPr lang="en-US" sz="2600" kern="1200" cap="all" spc="200" baseline="0" dirty="0">
+              <a:rPr lang="en-US" sz="3000" dirty="0">
                 <a:solidFill>
                   <a:srgbClr val="FFFFFF"/>
                 </a:solidFill>
-                <a:latin typeface="+mj-lt"/>
-                <a:ea typeface="+mj-ea"/>
-                <a:cs typeface="+mj-cs"/>
               </a:rPr>
-              <a:t>Pair Problem Solving / Discussion</a:t>
-            </a:r>
-          </a:p>
-        </p:txBody>
-      </p:sp>
-      <p:sp>
-        <p:nvSpPr>
-          <p:cNvPr id="7" name="TextBox 6">
-            <a:extLst>
-              <a:ext uri="{FF2B5EF4-FFF2-40B4-BE49-F238E27FC236}">
-                <a16:creationId xmlns:a16="http://schemas.microsoft.com/office/drawing/2014/main" id="{03A13ACA-B4BE-0E3A-83CF-A117A438A6E5}"/>
+              <a:t>Colored Hexagon</a:t>
+            </a:r>
+          </a:p>
+        </p:txBody>
+      </p:sp>
+      <p:sp>
+        <p:nvSpPr>
+          <p:cNvPr id="3" name="Content Placeholder 2">
+            <a:extLst>
+              <a:ext uri="{FF2B5EF4-FFF2-40B4-BE49-F238E27FC236}">
+                <a16:creationId xmlns:a16="http://schemas.microsoft.com/office/drawing/2014/main" id="{73EB9ECB-F855-4D33-8653-1E1308A435DC}"/>
+              </a:ext>
+            </a:extLst>
+          </p:cNvPr>
+          <p:cNvSpPr>
+            <a:spLocks noGrp="1"/>
+          </p:cNvSpPr>
+          <p:nvPr>
+            <p:ph idx="1"/>
+          </p:nvPr>
+        </p:nvSpPr>
+        <p:spPr>
+          <a:xfrm>
+            <a:off x="5232805" y="1443034"/>
+            <a:ext cx="6959195" cy="4012885"/>
+          </a:xfrm>
+        </p:spPr>
+        <p:txBody>
+          <a:bodyPr anchor="ctr">
+            <a:normAutofit/>
+          </a:bodyPr>
+          <a:lstStyle/>
+          <a:p>
+            <a:r>
+              <a:rPr lang="en-US" sz="2400" dirty="0"/>
+              <a:t>2 ways to change the Turtle’s color:</a:t>
+            </a:r>
+          </a:p>
+          <a:p>
+            <a:endParaRPr lang="en-US" sz="2400" dirty="0">
+              <a:latin typeface="Courier New" panose="02070309020205020404" pitchFamily="49" charset="0"/>
+              <a:cs typeface="Courier New" panose="02070309020205020404" pitchFamily="49" charset="0"/>
+            </a:endParaRPr>
+          </a:p>
+          <a:p>
+            <a:pPr marL="0" indent="0">
+              <a:buNone/>
+            </a:pPr>
+            <a:r>
+              <a:rPr lang="en-US" sz="2400" dirty="0">
+                <a:latin typeface="Courier New" panose="02070309020205020404" pitchFamily="49" charset="0"/>
+                <a:cs typeface="Courier New" panose="02070309020205020404" pitchFamily="49" charset="0"/>
+              </a:rPr>
+              <a:t>color(“red”)</a:t>
+            </a:r>
+          </a:p>
+          <a:p>
+            <a:pPr marL="0" indent="0">
+              <a:buNone/>
+            </a:pPr>
+            <a:r>
+              <a:rPr lang="en-US" sz="2400" dirty="0">
+                <a:latin typeface="Courier New" panose="02070309020205020404" pitchFamily="49" charset="0"/>
+                <a:cs typeface="Courier New" panose="02070309020205020404" pitchFamily="49" charset="0"/>
+              </a:rPr>
+              <a:t>color(r, g, b) e.g., color(255, 0, 0)</a:t>
+            </a:r>
+          </a:p>
+        </p:txBody>
+      </p:sp>
+      <p:cxnSp>
+        <p:nvCxnSpPr>
+          <p:cNvPr id="5" name="Straight Arrow Connector 4">
+            <a:extLst>
+              <a:ext uri="{FF2B5EF4-FFF2-40B4-BE49-F238E27FC236}">
+                <a16:creationId xmlns:a16="http://schemas.microsoft.com/office/drawing/2014/main" id="{A142B2D3-8E7B-550D-81E5-46831DD2916B}"/>
+              </a:ext>
+            </a:extLst>
+          </p:cNvPr>
+          <p:cNvCxnSpPr>
+            <a:cxnSpLocks/>
+          </p:cNvCxnSpPr>
+          <p:nvPr/>
+        </p:nvCxnSpPr>
+        <p:spPr>
+          <a:xfrm flipV="1">
+            <a:off x="9485523" y="4362680"/>
+            <a:ext cx="969117" cy="672029"/>
+          </a:xfrm>
+          <a:prstGeom prst="straightConnector1">
+            <a:avLst/>
+          </a:prstGeom>
+          <a:ln>
+            <a:tailEnd type="triangle"/>
+          </a:ln>
+        </p:spPr>
+        <p:style>
+          <a:lnRef idx="1">
+            <a:schemeClr val="accent1"/>
+          </a:lnRef>
+          <a:fillRef idx="0">
+            <a:schemeClr val="accent1"/>
+          </a:fillRef>
+          <a:effectRef idx="0">
+            <a:schemeClr val="accent1"/>
+          </a:effectRef>
+          <a:fontRef idx="minor">
+            <a:schemeClr val="tx1"/>
+          </a:fontRef>
+        </p:style>
+      </p:cxnSp>
+      <p:sp>
+        <p:nvSpPr>
+          <p:cNvPr id="6" name="TextBox 5">
+            <a:extLst>
+              <a:ext uri="{FF2B5EF4-FFF2-40B4-BE49-F238E27FC236}">
+                <a16:creationId xmlns:a16="http://schemas.microsoft.com/office/drawing/2014/main" id="{CAC290CB-7289-6DFD-435B-0365B9951391}"/>
               </a:ext>
             </a:extLst>
           </p:cNvPr>
@@ -4426,142 +4508,72 @@
         </p:nvSpPr>
         <p:spPr>
           <a:xfrm>
-            <a:off x="5610431" y="1146554"/>
-            <a:ext cx="5320696" cy="2697480"/>
-          </a:xfrm>
-          <a:prstGeom prst="rect">
-            <a:avLst/>
-          </a:prstGeom>
-        </p:spPr>
-        <p:txBody>
-          <a:bodyPr vert="horz" lIns="91440" tIns="45720" rIns="91440" bIns="45720" rtlCol="0" anchor="ctr">
-            <a:normAutofit/>
-          </a:bodyPr>
-          <a:lstStyle/>
-          <a:p>
-            <a:pPr indent="-228600" defTabSz="914400">
-              <a:spcBef>
-                <a:spcPts val="1000"/>
-              </a:spcBef>
-              <a:buClr>
-                <a:schemeClr val="accent2"/>
-              </a:buClr>
-              <a:buFont typeface="Arial" panose="020B0604020202020204" pitchFamily="34" charset="0"/>
-              <a:buChar char="•"/>
-            </a:pPr>
-            <a:r>
-              <a:rPr lang="en-US" sz="2400" dirty="0">
-                <a:solidFill>
-                  <a:schemeClr val="tx1">
-                    <a:lumMod val="85000"/>
-                    <a:lumOff val="15000"/>
-                  </a:schemeClr>
-                </a:solidFill>
-              </a:rPr>
-              <a:t>Problem 2:</a:t>
-            </a:r>
-          </a:p>
-          <a:p>
-            <a:pPr indent="-228600" defTabSz="914400">
-              <a:spcBef>
-                <a:spcPts val="1000"/>
-              </a:spcBef>
-              <a:buClr>
-                <a:schemeClr val="accent2"/>
-              </a:buClr>
-              <a:buFont typeface="Arial" panose="020B0604020202020204" pitchFamily="34" charset="0"/>
-              <a:buChar char="•"/>
-            </a:pPr>
-            <a:r>
-              <a:rPr lang="en-US" sz="2400" dirty="0">
-                <a:solidFill>
-                  <a:schemeClr val="tx1">
-                    <a:lumMod val="85000"/>
-                    <a:lumOff val="15000"/>
-                  </a:schemeClr>
-                </a:solidFill>
-              </a:rPr>
-              <a:t>How can we turtle draw a hexagon so that the sides alternate red and blue?</a:t>
-            </a:r>
-          </a:p>
-        </p:txBody>
-      </p:sp>
-      <p:sp>
-        <p:nvSpPr>
-          <p:cNvPr id="5" name="TextBox 4">
-            <a:extLst>
-              <a:ext uri="{FF2B5EF4-FFF2-40B4-BE49-F238E27FC236}">
-                <a16:creationId xmlns:a16="http://schemas.microsoft.com/office/drawing/2014/main" id="{834AD7C2-BB2C-B46B-D616-E1DEAEBAFD1E}"/>
-              </a:ext>
-            </a:extLst>
-          </p:cNvPr>
-          <p:cNvSpPr txBox="1"/>
-          <p:nvPr/>
-        </p:nvSpPr>
-        <p:spPr>
-          <a:xfrm>
-            <a:off x="3916681" y="5775960"/>
-            <a:ext cx="7680960" cy="369332"/>
+            <a:off x="8228656" y="5034709"/>
+            <a:ext cx="3323539" cy="369332"/>
           </a:xfrm>
           <a:prstGeom prst="rect">
             <a:avLst/>
           </a:prstGeom>
           <a:noFill/>
-          <a:ln>
-            <a:solidFill>
-              <a:schemeClr val="accent1"/>
-            </a:solidFill>
-          </a:ln>
-        </p:spPr>
-        <p:txBody>
-          <a:bodyPr wrap="square" rtlCol="0">
+        </p:spPr>
+        <p:txBody>
+          <a:bodyPr wrap="none" rtlCol="0">
             <a:spAutoFit/>
           </a:bodyPr>
           <a:lstStyle/>
           <a:p>
             <a:r>
               <a:rPr lang="en-US" dirty="0"/>
-              <a:t>Difficulty Estimate: same as previous</a:t>
-            </a:r>
-          </a:p>
-        </p:txBody>
-      </p:sp>
-      <p:pic>
-        <p:nvPicPr>
-          <p:cNvPr id="13" name="Picture 12">
-            <a:extLst>
-              <a:ext uri="{FF2B5EF4-FFF2-40B4-BE49-F238E27FC236}">
-                <a16:creationId xmlns:a16="http://schemas.microsoft.com/office/drawing/2014/main" id="{83CC80B2-57AE-6C5A-4610-155F7193B942}"/>
-              </a:ext>
-            </a:extLst>
-          </p:cNvPr>
-          <p:cNvPicPr>
-            <a:picLocks noChangeAspect="1"/>
-          </p:cNvPicPr>
+              <a:t>Integer values between 0 and 255</a:t>
+            </a:r>
+          </a:p>
+        </p:txBody>
+      </p:sp>
+      <p:cxnSp>
+        <p:nvCxnSpPr>
+          <p:cNvPr id="11" name="Straight Arrow Connector 10">
+            <a:extLst>
+              <a:ext uri="{FF2B5EF4-FFF2-40B4-BE49-F238E27FC236}">
+                <a16:creationId xmlns:a16="http://schemas.microsoft.com/office/drawing/2014/main" id="{030BD3D5-C857-76AA-71D6-9A7518D6982A}"/>
+              </a:ext>
+            </a:extLst>
+          </p:cNvPr>
+          <p:cNvCxnSpPr/>
           <p:nvPr/>
-        </p:nvPicPr>
-        <p:blipFill>
-          <a:blip r:embed="rId2"/>
-          <a:stretch>
-            <a:fillRect/>
-          </a:stretch>
-        </p:blipFill>
-        <p:spPr>
-          <a:xfrm>
-            <a:off x="6529003" y="3497721"/>
-            <a:ext cx="1914320" cy="1778191"/>
-          </a:xfrm>
-          <a:prstGeom prst="rect">
+        </p:nvCxnSpPr>
+        <p:spPr>
+          <a:xfrm flipH="1">
+            <a:off x="7680960" y="3291840"/>
+            <a:ext cx="1234440" cy="137160"/>
+          </a:xfrm>
+          <a:prstGeom prst="straightConnector1">
             <a:avLst/>
           </a:prstGeom>
-        </p:spPr>
-      </p:pic>
-      <p:sp>
-        <p:nvSpPr>
-          <p:cNvPr id="3" name="TextBox 2">
-            <a:extLst>
-              <a:ext uri="{FF2B5EF4-FFF2-40B4-BE49-F238E27FC236}">
-                <a16:creationId xmlns:a16="http://schemas.microsoft.com/office/drawing/2014/main" id="{DD2F631B-2D3A-6EA9-2FBF-6838528B099D}"/>
+          <a:ln>
+            <a:tailEnd type="triangle"/>
+          </a:ln>
+        </p:spPr>
+        <p:style>
+          <a:lnRef idx="1">
+            <a:schemeClr val="accent1"/>
+          </a:lnRef>
+          <a:fillRef idx="0">
+            <a:schemeClr val="accent1"/>
+          </a:fillRef>
+          <a:effectRef idx="0">
+            <a:schemeClr val="accent1"/>
+          </a:effectRef>
+          <a:fontRef idx="minor">
+            <a:schemeClr val="tx1"/>
+          </a:fontRef>
+        </p:style>
+      </p:cxnSp>
+      <p:sp>
+        <p:nvSpPr>
+          <p:cNvPr id="13" name="TextBox 12">
+            <a:extLst>
+              <a:ext uri="{FF2B5EF4-FFF2-40B4-BE49-F238E27FC236}">
+                <a16:creationId xmlns:a16="http://schemas.microsoft.com/office/drawing/2014/main" id="{E106CFB8-9FE1-185F-5F37-C1ED83BC1A89}"/>
               </a:ext>
             </a:extLst>
           </p:cNvPr>
@@ -4570,18 +4582,13 @@
         </p:nvSpPr>
         <p:spPr>
           <a:xfrm>
-            <a:off x="7631086" y="140014"/>
-            <a:ext cx="4293419" cy="369332"/>
+            <a:off x="8898664" y="2960599"/>
+            <a:ext cx="705642" cy="369332"/>
           </a:xfrm>
           <a:prstGeom prst="rect">
             <a:avLst/>
           </a:prstGeom>
           <a:noFill/>
-          <a:ln>
-            <a:solidFill>
-              <a:schemeClr val="accent1"/>
-            </a:solidFill>
-          </a:ln>
         </p:spPr>
         <p:txBody>
           <a:bodyPr wrap="none" rtlCol="0">
@@ -4591,15 +4598,81 @@
           <a:p>
             <a:r>
               <a:rPr lang="en-US" dirty="0"/>
-              <a:t>Note: We aren’t using </a:t>
-            </a:r>
-            <a:r>
-              <a:rPr lang="en-US" b="1" dirty="0"/>
-              <a:t>if</a:t>
-            </a:r>
-            <a:r>
-              <a:rPr lang="en-US" dirty="0"/>
-              <a:t> statements just yet</a:t>
+              <a:t>string</a:t>
+            </a:r>
+          </a:p>
+        </p:txBody>
+      </p:sp>
+      <p:cxnSp>
+        <p:nvCxnSpPr>
+          <p:cNvPr id="15" name="Straight Arrow Connector 14">
+            <a:extLst>
+              <a:ext uri="{FF2B5EF4-FFF2-40B4-BE49-F238E27FC236}">
+                <a16:creationId xmlns:a16="http://schemas.microsoft.com/office/drawing/2014/main" id="{10AC9585-673F-D0BF-2FFD-0C2CF2F1B374}"/>
+              </a:ext>
+            </a:extLst>
+          </p:cNvPr>
+          <p:cNvCxnSpPr/>
+          <p:nvPr/>
+        </p:nvCxnSpPr>
+        <p:spPr>
+          <a:xfrm flipV="1">
+            <a:off x="6537960" y="4362680"/>
+            <a:ext cx="472440" cy="1093239"/>
+          </a:xfrm>
+          <a:prstGeom prst="straightConnector1">
+            <a:avLst/>
+          </a:prstGeom>
+          <a:ln>
+            <a:tailEnd type="triangle"/>
+          </a:ln>
+        </p:spPr>
+        <p:style>
+          <a:lnRef idx="1">
+            <a:schemeClr val="accent1"/>
+          </a:lnRef>
+          <a:fillRef idx="0">
+            <a:schemeClr val="accent1"/>
+          </a:fillRef>
+          <a:effectRef idx="0">
+            <a:schemeClr val="accent1"/>
+          </a:effectRef>
+          <a:fontRef idx="minor">
+            <a:schemeClr val="tx1"/>
+          </a:fontRef>
+        </p:style>
+      </p:cxnSp>
+      <p:sp>
+        <p:nvSpPr>
+          <p:cNvPr id="16" name="TextBox 15">
+            <a:extLst>
+              <a:ext uri="{FF2B5EF4-FFF2-40B4-BE49-F238E27FC236}">
+                <a16:creationId xmlns:a16="http://schemas.microsoft.com/office/drawing/2014/main" id="{81035D3A-098D-FBD7-90B3-2EFFFCDB1F10}"/>
+              </a:ext>
+            </a:extLst>
+          </p:cNvPr>
+          <p:cNvSpPr txBox="1"/>
+          <p:nvPr/>
+        </p:nvSpPr>
+        <p:spPr>
+          <a:xfrm>
+            <a:off x="6050280" y="5455919"/>
+            <a:ext cx="1106393" cy="369332"/>
+          </a:xfrm>
+          <a:prstGeom prst="rect">
+            <a:avLst/>
+          </a:prstGeom>
+          <a:noFill/>
+        </p:spPr>
+        <p:txBody>
+          <a:bodyPr wrap="none" rtlCol="0">
+            <a:spAutoFit/>
+          </a:bodyPr>
+          <a:lstStyle/>
+          <a:p>
+            <a:r>
+              <a:rPr lang="en-US" dirty="0"/>
+              <a:t>3 integers</a:t>
             </a:r>
           </a:p>
         </p:txBody>
@@ -4607,7 +4680,7 @@
     </p:spTree>
     <p:extLst>
       <p:ext uri="{BB962C8B-B14F-4D97-AF65-F5344CB8AC3E}">
-        <p14:creationId xmlns:p14="http://schemas.microsoft.com/office/powerpoint/2010/main" val="104455661"/>
+        <p14:creationId xmlns:p14="http://schemas.microsoft.com/office/powerpoint/2010/main" val="1433680787"/>
       </p:ext>
     </p:extLst>
   </p:cSld>
@@ -4644,10 +4717,10 @@
       </p:grpSpPr>
       <p:sp>
         <p:nvSpPr>
-          <p:cNvPr id="8" name="Rectangle 7">
-            <a:extLst>
-              <a:ext uri="{FF2B5EF4-FFF2-40B4-BE49-F238E27FC236}">
-                <a16:creationId xmlns:a16="http://schemas.microsoft.com/office/drawing/2014/main" id="{2AEFFFF2-9EB4-4B6C-B9F8-2BA3EF89A21C}"/>
+          <p:cNvPr id="12" name="Rectangle 11">
+            <a:extLst>
+              <a:ext uri="{FF2B5EF4-FFF2-40B4-BE49-F238E27FC236}">
+                <a16:creationId xmlns:a16="http://schemas.microsoft.com/office/drawing/2014/main" id="{CEAD0FD2-AF9A-4626-A717-49B022352DB8}"/>
               </a:ext>
               <a:ext uri="{C183D7F6-B498-43B3-948B-1728B52AA6E4}">
                 <adec:decorative xmlns:adec="http://schemas.microsoft.com/office/drawing/2017/decorative" val="1"/>
@@ -4667,14 +4740,14 @@
         </p:nvSpPr>
         <p:spPr>
           <a:xfrm>
-            <a:off x="1" y="0"/>
-            <a:ext cx="3070172" cy="6858000"/>
+            <a:off x="0" y="1"/>
+            <a:ext cx="6092951" cy="6858000"/>
           </a:xfrm>
           <a:prstGeom prst="rect">
             <a:avLst/>
           </a:prstGeom>
           <a:solidFill>
-            <a:schemeClr val="tx2"/>
+            <a:schemeClr val="accent2"/>
           </a:solidFill>
           <a:ln>
             <a:noFill/>
@@ -4705,12 +4778,47 @@
           </a:p>
         </p:txBody>
       </p:sp>
+      <p:sp>
+        <p:nvSpPr>
+          <p:cNvPr id="2" name="Title 1">
+            <a:extLst>
+              <a:ext uri="{FF2B5EF4-FFF2-40B4-BE49-F238E27FC236}">
+                <a16:creationId xmlns:a16="http://schemas.microsoft.com/office/drawing/2014/main" id="{345AFCFD-EAD7-8646-3971-5453554EDE80}"/>
+              </a:ext>
+            </a:extLst>
+          </p:cNvPr>
+          <p:cNvSpPr>
+            <a:spLocks noGrp="1"/>
+          </p:cNvSpPr>
+          <p:nvPr>
+            <p:ph type="title"/>
+          </p:nvPr>
+        </p:nvSpPr>
+        <p:spPr>
+          <a:xfrm>
+            <a:off x="705520" y="370657"/>
+            <a:ext cx="4486656" cy="1645920"/>
+          </a:xfrm>
+        </p:spPr>
+        <p:txBody>
+          <a:bodyPr vert="horz" lIns="274320" tIns="182880" rIns="274320" bIns="182880" rtlCol="0" anchor="ctr" anchorCtr="1">
+            <a:normAutofit/>
+          </a:bodyPr>
+          <a:lstStyle/>
+          <a:p>
+            <a:r>
+              <a:rPr lang="en-US" sz="3200" dirty="0"/>
+              <a:t>Colored Triangle</a:t>
+            </a:r>
+          </a:p>
+        </p:txBody>
+      </p:sp>
       <p:sp useBgFill="1">
         <p:nvSpPr>
-          <p:cNvPr id="10" name="Rectangle 9">
-            <a:extLst>
-              <a:ext uri="{FF2B5EF4-FFF2-40B4-BE49-F238E27FC236}">
-                <a16:creationId xmlns:a16="http://schemas.microsoft.com/office/drawing/2014/main" id="{0D65299F-028F-4AFC-B46A-8DB33E20FE4A}"/>
+          <p:cNvPr id="14" name="Rectangle 13">
+            <a:extLst>
+              <a:ext uri="{FF2B5EF4-FFF2-40B4-BE49-F238E27FC236}">
+                <a16:creationId xmlns:a16="http://schemas.microsoft.com/office/drawing/2014/main" id="{639AF048-01BF-4742-B8D3-428C27C1584E}"/>
               </a:ext>
               <a:ext uri="{C183D7F6-B498-43B3-948B-1728B52AA6E4}">
                 <adec:decorative xmlns:adec="http://schemas.microsoft.com/office/drawing/2017/decorative" val="1"/>
@@ -4730,8 +4838,8 @@
         </p:nvSpPr>
         <p:spPr>
           <a:xfrm>
-            <a:off x="3070172" y="0"/>
-            <a:ext cx="9121828" cy="6858000"/>
+            <a:off x="6096000" y="0"/>
+            <a:ext cx="6095999" cy="6858000"/>
           </a:xfrm>
           <a:prstGeom prst="rect">
             <a:avLst/>
@@ -4765,194 +4873,12 @@
           </a:p>
         </p:txBody>
       </p:sp>
-      <p:sp>
-        <p:nvSpPr>
-          <p:cNvPr id="12" name="Oval 11">
-            <a:extLst>
-              <a:ext uri="{FF2B5EF4-FFF2-40B4-BE49-F238E27FC236}">
-                <a16:creationId xmlns:a16="http://schemas.microsoft.com/office/drawing/2014/main" id="{BAC87F6E-526A-49B5-995D-42DB656594C9}"/>
-              </a:ext>
-              <a:ext uri="{C183D7F6-B498-43B3-948B-1728B52AA6E4}">
-                <adec:decorative xmlns:adec="http://schemas.microsoft.com/office/drawing/2017/decorative" val="1"/>
-              </a:ext>
-            </a:extLst>
-          </p:cNvPr>
-          <p:cNvSpPr>
-            <a:spLocks noGrp="1" noRot="1" noChangeAspect="1" noMove="1" noResize="1" noEditPoints="1" noAdjustHandles="1" noChangeArrowheads="1" noChangeShapeType="1" noTextEdit="1"/>
-          </p:cNvSpPr>
-          <p:nvPr>
-            <p:extLst>
-              <p:ext uri="{386F3935-93C4-4BCD-93E2-E3B085C9AB24}">
-                <p16:designElem xmlns:p16="http://schemas.microsoft.com/office/powerpoint/2015/main" val="1"/>
-              </p:ext>
-            </p:extLst>
-          </p:nvPr>
-        </p:nvSpPr>
-        <p:spPr>
-          <a:xfrm>
-            <a:off x="1117423" y="1443035"/>
-            <a:ext cx="3971932" cy="3971930"/>
-          </a:xfrm>
-          <a:prstGeom prst="ellipse">
-            <a:avLst/>
-          </a:prstGeom>
-          <a:solidFill>
-            <a:srgbClr val="FFFFFF"/>
-          </a:solidFill>
-          <a:ln w="31750">
-            <a:solidFill>
-              <a:schemeClr val="accent2">
-                <a:lumMod val="75000"/>
-              </a:schemeClr>
-            </a:solidFill>
-          </a:ln>
-        </p:spPr>
-        <p:style>
-          <a:lnRef idx="2">
-            <a:schemeClr val="accent1">
-              <a:shade val="50000"/>
-            </a:schemeClr>
-          </a:lnRef>
-          <a:fillRef idx="1">
-            <a:schemeClr val="accent1"/>
-          </a:fillRef>
-          <a:effectRef idx="0">
-            <a:schemeClr val="accent1"/>
-          </a:effectRef>
-          <a:fontRef idx="minor">
-            <a:schemeClr val="lt1"/>
-          </a:fontRef>
-        </p:style>
-        <p:txBody>
-          <a:bodyPr rtlCol="0" anchor="ctr"/>
-          <a:lstStyle/>
-          <a:p>
-            <a:pPr algn="ctr"/>
-            <a:endParaRPr lang="en-US"/>
-          </a:p>
-        </p:txBody>
-      </p:sp>
-      <p:sp>
-        <p:nvSpPr>
-          <p:cNvPr id="2" name="Title 1">
-            <a:extLst>
-              <a:ext uri="{FF2B5EF4-FFF2-40B4-BE49-F238E27FC236}">
-                <a16:creationId xmlns:a16="http://schemas.microsoft.com/office/drawing/2014/main" id="{83EE997A-2346-F0D9-BBBD-34A5651C6605}"/>
-              </a:ext>
-            </a:extLst>
-          </p:cNvPr>
-          <p:cNvSpPr>
-            <a:spLocks noGrp="1"/>
-          </p:cNvSpPr>
-          <p:nvPr>
-            <p:ph type="title"/>
-          </p:nvPr>
-        </p:nvSpPr>
-        <p:spPr>
-          <a:xfrm>
-            <a:off x="1260873" y="1586484"/>
-            <a:ext cx="3685032" cy="3685032"/>
-          </a:xfrm>
-          <a:prstGeom prst="ellipse">
-            <a:avLst/>
-          </a:prstGeom>
-          <a:solidFill>
-            <a:schemeClr val="accent2">
-              <a:lumMod val="75000"/>
-            </a:schemeClr>
-          </a:solidFill>
-          <a:ln>
-            <a:noFill/>
-          </a:ln>
-        </p:spPr>
-        <p:txBody>
-          <a:bodyPr>
-            <a:normAutofit/>
-          </a:bodyPr>
-          <a:lstStyle/>
-          <a:p>
-            <a:r>
-              <a:rPr lang="en-US" sz="3000" dirty="0">
-                <a:solidFill>
-                  <a:srgbClr val="FFFFFF"/>
-                </a:solidFill>
-              </a:rPr>
-              <a:t>Colored Hexagon</a:t>
-            </a:r>
-          </a:p>
-        </p:txBody>
-      </p:sp>
-      <p:sp>
-        <p:nvSpPr>
-          <p:cNvPr id="3" name="Content Placeholder 2">
-            <a:extLst>
-              <a:ext uri="{FF2B5EF4-FFF2-40B4-BE49-F238E27FC236}">
-                <a16:creationId xmlns:a16="http://schemas.microsoft.com/office/drawing/2014/main" id="{73EB9ECB-F855-4D33-8653-1E1308A435DC}"/>
-              </a:ext>
-            </a:extLst>
-          </p:cNvPr>
-          <p:cNvSpPr>
-            <a:spLocks noGrp="1"/>
-          </p:cNvSpPr>
-          <p:nvPr>
-            <p:ph idx="1"/>
-          </p:nvPr>
-        </p:nvSpPr>
-        <p:spPr>
-          <a:xfrm>
-            <a:off x="5232805" y="1443034"/>
-            <a:ext cx="6959195" cy="4012885"/>
-          </a:xfrm>
-        </p:spPr>
-        <p:txBody>
-          <a:bodyPr anchor="ctr">
-            <a:normAutofit/>
-          </a:bodyPr>
-          <a:lstStyle/>
-          <a:p>
-            <a:r>
-              <a:rPr lang="en-US" sz="2400" dirty="0"/>
-              <a:t>2 ways to change the Turtle’s color:</a:t>
-            </a:r>
-          </a:p>
-          <a:p>
-            <a:endParaRPr lang="en-US" sz="2400" dirty="0">
-              <a:latin typeface="Courier New" panose="02070309020205020404" pitchFamily="49" charset="0"/>
-              <a:cs typeface="Courier New" panose="02070309020205020404" pitchFamily="49" charset="0"/>
-            </a:endParaRPr>
-          </a:p>
-          <a:p>
-            <a:pPr marL="0" indent="0">
-              <a:buNone/>
-            </a:pPr>
-            <a:r>
-              <a:rPr lang="en-US" sz="2400" dirty="0">
-                <a:latin typeface="Courier New" panose="02070309020205020404" pitchFamily="49" charset="0"/>
-                <a:cs typeface="Courier New" panose="02070309020205020404" pitchFamily="49" charset="0"/>
-              </a:rPr>
-              <a:t>color(“red”)</a:t>
-            </a:r>
-          </a:p>
-          <a:p>
-            <a:pPr marL="0" indent="0">
-              <a:buNone/>
-            </a:pPr>
-            <a:r>
-              <a:rPr lang="en-US" sz="2400" dirty="0">
-                <a:latin typeface="Courier New" panose="02070309020205020404" pitchFamily="49" charset="0"/>
-                <a:cs typeface="Courier New" panose="02070309020205020404" pitchFamily="49" charset="0"/>
-              </a:rPr>
-              <a:t>color(r, g, b) e.g., color(255, 0, 0)</a:t>
-            </a:r>
-          </a:p>
-        </p:txBody>
-      </p:sp>
       <p:cxnSp>
         <p:nvCxnSpPr>
-          <p:cNvPr id="5" name="Straight Arrow Connector 4">
-            <a:extLst>
-              <a:ext uri="{FF2B5EF4-FFF2-40B4-BE49-F238E27FC236}">
-                <a16:creationId xmlns:a16="http://schemas.microsoft.com/office/drawing/2014/main" id="{A142B2D3-8E7B-550D-81E5-46831DD2916B}"/>
+          <p:cNvPr id="9" name="Straight Arrow Connector 8">
+            <a:extLst>
+              <a:ext uri="{FF2B5EF4-FFF2-40B4-BE49-F238E27FC236}">
+                <a16:creationId xmlns:a16="http://schemas.microsoft.com/office/drawing/2014/main" id="{D21B1012-541C-1480-7615-DA11E9E1FDC2}"/>
               </a:ext>
             </a:extLst>
           </p:cNvPr>
@@ -4963,8 +4889,8 @@
         </p:nvCxnSpPr>
         <p:spPr>
           <a:xfrm flipV="1">
-            <a:off x="9485523" y="4362680"/>
-            <a:ext cx="969117" cy="672029"/>
+            <a:off x="5867400" y="4312920"/>
+            <a:ext cx="1894332" cy="1341120"/>
           </a:xfrm>
           <a:prstGeom prst="straightConnector1">
             <a:avLst/>
@@ -4990,426 +4916,6 @@
       </p:cxnSp>
       <p:sp>
         <p:nvSpPr>
-          <p:cNvPr id="6" name="TextBox 5">
-            <a:extLst>
-              <a:ext uri="{FF2B5EF4-FFF2-40B4-BE49-F238E27FC236}">
-                <a16:creationId xmlns:a16="http://schemas.microsoft.com/office/drawing/2014/main" id="{CAC290CB-7289-6DFD-435B-0365B9951391}"/>
-              </a:ext>
-            </a:extLst>
-          </p:cNvPr>
-          <p:cNvSpPr txBox="1"/>
-          <p:nvPr/>
-        </p:nvSpPr>
-        <p:spPr>
-          <a:xfrm>
-            <a:off x="8228656" y="5034709"/>
-            <a:ext cx="3323539" cy="369332"/>
-          </a:xfrm>
-          <a:prstGeom prst="rect">
-            <a:avLst/>
-          </a:prstGeom>
-          <a:noFill/>
-        </p:spPr>
-        <p:txBody>
-          <a:bodyPr wrap="none" rtlCol="0">
-            <a:spAutoFit/>
-          </a:bodyPr>
-          <a:lstStyle/>
-          <a:p>
-            <a:r>
-              <a:rPr lang="en-US" dirty="0"/>
-              <a:t>Integer values between 0 and 255</a:t>
-            </a:r>
-          </a:p>
-        </p:txBody>
-      </p:sp>
-      <p:cxnSp>
-        <p:nvCxnSpPr>
-          <p:cNvPr id="11" name="Straight Arrow Connector 10">
-            <a:extLst>
-              <a:ext uri="{FF2B5EF4-FFF2-40B4-BE49-F238E27FC236}">
-                <a16:creationId xmlns:a16="http://schemas.microsoft.com/office/drawing/2014/main" id="{030BD3D5-C857-76AA-71D6-9A7518D6982A}"/>
-              </a:ext>
-            </a:extLst>
-          </p:cNvPr>
-          <p:cNvCxnSpPr/>
-          <p:nvPr/>
-        </p:nvCxnSpPr>
-        <p:spPr>
-          <a:xfrm flipH="1">
-            <a:off x="7680960" y="3291840"/>
-            <a:ext cx="1234440" cy="137160"/>
-          </a:xfrm>
-          <a:prstGeom prst="straightConnector1">
-            <a:avLst/>
-          </a:prstGeom>
-          <a:ln>
-            <a:tailEnd type="triangle"/>
-          </a:ln>
-        </p:spPr>
-        <p:style>
-          <a:lnRef idx="1">
-            <a:schemeClr val="accent1"/>
-          </a:lnRef>
-          <a:fillRef idx="0">
-            <a:schemeClr val="accent1"/>
-          </a:fillRef>
-          <a:effectRef idx="0">
-            <a:schemeClr val="accent1"/>
-          </a:effectRef>
-          <a:fontRef idx="minor">
-            <a:schemeClr val="tx1"/>
-          </a:fontRef>
-        </p:style>
-      </p:cxnSp>
-      <p:sp>
-        <p:nvSpPr>
-          <p:cNvPr id="13" name="TextBox 12">
-            <a:extLst>
-              <a:ext uri="{FF2B5EF4-FFF2-40B4-BE49-F238E27FC236}">
-                <a16:creationId xmlns:a16="http://schemas.microsoft.com/office/drawing/2014/main" id="{E106CFB8-9FE1-185F-5F37-C1ED83BC1A89}"/>
-              </a:ext>
-            </a:extLst>
-          </p:cNvPr>
-          <p:cNvSpPr txBox="1"/>
-          <p:nvPr/>
-        </p:nvSpPr>
-        <p:spPr>
-          <a:xfrm>
-            <a:off x="8898664" y="2960599"/>
-            <a:ext cx="705642" cy="369332"/>
-          </a:xfrm>
-          <a:prstGeom prst="rect">
-            <a:avLst/>
-          </a:prstGeom>
-          <a:noFill/>
-        </p:spPr>
-        <p:txBody>
-          <a:bodyPr wrap="none" rtlCol="0">
-            <a:spAutoFit/>
-          </a:bodyPr>
-          <a:lstStyle/>
-          <a:p>
-            <a:r>
-              <a:rPr lang="en-US" dirty="0"/>
-              <a:t>string</a:t>
-            </a:r>
-          </a:p>
-        </p:txBody>
-      </p:sp>
-      <p:cxnSp>
-        <p:nvCxnSpPr>
-          <p:cNvPr id="15" name="Straight Arrow Connector 14">
-            <a:extLst>
-              <a:ext uri="{FF2B5EF4-FFF2-40B4-BE49-F238E27FC236}">
-                <a16:creationId xmlns:a16="http://schemas.microsoft.com/office/drawing/2014/main" id="{10AC9585-673F-D0BF-2FFD-0C2CF2F1B374}"/>
-              </a:ext>
-            </a:extLst>
-          </p:cNvPr>
-          <p:cNvCxnSpPr/>
-          <p:nvPr/>
-        </p:nvCxnSpPr>
-        <p:spPr>
-          <a:xfrm flipV="1">
-            <a:off x="6537960" y="4362680"/>
-            <a:ext cx="472440" cy="1093239"/>
-          </a:xfrm>
-          <a:prstGeom prst="straightConnector1">
-            <a:avLst/>
-          </a:prstGeom>
-          <a:ln>
-            <a:tailEnd type="triangle"/>
-          </a:ln>
-        </p:spPr>
-        <p:style>
-          <a:lnRef idx="1">
-            <a:schemeClr val="accent1"/>
-          </a:lnRef>
-          <a:fillRef idx="0">
-            <a:schemeClr val="accent1"/>
-          </a:fillRef>
-          <a:effectRef idx="0">
-            <a:schemeClr val="accent1"/>
-          </a:effectRef>
-          <a:fontRef idx="minor">
-            <a:schemeClr val="tx1"/>
-          </a:fontRef>
-        </p:style>
-      </p:cxnSp>
-      <p:sp>
-        <p:nvSpPr>
-          <p:cNvPr id="16" name="TextBox 15">
-            <a:extLst>
-              <a:ext uri="{FF2B5EF4-FFF2-40B4-BE49-F238E27FC236}">
-                <a16:creationId xmlns:a16="http://schemas.microsoft.com/office/drawing/2014/main" id="{81035D3A-098D-FBD7-90B3-2EFFFCDB1F10}"/>
-              </a:ext>
-            </a:extLst>
-          </p:cNvPr>
-          <p:cNvSpPr txBox="1"/>
-          <p:nvPr/>
-        </p:nvSpPr>
-        <p:spPr>
-          <a:xfrm>
-            <a:off x="6050280" y="5455919"/>
-            <a:ext cx="1106393" cy="369332"/>
-          </a:xfrm>
-          <a:prstGeom prst="rect">
-            <a:avLst/>
-          </a:prstGeom>
-          <a:noFill/>
-        </p:spPr>
-        <p:txBody>
-          <a:bodyPr wrap="none" rtlCol="0">
-            <a:spAutoFit/>
-          </a:bodyPr>
-          <a:lstStyle/>
-          <a:p>
-            <a:r>
-              <a:rPr lang="en-US" dirty="0"/>
-              <a:t>3 integers</a:t>
-            </a:r>
-          </a:p>
-        </p:txBody>
-      </p:sp>
-    </p:spTree>
-    <p:extLst>
-      <p:ext uri="{BB962C8B-B14F-4D97-AF65-F5344CB8AC3E}">
-        <p14:creationId xmlns:p14="http://schemas.microsoft.com/office/powerpoint/2010/main" val="1433680787"/>
-      </p:ext>
-    </p:extLst>
-  </p:cSld>
-  <p:clrMapOvr>
-    <a:masterClrMapping/>
-  </p:clrMapOvr>
-</p:sld>
-</file>
-
-<file path=ppt/slides/slide12.xml><?xml version="1.0" encoding="utf-8"?>
-<p:sld xmlns:a="http://schemas.openxmlformats.org/drawingml/2006/main" xmlns:r="http://schemas.openxmlformats.org/officeDocument/2006/relationships" xmlns:p="http://schemas.openxmlformats.org/presentationml/2006/main">
-  <p:cSld>
-    <p:bg>
-      <p:bgPr>
-        <a:solidFill>
-          <a:schemeClr val="bg1"/>
-        </a:solidFill>
-        <a:effectLst/>
-      </p:bgPr>
-    </p:bg>
-    <p:spTree>
-      <p:nvGrpSpPr>
-        <p:cNvPr id="1" name=""/>
-        <p:cNvGrpSpPr/>
-        <p:nvPr/>
-      </p:nvGrpSpPr>
-      <p:grpSpPr>
-        <a:xfrm>
-          <a:off x="0" y="0"/>
-          <a:ext cx="0" cy="0"/>
-          <a:chOff x="0" y="0"/>
-          <a:chExt cx="0" cy="0"/>
-        </a:xfrm>
-      </p:grpSpPr>
-      <p:sp>
-        <p:nvSpPr>
-          <p:cNvPr id="12" name="Rectangle 11">
-            <a:extLst>
-              <a:ext uri="{FF2B5EF4-FFF2-40B4-BE49-F238E27FC236}">
-                <a16:creationId xmlns:a16="http://schemas.microsoft.com/office/drawing/2014/main" id="{CEAD0FD2-AF9A-4626-A717-49B022352DB8}"/>
-              </a:ext>
-              <a:ext uri="{C183D7F6-B498-43B3-948B-1728B52AA6E4}">
-                <adec:decorative xmlns:adec="http://schemas.microsoft.com/office/drawing/2017/decorative" val="1"/>
-              </a:ext>
-            </a:extLst>
-          </p:cNvPr>
-          <p:cNvSpPr>
-            <a:spLocks noGrp="1" noRot="1" noChangeAspect="1" noMove="1" noResize="1" noEditPoints="1" noAdjustHandles="1" noChangeArrowheads="1" noChangeShapeType="1" noTextEdit="1"/>
-          </p:cNvSpPr>
-          <p:nvPr>
-            <p:extLst>
-              <p:ext uri="{386F3935-93C4-4BCD-93E2-E3B085C9AB24}">
-                <p16:designElem xmlns:p16="http://schemas.microsoft.com/office/powerpoint/2015/main" val="1"/>
-              </p:ext>
-            </p:extLst>
-          </p:nvPr>
-        </p:nvSpPr>
-        <p:spPr>
-          <a:xfrm>
-            <a:off x="0" y="1"/>
-            <a:ext cx="6092951" cy="6858000"/>
-          </a:xfrm>
-          <a:prstGeom prst="rect">
-            <a:avLst/>
-          </a:prstGeom>
-          <a:solidFill>
-            <a:schemeClr val="accent2"/>
-          </a:solidFill>
-          <a:ln>
-            <a:noFill/>
-          </a:ln>
-        </p:spPr>
-        <p:style>
-          <a:lnRef idx="2">
-            <a:schemeClr val="accent1">
-              <a:shade val="50000"/>
-            </a:schemeClr>
-          </a:lnRef>
-          <a:fillRef idx="1">
-            <a:schemeClr val="accent1"/>
-          </a:fillRef>
-          <a:effectRef idx="0">
-            <a:schemeClr val="accent1"/>
-          </a:effectRef>
-          <a:fontRef idx="minor">
-            <a:schemeClr val="lt1"/>
-          </a:fontRef>
-        </p:style>
-        <p:txBody>
-          <a:bodyPr rtlCol="0" anchor="ctr"/>
-          <a:lstStyle/>
-          <a:p>
-            <a:pPr algn="ctr"/>
-            <a:endParaRPr lang="en-US"/>
-          </a:p>
-        </p:txBody>
-      </p:sp>
-      <p:sp>
-        <p:nvSpPr>
-          <p:cNvPr id="2" name="Title 1">
-            <a:extLst>
-              <a:ext uri="{FF2B5EF4-FFF2-40B4-BE49-F238E27FC236}">
-                <a16:creationId xmlns:a16="http://schemas.microsoft.com/office/drawing/2014/main" id="{345AFCFD-EAD7-8646-3971-5453554EDE80}"/>
-              </a:ext>
-            </a:extLst>
-          </p:cNvPr>
-          <p:cNvSpPr>
-            <a:spLocks noGrp="1"/>
-          </p:cNvSpPr>
-          <p:nvPr>
-            <p:ph type="title"/>
-          </p:nvPr>
-        </p:nvSpPr>
-        <p:spPr>
-          <a:xfrm>
-            <a:off x="705520" y="370657"/>
-            <a:ext cx="4486656" cy="1645920"/>
-          </a:xfrm>
-        </p:spPr>
-        <p:txBody>
-          <a:bodyPr vert="horz" lIns="274320" tIns="182880" rIns="274320" bIns="182880" rtlCol="0" anchor="ctr" anchorCtr="1">
-            <a:normAutofit/>
-          </a:bodyPr>
-          <a:lstStyle/>
-          <a:p>
-            <a:r>
-              <a:rPr lang="en-US" sz="3200" dirty="0"/>
-              <a:t>Colored Triangle</a:t>
-            </a:r>
-          </a:p>
-        </p:txBody>
-      </p:sp>
-      <p:sp useBgFill="1">
-        <p:nvSpPr>
-          <p:cNvPr id="14" name="Rectangle 13">
-            <a:extLst>
-              <a:ext uri="{FF2B5EF4-FFF2-40B4-BE49-F238E27FC236}">
-                <a16:creationId xmlns:a16="http://schemas.microsoft.com/office/drawing/2014/main" id="{639AF048-01BF-4742-B8D3-428C27C1584E}"/>
-              </a:ext>
-              <a:ext uri="{C183D7F6-B498-43B3-948B-1728B52AA6E4}">
-                <adec:decorative xmlns:adec="http://schemas.microsoft.com/office/drawing/2017/decorative" val="1"/>
-              </a:ext>
-            </a:extLst>
-          </p:cNvPr>
-          <p:cNvSpPr>
-            <a:spLocks noGrp="1" noRot="1" noChangeAspect="1" noMove="1" noResize="1" noEditPoints="1" noAdjustHandles="1" noChangeArrowheads="1" noChangeShapeType="1" noTextEdit="1"/>
-          </p:cNvSpPr>
-          <p:nvPr>
-            <p:extLst>
-              <p:ext uri="{386F3935-93C4-4BCD-93E2-E3B085C9AB24}">
-                <p16:designElem xmlns:p16="http://schemas.microsoft.com/office/powerpoint/2015/main" val="1"/>
-              </p:ext>
-            </p:extLst>
-          </p:nvPr>
-        </p:nvSpPr>
-        <p:spPr>
-          <a:xfrm>
-            <a:off x="6096000" y="0"/>
-            <a:ext cx="6095999" cy="6858000"/>
-          </a:xfrm>
-          <a:prstGeom prst="rect">
-            <a:avLst/>
-          </a:prstGeom>
-          <a:ln>
-            <a:noFill/>
-          </a:ln>
-        </p:spPr>
-        <p:style>
-          <a:lnRef idx="2">
-            <a:schemeClr val="accent1">
-              <a:shade val="50000"/>
-            </a:schemeClr>
-          </a:lnRef>
-          <a:fillRef idx="1">
-            <a:schemeClr val="accent1"/>
-          </a:fillRef>
-          <a:effectRef idx="0">
-            <a:schemeClr val="accent1"/>
-          </a:effectRef>
-          <a:fontRef idx="minor">
-            <a:schemeClr val="lt1"/>
-          </a:fontRef>
-        </p:style>
-        <p:txBody>
-          <a:bodyPr rtlCol="0" anchor="ctr"/>
-          <a:lstStyle/>
-          <a:p>
-            <a:pPr algn="ctr"/>
-            <a:endParaRPr lang="en-US"/>
-          </a:p>
-        </p:txBody>
-      </p:sp>
-      <p:cxnSp>
-        <p:nvCxnSpPr>
-          <p:cNvPr id="9" name="Straight Arrow Connector 8">
-            <a:extLst>
-              <a:ext uri="{FF2B5EF4-FFF2-40B4-BE49-F238E27FC236}">
-                <a16:creationId xmlns:a16="http://schemas.microsoft.com/office/drawing/2014/main" id="{D21B1012-541C-1480-7615-DA11E9E1FDC2}"/>
-              </a:ext>
-            </a:extLst>
-          </p:cNvPr>
-          <p:cNvCxnSpPr>
-            <a:cxnSpLocks/>
-          </p:cNvCxnSpPr>
-          <p:nvPr/>
-        </p:nvCxnSpPr>
-        <p:spPr>
-          <a:xfrm flipV="1">
-            <a:off x="5867400" y="4312920"/>
-            <a:ext cx="1894332" cy="1341120"/>
-          </a:xfrm>
-          <a:prstGeom prst="straightConnector1">
-            <a:avLst/>
-          </a:prstGeom>
-          <a:ln>
-            <a:tailEnd type="triangle"/>
-          </a:ln>
-        </p:spPr>
-        <p:style>
-          <a:lnRef idx="1">
-            <a:schemeClr val="accent1"/>
-          </a:lnRef>
-          <a:fillRef idx="0">
-            <a:schemeClr val="accent1"/>
-          </a:fillRef>
-          <a:effectRef idx="0">
-            <a:schemeClr val="accent1"/>
-          </a:effectRef>
-          <a:fontRef idx="minor">
-            <a:schemeClr val="tx1"/>
-          </a:fontRef>
-        </p:style>
-      </p:cxnSp>
-      <p:sp>
-        <p:nvSpPr>
           <p:cNvPr id="10" name="TextBox 9">
             <a:extLst>
               <a:ext uri="{FF2B5EF4-FFF2-40B4-BE49-F238E27FC236}">
@@ -5559,7 +5065,7 @@
 </p:sld>
 </file>
 
-<file path=ppt/slides/slide13.xml><?xml version="1.0" encoding="utf-8"?>
+<file path=ppt/slides/slide12.xml><?xml version="1.0" encoding="utf-8"?>
 <p:sld xmlns:a="http://schemas.openxmlformats.org/drawingml/2006/main" xmlns:r="http://schemas.openxmlformats.org/officeDocument/2006/relationships" xmlns:p="http://schemas.openxmlformats.org/presentationml/2006/main">
   <p:cSld>
     <p:spTree>
@@ -5744,7 +5250,7 @@
 </p:sld>
 </file>
 
-<file path=ppt/slides/slide14.xml><?xml version="1.0" encoding="utf-8"?>
+<file path=ppt/slides/slide13.xml><?xml version="1.0" encoding="utf-8"?>
 <p:sld xmlns:a="http://schemas.openxmlformats.org/drawingml/2006/main" xmlns:r="http://schemas.openxmlformats.org/officeDocument/2006/relationships" xmlns:p="http://schemas.openxmlformats.org/presentationml/2006/main">
   <p:cSld>
     <p:spTree>
@@ -5896,7 +5402,7 @@
 </p:sld>
 </file>
 
-<file path=ppt/slides/slide15.xml><?xml version="1.0" encoding="utf-8"?>
+<file path=ppt/slides/slide14.xml><?xml version="1.0" encoding="utf-8"?>
 <p:sld xmlns:a="http://schemas.openxmlformats.org/drawingml/2006/main" xmlns:r="http://schemas.openxmlformats.org/officeDocument/2006/relationships" xmlns:p="http://schemas.openxmlformats.org/presentationml/2006/main">
   <p:cSld>
     <p:spTree>
@@ -6029,6 +5535,189 @@
     <p:extLst>
       <p:ext uri="{BB962C8B-B14F-4D97-AF65-F5344CB8AC3E}">
         <p14:creationId xmlns:p14="http://schemas.microsoft.com/office/powerpoint/2010/main" val="3477598575"/>
+      </p:ext>
+    </p:extLst>
+  </p:cSld>
+  <p:clrMapOvr>
+    <a:masterClrMapping/>
+  </p:clrMapOvr>
+</p:sld>
+</file>
+
+<file path=ppt/slides/slide15.xml><?xml version="1.0" encoding="utf-8"?>
+<p:sld xmlns:a="http://schemas.openxmlformats.org/drawingml/2006/main" xmlns:r="http://schemas.openxmlformats.org/officeDocument/2006/relationships" xmlns:p="http://schemas.openxmlformats.org/presentationml/2006/main">
+  <p:cSld>
+    <p:spTree>
+      <p:nvGrpSpPr>
+        <p:cNvPr id="1" name=""/>
+        <p:cNvGrpSpPr/>
+        <p:nvPr/>
+      </p:nvGrpSpPr>
+      <p:grpSpPr>
+        <a:xfrm>
+          <a:off x="0" y="0"/>
+          <a:ext cx="0" cy="0"/>
+          <a:chOff x="0" y="0"/>
+          <a:chExt cx="0" cy="0"/>
+        </a:xfrm>
+      </p:grpSpPr>
+      <p:sp>
+        <p:nvSpPr>
+          <p:cNvPr id="2" name="Title 1">
+            <a:extLst>
+              <a:ext uri="{FF2B5EF4-FFF2-40B4-BE49-F238E27FC236}">
+                <a16:creationId xmlns:a16="http://schemas.microsoft.com/office/drawing/2014/main" id="{9F4C2E56-A309-CD34-AACB-1F8845B47FBD}"/>
+              </a:ext>
+            </a:extLst>
+          </p:cNvPr>
+          <p:cNvSpPr>
+            <a:spLocks noGrp="1"/>
+          </p:cNvSpPr>
+          <p:nvPr>
+            <p:ph type="title"/>
+          </p:nvPr>
+        </p:nvSpPr>
+        <p:spPr/>
+        <p:txBody>
+          <a:bodyPr/>
+          <a:lstStyle/>
+          <a:p>
+            <a:r>
+              <a:rPr lang="en-US" dirty="0"/>
+              <a:t>What are the patterns?</a:t>
+            </a:r>
+          </a:p>
+        </p:txBody>
+      </p:sp>
+      <p:sp>
+        <p:nvSpPr>
+          <p:cNvPr id="3" name="Content Placeholder 2">
+            <a:extLst>
+              <a:ext uri="{FF2B5EF4-FFF2-40B4-BE49-F238E27FC236}">
+                <a16:creationId xmlns:a16="http://schemas.microsoft.com/office/drawing/2014/main" id="{F149E1A7-AFA5-C523-3540-5C1FDC7C71D0}"/>
+              </a:ext>
+            </a:extLst>
+          </p:cNvPr>
+          <p:cNvSpPr>
+            <a:spLocks noGrp="1"/>
+          </p:cNvSpPr>
+          <p:nvPr>
+            <p:ph idx="1"/>
+          </p:nvPr>
+        </p:nvSpPr>
+        <p:spPr>
+          <a:xfrm>
+            <a:off x="2231135" y="2638044"/>
+            <a:ext cx="5508607" cy="3762756"/>
+          </a:xfrm>
+        </p:spPr>
+        <p:txBody>
+          <a:bodyPr>
+            <a:normAutofit lnSpcReduction="10000"/>
+          </a:bodyPr>
+          <a:lstStyle/>
+          <a:p>
+            <a:r>
+              <a:rPr lang="en-US" dirty="0"/>
+              <a:t>The colors have a pattern too that we can use.</a:t>
+            </a:r>
+          </a:p>
+          <a:p>
+            <a:r>
+              <a:rPr lang="en-US" dirty="0"/>
+              <a:t>Consider that the first side is the top side and call it </a:t>
+            </a:r>
+          </a:p>
+          <a:p>
+            <a:pPr lvl="2"/>
+            <a:r>
+              <a:rPr lang="en-US" dirty="0"/>
+              <a:t>Side 1 – Red</a:t>
+            </a:r>
+          </a:p>
+          <a:p>
+            <a:pPr lvl="2"/>
+            <a:r>
+              <a:rPr lang="en-US" dirty="0"/>
+              <a:t>Side 2 – Blue</a:t>
+            </a:r>
+          </a:p>
+          <a:p>
+            <a:pPr lvl="2"/>
+            <a:r>
+              <a:rPr lang="en-US" dirty="0"/>
+              <a:t>Side 3 – Red …</a:t>
+            </a:r>
+          </a:p>
+          <a:p>
+            <a:pPr lvl="1"/>
+            <a:r>
+              <a:rPr lang="en-US" dirty="0"/>
+              <a:t>Odd numbered sides are red</a:t>
+            </a:r>
+          </a:p>
+          <a:p>
+            <a:pPr lvl="1"/>
+            <a:r>
+              <a:rPr lang="en-US" dirty="0"/>
+              <a:t>Even numbered sides are blue </a:t>
+            </a:r>
+          </a:p>
+          <a:p>
+            <a:r>
+              <a:rPr lang="en-CA" dirty="0"/>
+              <a:t>Pattern recognition:</a:t>
+            </a:r>
+          </a:p>
+          <a:p>
+            <a:pPr lvl="1"/>
+            <a:r>
+              <a:rPr lang="en-US" dirty="0"/>
+              <a:t>Essentially the problem “Decomposes” drawing each side and keeping a count of the side we are on so we can determine if it is even or odd</a:t>
+            </a:r>
+          </a:p>
+          <a:p>
+            <a:endParaRPr lang="en-US" dirty="0"/>
+          </a:p>
+          <a:p>
+            <a:endParaRPr lang="en-US" dirty="0"/>
+          </a:p>
+        </p:txBody>
+      </p:sp>
+      <p:pic>
+        <p:nvPicPr>
+          <p:cNvPr id="4" name="Picture 3">
+            <a:extLst>
+              <a:ext uri="{FF2B5EF4-FFF2-40B4-BE49-F238E27FC236}">
+                <a16:creationId xmlns:a16="http://schemas.microsoft.com/office/drawing/2014/main" id="{854BEB17-8122-E171-93CA-375728904CC6}"/>
+              </a:ext>
+            </a:extLst>
+          </p:cNvPr>
+          <p:cNvPicPr>
+            <a:picLocks noChangeAspect="1"/>
+          </p:cNvPicPr>
+          <p:nvPr/>
+        </p:nvPicPr>
+        <p:blipFill>
+          <a:blip r:embed="rId2"/>
+          <a:stretch>
+            <a:fillRect/>
+          </a:stretch>
+        </p:blipFill>
+        <p:spPr>
+          <a:xfrm>
+            <a:off x="8453382" y="2788752"/>
+            <a:ext cx="3014963" cy="2800566"/>
+          </a:xfrm>
+          <a:prstGeom prst="rect">
+            <a:avLst/>
+          </a:prstGeom>
+        </p:spPr>
+      </p:pic>
+    </p:spTree>
+    <p:extLst>
+      <p:ext uri="{BB962C8B-B14F-4D97-AF65-F5344CB8AC3E}">
+        <p14:creationId xmlns:p14="http://schemas.microsoft.com/office/powerpoint/2010/main" val="2778553707"/>
       </p:ext>
     </p:extLst>
   </p:cSld>
@@ -6060,189 +5749,6 @@
           <p:cNvPr id="2" name="Title 1">
             <a:extLst>
               <a:ext uri="{FF2B5EF4-FFF2-40B4-BE49-F238E27FC236}">
-                <a16:creationId xmlns:a16="http://schemas.microsoft.com/office/drawing/2014/main" id="{9F4C2E56-A309-CD34-AACB-1F8845B47FBD}"/>
-              </a:ext>
-            </a:extLst>
-          </p:cNvPr>
-          <p:cNvSpPr>
-            <a:spLocks noGrp="1"/>
-          </p:cNvSpPr>
-          <p:nvPr>
-            <p:ph type="title"/>
-          </p:nvPr>
-        </p:nvSpPr>
-        <p:spPr/>
-        <p:txBody>
-          <a:bodyPr/>
-          <a:lstStyle/>
-          <a:p>
-            <a:r>
-              <a:rPr lang="en-US" dirty="0"/>
-              <a:t>What are the patterns?</a:t>
-            </a:r>
-          </a:p>
-        </p:txBody>
-      </p:sp>
-      <p:sp>
-        <p:nvSpPr>
-          <p:cNvPr id="3" name="Content Placeholder 2">
-            <a:extLst>
-              <a:ext uri="{FF2B5EF4-FFF2-40B4-BE49-F238E27FC236}">
-                <a16:creationId xmlns:a16="http://schemas.microsoft.com/office/drawing/2014/main" id="{F149E1A7-AFA5-C523-3540-5C1FDC7C71D0}"/>
-              </a:ext>
-            </a:extLst>
-          </p:cNvPr>
-          <p:cNvSpPr>
-            <a:spLocks noGrp="1"/>
-          </p:cNvSpPr>
-          <p:nvPr>
-            <p:ph idx="1"/>
-          </p:nvPr>
-        </p:nvSpPr>
-        <p:spPr>
-          <a:xfrm>
-            <a:off x="2231135" y="2638044"/>
-            <a:ext cx="5508607" cy="3762756"/>
-          </a:xfrm>
-        </p:spPr>
-        <p:txBody>
-          <a:bodyPr>
-            <a:normAutofit lnSpcReduction="10000"/>
-          </a:bodyPr>
-          <a:lstStyle/>
-          <a:p>
-            <a:r>
-              <a:rPr lang="en-US" dirty="0"/>
-              <a:t>The colors have a pattern too that we can use.</a:t>
-            </a:r>
-          </a:p>
-          <a:p>
-            <a:r>
-              <a:rPr lang="en-US" dirty="0"/>
-              <a:t>Consider that the first side is the top side and call it </a:t>
-            </a:r>
-          </a:p>
-          <a:p>
-            <a:pPr lvl="2"/>
-            <a:r>
-              <a:rPr lang="en-US" dirty="0"/>
-              <a:t>Side 1 – Red</a:t>
-            </a:r>
-          </a:p>
-          <a:p>
-            <a:pPr lvl="2"/>
-            <a:r>
-              <a:rPr lang="en-US" dirty="0"/>
-              <a:t>Side 2 – Blue</a:t>
-            </a:r>
-          </a:p>
-          <a:p>
-            <a:pPr lvl="2"/>
-            <a:r>
-              <a:rPr lang="en-US" dirty="0"/>
-              <a:t>Side 3 – Red …</a:t>
-            </a:r>
-          </a:p>
-          <a:p>
-            <a:pPr lvl="1"/>
-            <a:r>
-              <a:rPr lang="en-US" dirty="0"/>
-              <a:t>Odd numbered sides are red</a:t>
-            </a:r>
-          </a:p>
-          <a:p>
-            <a:pPr lvl="1"/>
-            <a:r>
-              <a:rPr lang="en-US" dirty="0"/>
-              <a:t>Even numbered sides are blue </a:t>
-            </a:r>
-          </a:p>
-          <a:p>
-            <a:r>
-              <a:rPr lang="en-CA" dirty="0"/>
-              <a:t>Pattern recognition:</a:t>
-            </a:r>
-          </a:p>
-          <a:p>
-            <a:pPr lvl="1"/>
-            <a:r>
-              <a:rPr lang="en-US" dirty="0"/>
-              <a:t>Essentially the problem “Decomposes” drawing each side and keeping a count of the side we are on so we can determine if it is even or odd</a:t>
-            </a:r>
-          </a:p>
-          <a:p>
-            <a:endParaRPr lang="en-US" dirty="0"/>
-          </a:p>
-          <a:p>
-            <a:endParaRPr lang="en-US" dirty="0"/>
-          </a:p>
-        </p:txBody>
-      </p:sp>
-      <p:pic>
-        <p:nvPicPr>
-          <p:cNvPr id="4" name="Picture 3">
-            <a:extLst>
-              <a:ext uri="{FF2B5EF4-FFF2-40B4-BE49-F238E27FC236}">
-                <a16:creationId xmlns:a16="http://schemas.microsoft.com/office/drawing/2014/main" id="{854BEB17-8122-E171-93CA-375728904CC6}"/>
-              </a:ext>
-            </a:extLst>
-          </p:cNvPr>
-          <p:cNvPicPr>
-            <a:picLocks noChangeAspect="1"/>
-          </p:cNvPicPr>
-          <p:nvPr/>
-        </p:nvPicPr>
-        <p:blipFill>
-          <a:blip r:embed="rId2"/>
-          <a:stretch>
-            <a:fillRect/>
-          </a:stretch>
-        </p:blipFill>
-        <p:spPr>
-          <a:xfrm>
-            <a:off x="8453382" y="2788752"/>
-            <a:ext cx="3014963" cy="2800566"/>
-          </a:xfrm>
-          <a:prstGeom prst="rect">
-            <a:avLst/>
-          </a:prstGeom>
-        </p:spPr>
-      </p:pic>
-    </p:spTree>
-    <p:extLst>
-      <p:ext uri="{BB962C8B-B14F-4D97-AF65-F5344CB8AC3E}">
-        <p14:creationId xmlns:p14="http://schemas.microsoft.com/office/powerpoint/2010/main" val="2778553707"/>
-      </p:ext>
-    </p:extLst>
-  </p:cSld>
-  <p:clrMapOvr>
-    <a:masterClrMapping/>
-  </p:clrMapOvr>
-</p:sld>
-</file>
-
-<file path=ppt/slides/slide17.xml><?xml version="1.0" encoding="utf-8"?>
-<p:sld xmlns:a="http://schemas.openxmlformats.org/drawingml/2006/main" xmlns:r="http://schemas.openxmlformats.org/officeDocument/2006/relationships" xmlns:p="http://schemas.openxmlformats.org/presentationml/2006/main">
-  <p:cSld>
-    <p:spTree>
-      <p:nvGrpSpPr>
-        <p:cNvPr id="1" name=""/>
-        <p:cNvGrpSpPr/>
-        <p:nvPr/>
-      </p:nvGrpSpPr>
-      <p:grpSpPr>
-        <a:xfrm>
-          <a:off x="0" y="0"/>
-          <a:ext cx="0" cy="0"/>
-          <a:chOff x="0" y="0"/>
-          <a:chExt cx="0" cy="0"/>
-        </a:xfrm>
-      </p:grpSpPr>
-      <p:sp>
-        <p:nvSpPr>
-          <p:cNvPr id="2" name="Title 1">
-            <a:extLst>
-              <a:ext uri="{FF2B5EF4-FFF2-40B4-BE49-F238E27FC236}">
                 <a16:creationId xmlns:a16="http://schemas.microsoft.com/office/drawing/2014/main" id="{C6CE4EC1-8886-7BE1-9005-E271534DA3AF}"/>
               </a:ext>
             </a:extLst>
@@ -6330,7 +5836,7 @@
 </p:sld>
 </file>
 
-<file path=ppt/slides/slide18.xml><?xml version="1.0" encoding="utf-8"?>
+<file path=ppt/slides/slide17.xml><?xml version="1.0" encoding="utf-8"?>
 <p:sld xmlns:a="http://schemas.openxmlformats.org/drawingml/2006/main" xmlns:r="http://schemas.openxmlformats.org/officeDocument/2006/relationships" xmlns:p="http://schemas.openxmlformats.org/presentationml/2006/main">
   <p:cSld>
     <p:spTree>
@@ -6458,6 +5964,146 @@
     <p:extLst>
       <p:ext uri="{BB962C8B-B14F-4D97-AF65-F5344CB8AC3E}">
         <p14:creationId xmlns:p14="http://schemas.microsoft.com/office/powerpoint/2010/main" val="3252549178"/>
+      </p:ext>
+    </p:extLst>
+  </p:cSld>
+  <p:clrMapOvr>
+    <a:masterClrMapping/>
+  </p:clrMapOvr>
+</p:sld>
+</file>
+
+<file path=ppt/slides/slide18.xml><?xml version="1.0" encoding="utf-8"?>
+<p:sld xmlns:a="http://schemas.openxmlformats.org/drawingml/2006/main" xmlns:r="http://schemas.openxmlformats.org/officeDocument/2006/relationships" xmlns:p="http://schemas.openxmlformats.org/presentationml/2006/main">
+  <p:cSld>
+    <p:spTree>
+      <p:nvGrpSpPr>
+        <p:cNvPr id="1" name=""/>
+        <p:cNvGrpSpPr/>
+        <p:nvPr/>
+      </p:nvGrpSpPr>
+      <p:grpSpPr>
+        <a:xfrm>
+          <a:off x="0" y="0"/>
+          <a:ext cx="0" cy="0"/>
+          <a:chOff x="0" y="0"/>
+          <a:chExt cx="0" cy="0"/>
+        </a:xfrm>
+      </p:grpSpPr>
+      <p:sp>
+        <p:nvSpPr>
+          <p:cNvPr id="2" name="Title 1">
+            <a:extLst>
+              <a:ext uri="{FF2B5EF4-FFF2-40B4-BE49-F238E27FC236}">
+                <a16:creationId xmlns:a16="http://schemas.microsoft.com/office/drawing/2014/main" id="{01771F57-B333-28E1-8E98-CC56C706977B}"/>
+              </a:ext>
+            </a:extLst>
+          </p:cNvPr>
+          <p:cNvSpPr>
+            <a:spLocks noGrp="1"/>
+          </p:cNvSpPr>
+          <p:nvPr>
+            <p:ph type="title"/>
+          </p:nvPr>
+        </p:nvSpPr>
+        <p:spPr/>
+        <p:txBody>
+          <a:bodyPr/>
+          <a:lstStyle/>
+          <a:p>
+            <a:r>
+              <a:rPr lang="en-US" dirty="0"/>
+              <a:t>Have we solved it before?</a:t>
+            </a:r>
+          </a:p>
+        </p:txBody>
+      </p:sp>
+      <p:sp>
+        <p:nvSpPr>
+          <p:cNvPr id="3" name="Content Placeholder 2">
+            <a:extLst>
+              <a:ext uri="{FF2B5EF4-FFF2-40B4-BE49-F238E27FC236}">
+                <a16:creationId xmlns:a16="http://schemas.microsoft.com/office/drawing/2014/main" id="{6B5B2C50-8E4D-F225-62BB-021F5CD9459F}"/>
+              </a:ext>
+            </a:extLst>
+          </p:cNvPr>
+          <p:cNvSpPr>
+            <a:spLocks noGrp="1"/>
+          </p:cNvSpPr>
+          <p:nvPr>
+            <p:ph idx="1"/>
+          </p:nvPr>
+        </p:nvSpPr>
+        <p:spPr>
+          <a:xfrm>
+            <a:off x="2231136" y="2638044"/>
+            <a:ext cx="7729728" cy="3403527"/>
+          </a:xfrm>
+        </p:spPr>
+        <p:txBody>
+          <a:bodyPr>
+            <a:normAutofit/>
+          </a:bodyPr>
+          <a:lstStyle/>
+          <a:p>
+            <a:r>
+              <a:rPr lang="en-US" dirty="0"/>
+              <a:t>Logic: We need the following:</a:t>
+            </a:r>
+          </a:p>
+          <a:p>
+            <a:pPr lvl="1"/>
+            <a:r>
+              <a:rPr lang="en-US" dirty="0"/>
+              <a:t>If side is odd -1 remainder - then r is 255 and the rest are 0.</a:t>
+            </a:r>
+          </a:p>
+          <a:p>
+            <a:pPr lvl="1"/>
+            <a:r>
+              <a:rPr lang="en-US" dirty="0"/>
+              <a:t>Else if side is even – 0 remainder – then b is 255 and the rest are 0. (255,0,0)</a:t>
+            </a:r>
+          </a:p>
+          <a:p>
+            <a:r>
+              <a:rPr lang="en-US" dirty="0"/>
+              <a:t>How do we get 0 and 1?  We did that before:</a:t>
+            </a:r>
+          </a:p>
+          <a:p>
+            <a:pPr lvl="1"/>
+            <a:r>
+              <a:rPr lang="en-US" dirty="0"/>
+              <a:t>Count the sides in a loop with a variable – </a:t>
+            </a:r>
+            <a:r>
+              <a:rPr lang="en-US" dirty="0" err="1"/>
+              <a:t>side_count</a:t>
+            </a:r>
+            <a:endParaRPr lang="en-US" dirty="0"/>
+          </a:p>
+          <a:p>
+            <a:pPr lvl="2"/>
+            <a:r>
+              <a:rPr lang="en-US" dirty="0" err="1"/>
+              <a:t>side_count</a:t>
+            </a:r>
+            <a:r>
+              <a:rPr lang="en-US" dirty="0"/>
+              <a:t> % 2 * 255 – produces 0 or 255</a:t>
+            </a:r>
+          </a:p>
+          <a:p>
+            <a:pPr lvl="2"/>
+            <a:endParaRPr lang="en-US" dirty="0"/>
+          </a:p>
+        </p:txBody>
+      </p:sp>
+    </p:spTree>
+    <p:extLst>
+      <p:ext uri="{BB962C8B-B14F-4D97-AF65-F5344CB8AC3E}">
+        <p14:creationId xmlns:p14="http://schemas.microsoft.com/office/powerpoint/2010/main" val="1982839305"/>
       </p:ext>
     </p:extLst>
   </p:cSld>
@@ -6489,7 +6135,7 @@
           <p:cNvPr id="2" name="Title 1">
             <a:extLst>
               <a:ext uri="{FF2B5EF4-FFF2-40B4-BE49-F238E27FC236}">
-                <a16:creationId xmlns:a16="http://schemas.microsoft.com/office/drawing/2014/main" id="{01771F57-B333-28E1-8E98-CC56C706977B}"/>
+                <a16:creationId xmlns:a16="http://schemas.microsoft.com/office/drawing/2014/main" id="{417A6E61-6DD8-2FE1-525E-A00A0C6616A3}"/>
               </a:ext>
             </a:extLst>
           </p:cNvPr>
@@ -6507,7 +6153,7 @@
           <a:p>
             <a:r>
               <a:rPr lang="en-US" dirty="0"/>
-              <a:t>Have we solved it before?</a:t>
+              <a:t>Decomposition</a:t>
             </a:r>
           </a:p>
         </p:txBody>
@@ -6517,7 +6163,7 @@
           <p:cNvPr id="3" name="Content Placeholder 2">
             <a:extLst>
               <a:ext uri="{FF2B5EF4-FFF2-40B4-BE49-F238E27FC236}">
-                <a16:creationId xmlns:a16="http://schemas.microsoft.com/office/drawing/2014/main" id="{6B5B2C50-8E4D-F225-62BB-021F5CD9459F}"/>
+                <a16:creationId xmlns:a16="http://schemas.microsoft.com/office/drawing/2014/main" id="{0A7FD7DB-465A-4061-BAC0-2B323CE4ABD7}"/>
               </a:ext>
             </a:extLst>
           </p:cNvPr>
@@ -6528,12 +6174,7 @@
             <p:ph idx="1"/>
           </p:nvPr>
         </p:nvSpPr>
-        <p:spPr>
-          <a:xfrm>
-            <a:off x="2231136" y="2638044"/>
-            <a:ext cx="7729728" cy="3403527"/>
-          </a:xfrm>
-        </p:spPr>
+        <p:spPr/>
         <p:txBody>
           <a:bodyPr>
             <a:normAutofit/>
@@ -6541,63 +6182,30 @@
           <a:lstStyle/>
           <a:p>
             <a:r>
-              <a:rPr lang="en-US" dirty="0"/>
-              <a:t>Logic: We need the following:</a:t>
+              <a:rPr lang="en-US" sz="2400" dirty="0"/>
+              <a:t>We have identified simple patterns and decomposed our problem into:</a:t>
             </a:r>
           </a:p>
           <a:p>
             <a:pPr lvl="1"/>
             <a:r>
-              <a:rPr lang="en-US" dirty="0"/>
-              <a:t>If side is odd -1 remainder - then r is 255 and the rest are 0.</a:t>
+              <a:rPr lang="en-US" sz="2000" dirty="0"/>
+              <a:t>drawing each side (forward and rotate) </a:t>
             </a:r>
           </a:p>
           <a:p>
             <a:pPr lvl="1"/>
             <a:r>
-              <a:rPr lang="en-US" dirty="0"/>
-              <a:t>Else if side is even – 0 remainder – then b is 255 and the rest are 0. (255,0,0)</a:t>
-            </a:r>
-          </a:p>
-          <a:p>
-            <a:r>
-              <a:rPr lang="en-US" dirty="0"/>
-              <a:t>How do we get 0 and 1?  We did that before:</a:t>
-            </a:r>
-          </a:p>
-          <a:p>
-            <a:pPr lvl="1"/>
-            <a:r>
-              <a:rPr lang="en-US" dirty="0"/>
-              <a:t>Count the sides in a loop with a variable – </a:t>
-            </a:r>
-            <a:r>
-              <a:rPr lang="en-US" dirty="0" err="1"/>
-              <a:t>side_count</a:t>
-            </a:r>
-            <a:endParaRPr lang="en-US" dirty="0"/>
-          </a:p>
-          <a:p>
-            <a:pPr lvl="2"/>
-            <a:r>
-              <a:rPr lang="en-US" dirty="0" err="1"/>
-              <a:t>side_count</a:t>
-            </a:r>
-            <a:r>
-              <a:rPr lang="en-US" dirty="0"/>
-              <a:t> % 2 * 255 – produces 0 or 255</a:t>
-            </a:r>
-          </a:p>
-          <a:p>
-            <a:pPr lvl="2"/>
-            <a:endParaRPr lang="en-US" dirty="0"/>
+              <a:rPr lang="en-US" sz="2000" dirty="0"/>
+              <a:t>while using the count of side to set the color.</a:t>
+            </a:r>
           </a:p>
         </p:txBody>
       </p:sp>
     </p:spTree>
     <p:extLst>
       <p:ext uri="{BB962C8B-B14F-4D97-AF65-F5344CB8AC3E}">
-        <p14:creationId xmlns:p14="http://schemas.microsoft.com/office/powerpoint/2010/main" val="1982839305"/>
+        <p14:creationId xmlns:p14="http://schemas.microsoft.com/office/powerpoint/2010/main" val="3629362633"/>
       </p:ext>
     </p:extLst>
   </p:cSld>
@@ -6629,7 +6237,7 @@
           <p:cNvPr id="2" name="Title 1">
             <a:extLst>
               <a:ext uri="{FF2B5EF4-FFF2-40B4-BE49-F238E27FC236}">
-                <a16:creationId xmlns:a16="http://schemas.microsoft.com/office/drawing/2014/main" id="{934323FE-1B2F-42B0-7A63-98AC39B579FF}"/>
+                <a16:creationId xmlns:a16="http://schemas.microsoft.com/office/drawing/2014/main" id="{5AE338C0-66AB-148B-AEB1-DE7475C03329}"/>
               </a:ext>
             </a:extLst>
           </p:cNvPr>
@@ -6647,7 +6255,7 @@
           <a:p>
             <a:r>
               <a:rPr lang="en-US" dirty="0"/>
-              <a:t>Questions</a:t>
+              <a:t>Code Examples</a:t>
             </a:r>
           </a:p>
         </p:txBody>
@@ -6657,7 +6265,7 @@
           <p:cNvPr id="3" name="Content Placeholder 2">
             <a:extLst>
               <a:ext uri="{FF2B5EF4-FFF2-40B4-BE49-F238E27FC236}">
-                <a16:creationId xmlns:a16="http://schemas.microsoft.com/office/drawing/2014/main" id="{F742DA9C-4B2E-C653-5B4F-943E3D96985E}"/>
+                <a16:creationId xmlns:a16="http://schemas.microsoft.com/office/drawing/2014/main" id="{52BF1C45-1BC6-1344-58B8-103FD029F2E3}"/>
               </a:ext>
             </a:extLst>
           </p:cNvPr>
@@ -6674,28 +6282,22 @@
           <a:lstStyle/>
           <a:p>
             <a:r>
-              <a:rPr lang="en-US" dirty="0"/>
-              <a:t>Questions from last day</a:t>
-            </a:r>
-          </a:p>
-          <a:p>
-            <a:r>
-              <a:rPr lang="en-US" dirty="0"/>
-              <a:t>Add/Drop Reminder – January 23 is last day for dropping a course</a:t>
-            </a:r>
-          </a:p>
-          <a:p>
-            <a:r>
-              <a:rPr lang="en-US" dirty="0"/>
-              <a:t>Homework reminder – Homework 1 due Friday, Homework 2 next Friday</a:t>
-            </a:r>
+              <a:rPr lang="en-US" dirty="0">
+                <a:hlinkClick r:id="rId2"/>
+              </a:rPr>
+              <a:t>https://colab.research.google.com/github/UPEI-CS/CS1910-Students/blob/main/lectures/04-Expressions/CS1910_Expressions_Workbook.ipynb</a:t>
+            </a:r>
+            <a:endParaRPr lang="en-US" dirty="0"/>
+          </a:p>
+          <a:p>
+            <a:endParaRPr lang="en-US" dirty="0"/>
           </a:p>
         </p:txBody>
       </p:sp>
     </p:spTree>
     <p:extLst>
       <p:ext uri="{BB962C8B-B14F-4D97-AF65-F5344CB8AC3E}">
-        <p14:creationId xmlns:p14="http://schemas.microsoft.com/office/powerpoint/2010/main" val="2078530638"/>
+        <p14:creationId xmlns:p14="http://schemas.microsoft.com/office/powerpoint/2010/main" val="645151527"/>
       </p:ext>
     </p:extLst>
   </p:cSld>
@@ -6727,7 +6329,7 @@
           <p:cNvPr id="2" name="Title 1">
             <a:extLst>
               <a:ext uri="{FF2B5EF4-FFF2-40B4-BE49-F238E27FC236}">
-                <a16:creationId xmlns:a16="http://schemas.microsoft.com/office/drawing/2014/main" id="{417A6E61-6DD8-2FE1-525E-A00A0C6616A3}"/>
+                <a16:creationId xmlns:a16="http://schemas.microsoft.com/office/drawing/2014/main" id="{19742EF4-B7D7-92F3-5641-9A65C5F4CB04}"/>
               </a:ext>
             </a:extLst>
           </p:cNvPr>
@@ -6738,15 +6340,25 @@
             <p:ph type="title"/>
           </p:nvPr>
         </p:nvSpPr>
-        <p:spPr/>
+        <p:spPr>
+          <a:xfrm>
+            <a:off x="2231136" y="183227"/>
+            <a:ext cx="7729728" cy="1188720"/>
+          </a:xfrm>
+        </p:spPr>
         <p:txBody>
           <a:bodyPr/>
           <a:lstStyle/>
           <a:p>
             <a:r>
               <a:rPr lang="en-US" dirty="0"/>
-              <a:t>Decomposition</a:t>
-            </a:r>
+              <a:t>Colored </a:t>
+            </a:r>
+            <a:r>
+              <a:rPr lang="en-US" dirty="0" err="1"/>
+              <a:t>HexaGON</a:t>
+            </a:r>
+            <a:endParaRPr lang="en-US" dirty="0"/>
           </a:p>
         </p:txBody>
       </p:sp>
@@ -6755,7 +6367,7 @@
           <p:cNvPr id="3" name="Content Placeholder 2">
             <a:extLst>
               <a:ext uri="{FF2B5EF4-FFF2-40B4-BE49-F238E27FC236}">
-                <a16:creationId xmlns:a16="http://schemas.microsoft.com/office/drawing/2014/main" id="{0A7FD7DB-465A-4061-BAC0-2B323CE4ABD7}"/>
+                <a16:creationId xmlns:a16="http://schemas.microsoft.com/office/drawing/2014/main" id="{740A170A-609E-0134-DBEE-C83E8BFB616A}"/>
               </a:ext>
             </a:extLst>
           </p:cNvPr>
@@ -6766,30 +6378,475 @@
             <p:ph idx="1"/>
           </p:nvPr>
         </p:nvSpPr>
-        <p:spPr/>
-        <p:txBody>
-          <a:bodyPr>
-            <a:normAutofit/>
+        <p:spPr>
+          <a:xfrm>
+            <a:off x="2231136" y="1706345"/>
+            <a:ext cx="7729728" cy="3101983"/>
+          </a:xfrm>
+        </p:spPr>
+        <p:txBody>
+          <a:bodyPr/>
+          <a:lstStyle/>
+          <a:p>
+            <a:r>
+              <a:rPr lang="en-US" u="sng" dirty="0"/>
+              <a:t>Pattern</a:t>
+            </a:r>
+          </a:p>
+          <a:p>
+            <a:pPr lvl="1"/>
+            <a:r>
+              <a:rPr lang="en-US" dirty="0"/>
+              <a:t>The shape is just forward and rotate by 360 / 6 for each of the 6 sides</a:t>
+            </a:r>
+          </a:p>
+          <a:p>
+            <a:pPr lvl="1"/>
+            <a:r>
+              <a:rPr lang="en-US" dirty="0"/>
+              <a:t>But the color?  </a:t>
+            </a:r>
+          </a:p>
+        </p:txBody>
+      </p:sp>
+      <p:sp>
+        <p:nvSpPr>
+          <p:cNvPr id="4" name="TextBox 3">
+            <a:extLst>
+              <a:ext uri="{FF2B5EF4-FFF2-40B4-BE49-F238E27FC236}">
+                <a16:creationId xmlns:a16="http://schemas.microsoft.com/office/drawing/2014/main" id="{3E3BA48B-2CE1-9EB2-9855-A2AEFA5DD5F2}"/>
+              </a:ext>
+            </a:extLst>
+          </p:cNvPr>
+          <p:cNvSpPr txBox="1"/>
+          <p:nvPr/>
+        </p:nvSpPr>
+        <p:spPr>
+          <a:xfrm>
+            <a:off x="2378724" y="3027996"/>
+            <a:ext cx="3834704" cy="4247317"/>
+          </a:xfrm>
+          <a:prstGeom prst="rect">
+            <a:avLst/>
+          </a:prstGeom>
+          <a:noFill/>
+        </p:spPr>
+        <p:txBody>
+          <a:bodyPr wrap="none" rtlCol="0">
+            <a:spAutoFit/>
           </a:bodyPr>
           <a:lstStyle/>
           <a:p>
             <a:r>
-              <a:rPr lang="en-US" sz="2400" dirty="0"/>
-              <a:t>We have identified simple patterns and decomposed our problem into:</a:t>
-            </a:r>
-          </a:p>
-          <a:p>
-            <a:pPr lvl="1"/>
-            <a:r>
-              <a:rPr lang="en-US" sz="2000" dirty="0"/>
-              <a:t>drawing each side (forward and rotate) </a:t>
-            </a:r>
-          </a:p>
-          <a:p>
-            <a:pPr lvl="1"/>
-            <a:r>
-              <a:rPr lang="en-US" sz="2000" dirty="0"/>
-              <a:t>while using the count of side to set the color.</a:t>
+              <a:rPr lang="en-US" dirty="0"/>
+              <a:t>Pseudocode:</a:t>
+            </a:r>
+          </a:p>
+          <a:p>
+            <a:endParaRPr lang="en-US" dirty="0"/>
+          </a:p>
+          <a:p>
+            <a:r>
+              <a:rPr lang="en-US" dirty="0"/>
+              <a:t>START </a:t>
+            </a:r>
+          </a:p>
+          <a:p>
+            <a:r>
+              <a:rPr lang="en-US" dirty="0"/>
+              <a:t>	SET FULL_CIRCLE = 360</a:t>
+            </a:r>
+          </a:p>
+          <a:p>
+            <a:r>
+              <a:rPr lang="en-US" dirty="0"/>
+              <a:t>	SET length = 100</a:t>
+            </a:r>
+          </a:p>
+          <a:p>
+            <a:r>
+              <a:rPr lang="en-US" dirty="0"/>
+              <a:t>	SET sides = 6</a:t>
+            </a:r>
+          </a:p>
+          <a:p>
+            <a:r>
+              <a:rPr lang="en-US" dirty="0"/>
+              <a:t>	SET angle = FULL_CIRCLE / sides</a:t>
+            </a:r>
+          </a:p>
+          <a:p>
+            <a:endParaRPr lang="en-US" dirty="0"/>
+          </a:p>
+          <a:p>
+            <a:r>
+              <a:rPr lang="en-US" dirty="0"/>
+              <a:t>	For </a:t>
+            </a:r>
+            <a:r>
+              <a:rPr lang="en-US" dirty="0" err="1"/>
+              <a:t>side_count</a:t>
+            </a:r>
+            <a:r>
+              <a:rPr lang="en-US" dirty="0"/>
+              <a:t> = 0 to sides-1:</a:t>
+            </a:r>
+          </a:p>
+          <a:p>
+            <a:r>
+              <a:rPr lang="en-US" dirty="0"/>
+              <a:t>		SET the color = ( …)</a:t>
+            </a:r>
+          </a:p>
+          <a:p>
+            <a:r>
+              <a:rPr lang="en-US" dirty="0"/>
+              <a:t>		forward length</a:t>
+            </a:r>
+          </a:p>
+          <a:p>
+            <a:r>
+              <a:rPr lang="en-US" dirty="0"/>
+              <a:t>		rotate right angle</a:t>
+            </a:r>
+          </a:p>
+          <a:p>
+            <a:r>
+              <a:rPr lang="en-US" dirty="0"/>
+              <a:t>		</a:t>
+            </a:r>
+          </a:p>
+          <a:p>
+            <a:endParaRPr lang="en-US" dirty="0"/>
+          </a:p>
+          <a:p>
+            <a:r>
+              <a:rPr lang="en-US" dirty="0"/>
+              <a:t> </a:t>
+            </a:r>
+          </a:p>
+        </p:txBody>
+      </p:sp>
+      <p:cxnSp>
+        <p:nvCxnSpPr>
+          <p:cNvPr id="6" name="Straight Arrow Connector 5">
+            <a:extLst>
+              <a:ext uri="{FF2B5EF4-FFF2-40B4-BE49-F238E27FC236}">
+                <a16:creationId xmlns:a16="http://schemas.microsoft.com/office/drawing/2014/main" id="{CCAB0D1D-FDDC-B579-EF35-6B4394F19B16}"/>
+              </a:ext>
+            </a:extLst>
+          </p:cNvPr>
+          <p:cNvCxnSpPr/>
+          <p:nvPr/>
+        </p:nvCxnSpPr>
+        <p:spPr>
+          <a:xfrm flipH="1">
+            <a:off x="8199120" y="1619603"/>
+            <a:ext cx="1013552" cy="352540"/>
+          </a:xfrm>
+          <a:prstGeom prst="straightConnector1">
+            <a:avLst/>
+          </a:prstGeom>
+          <a:ln>
+            <a:tailEnd type="triangle"/>
+          </a:ln>
+        </p:spPr>
+        <p:style>
+          <a:lnRef idx="1">
+            <a:schemeClr val="accent1"/>
+          </a:lnRef>
+          <a:fillRef idx="0">
+            <a:schemeClr val="accent1"/>
+          </a:fillRef>
+          <a:effectRef idx="0">
+            <a:schemeClr val="accent1"/>
+          </a:effectRef>
+          <a:fontRef idx="minor">
+            <a:schemeClr val="tx1"/>
+          </a:fontRef>
+        </p:style>
+      </p:cxnSp>
+      <p:sp>
+        <p:nvSpPr>
+          <p:cNvPr id="7" name="TextBox 6">
+            <a:extLst>
+              <a:ext uri="{FF2B5EF4-FFF2-40B4-BE49-F238E27FC236}">
+                <a16:creationId xmlns:a16="http://schemas.microsoft.com/office/drawing/2014/main" id="{9070E533-5304-230C-B4BB-9A4902A68076}"/>
+              </a:ext>
+            </a:extLst>
+          </p:cNvPr>
+          <p:cNvSpPr txBox="1"/>
+          <p:nvPr/>
+        </p:nvSpPr>
+        <p:spPr>
+          <a:xfrm>
+            <a:off x="9212672" y="1426541"/>
+            <a:ext cx="2266390" cy="369332"/>
+          </a:xfrm>
+          <a:prstGeom prst="rect">
+            <a:avLst/>
+          </a:prstGeom>
+          <a:noFill/>
+          <a:ln>
+            <a:solidFill>
+              <a:schemeClr val="accent1"/>
+            </a:solidFill>
+          </a:ln>
+        </p:spPr>
+        <p:txBody>
+          <a:bodyPr wrap="none" rtlCol="0">
+            <a:spAutoFit/>
+          </a:bodyPr>
+          <a:lstStyle/>
+          <a:p>
+            <a:r>
+              <a:rPr lang="en-US" dirty="0"/>
+              <a:t>We did this previously</a:t>
+            </a:r>
+          </a:p>
+        </p:txBody>
+      </p:sp>
+      <p:cxnSp>
+        <p:nvCxnSpPr>
+          <p:cNvPr id="9" name="Straight Arrow Connector 8">
+            <a:extLst>
+              <a:ext uri="{FF2B5EF4-FFF2-40B4-BE49-F238E27FC236}">
+                <a16:creationId xmlns:a16="http://schemas.microsoft.com/office/drawing/2014/main" id="{8CB69DA1-2AA6-9D88-E779-8A0430979D9D}"/>
+              </a:ext>
+            </a:extLst>
+          </p:cNvPr>
+          <p:cNvCxnSpPr/>
+          <p:nvPr/>
+        </p:nvCxnSpPr>
+        <p:spPr>
+          <a:xfrm flipH="1">
+            <a:off x="4993426" y="3047136"/>
+            <a:ext cx="3093720" cy="768794"/>
+          </a:xfrm>
+          <a:prstGeom prst="straightConnector1">
+            <a:avLst/>
+          </a:prstGeom>
+          <a:ln>
+            <a:tailEnd type="triangle"/>
+          </a:ln>
+        </p:spPr>
+        <p:style>
+          <a:lnRef idx="1">
+            <a:schemeClr val="accent1"/>
+          </a:lnRef>
+          <a:fillRef idx="0">
+            <a:schemeClr val="accent1"/>
+          </a:fillRef>
+          <a:effectRef idx="0">
+            <a:schemeClr val="accent1"/>
+          </a:effectRef>
+          <a:fontRef idx="minor">
+            <a:schemeClr val="tx1"/>
+          </a:fontRef>
+        </p:style>
+      </p:cxnSp>
+      <p:sp>
+        <p:nvSpPr>
+          <p:cNvPr id="10" name="TextBox 9">
+            <a:extLst>
+              <a:ext uri="{FF2B5EF4-FFF2-40B4-BE49-F238E27FC236}">
+                <a16:creationId xmlns:a16="http://schemas.microsoft.com/office/drawing/2014/main" id="{06DDB74B-3BE3-06D4-407D-E5E84757FFE9}"/>
+              </a:ext>
+            </a:extLst>
+          </p:cNvPr>
+          <p:cNvSpPr txBox="1"/>
+          <p:nvPr/>
+        </p:nvSpPr>
+        <p:spPr>
+          <a:xfrm>
+            <a:off x="8087146" y="2584069"/>
+            <a:ext cx="3747436" cy="646331"/>
+          </a:xfrm>
+          <a:prstGeom prst="rect">
+            <a:avLst/>
+          </a:prstGeom>
+          <a:noFill/>
+          <a:ln>
+            <a:solidFill>
+              <a:schemeClr val="accent1"/>
+            </a:solidFill>
+          </a:ln>
+        </p:spPr>
+        <p:txBody>
+          <a:bodyPr wrap="none" rtlCol="0">
+            <a:spAutoFit/>
+          </a:bodyPr>
+          <a:lstStyle/>
+          <a:p>
+            <a:r>
+              <a:rPr lang="en-US" dirty="0"/>
+              <a:t>A CONSTANT (should never change)</a:t>
+            </a:r>
+          </a:p>
+          <a:p>
+            <a:r>
+              <a:rPr lang="en-US" dirty="0"/>
+              <a:t>Use ALL_CAPS to denote constants</a:t>
+            </a:r>
+          </a:p>
+        </p:txBody>
+      </p:sp>
+      <p:cxnSp>
+        <p:nvCxnSpPr>
+          <p:cNvPr id="12" name="Straight Arrow Connector 11">
+            <a:extLst>
+              <a:ext uri="{FF2B5EF4-FFF2-40B4-BE49-F238E27FC236}">
+                <a16:creationId xmlns:a16="http://schemas.microsoft.com/office/drawing/2014/main" id="{01040095-B5CE-1058-5A4B-8DB8AC4BE06C}"/>
+              </a:ext>
+            </a:extLst>
+          </p:cNvPr>
+          <p:cNvCxnSpPr/>
+          <p:nvPr/>
+        </p:nvCxnSpPr>
+        <p:spPr>
+          <a:xfrm flipH="1">
+            <a:off x="5135880" y="5471160"/>
+            <a:ext cx="2951266" cy="167640"/>
+          </a:xfrm>
+          <a:prstGeom prst="straightConnector1">
+            <a:avLst/>
+          </a:prstGeom>
+          <a:ln>
+            <a:tailEnd type="triangle"/>
+          </a:ln>
+        </p:spPr>
+        <p:style>
+          <a:lnRef idx="1">
+            <a:schemeClr val="accent1"/>
+          </a:lnRef>
+          <a:fillRef idx="0">
+            <a:schemeClr val="accent1"/>
+          </a:fillRef>
+          <a:effectRef idx="0">
+            <a:schemeClr val="accent1"/>
+          </a:effectRef>
+          <a:fontRef idx="minor">
+            <a:schemeClr val="tx1"/>
+          </a:fontRef>
+        </p:style>
+      </p:cxnSp>
+      <p:sp>
+        <p:nvSpPr>
+          <p:cNvPr id="13" name="TextBox 12">
+            <a:extLst>
+              <a:ext uri="{FF2B5EF4-FFF2-40B4-BE49-F238E27FC236}">
+                <a16:creationId xmlns:a16="http://schemas.microsoft.com/office/drawing/2014/main" id="{AAC9F7C4-1A0D-74A8-6985-65DC9A48AE8B}"/>
+              </a:ext>
+            </a:extLst>
+          </p:cNvPr>
+          <p:cNvSpPr txBox="1"/>
+          <p:nvPr/>
+        </p:nvSpPr>
+        <p:spPr>
+          <a:xfrm>
+            <a:off x="8087146" y="4969794"/>
+            <a:ext cx="3747436" cy="923330"/>
+          </a:xfrm>
+          <a:prstGeom prst="rect">
+            <a:avLst/>
+          </a:prstGeom>
+          <a:noFill/>
+          <a:ln>
+            <a:solidFill>
+              <a:schemeClr val="accent1"/>
+            </a:solidFill>
+          </a:ln>
+        </p:spPr>
+        <p:txBody>
+          <a:bodyPr wrap="square" rtlCol="0">
+            <a:spAutoFit/>
+          </a:bodyPr>
+          <a:lstStyle/>
+          <a:p>
+            <a:r>
+              <a:rPr lang="en-US" dirty="0"/>
+              <a:t>There are other ways to do this, but today we develop a solution using expressions</a:t>
+            </a:r>
+          </a:p>
+        </p:txBody>
+      </p:sp>
+      <p:cxnSp>
+        <p:nvCxnSpPr>
+          <p:cNvPr id="15" name="Straight Arrow Connector 14">
+            <a:extLst>
+              <a:ext uri="{FF2B5EF4-FFF2-40B4-BE49-F238E27FC236}">
+                <a16:creationId xmlns:a16="http://schemas.microsoft.com/office/drawing/2014/main" id="{E55194EE-E018-FD9C-CFAD-F1E83D7844B5}"/>
+              </a:ext>
+            </a:extLst>
+          </p:cNvPr>
+          <p:cNvCxnSpPr>
+            <a:cxnSpLocks/>
+          </p:cNvCxnSpPr>
+          <p:nvPr/>
+        </p:nvCxnSpPr>
+        <p:spPr>
+          <a:xfrm flipH="1">
+            <a:off x="4800600" y="4282440"/>
+            <a:ext cx="3398520" cy="1036320"/>
+          </a:xfrm>
+          <a:prstGeom prst="straightConnector1">
+            <a:avLst/>
+          </a:prstGeom>
+          <a:ln>
+            <a:tailEnd type="triangle"/>
+          </a:ln>
+        </p:spPr>
+        <p:style>
+          <a:lnRef idx="1">
+            <a:schemeClr val="accent1"/>
+          </a:lnRef>
+          <a:fillRef idx="0">
+            <a:schemeClr val="accent1"/>
+          </a:fillRef>
+          <a:effectRef idx="0">
+            <a:schemeClr val="accent1"/>
+          </a:effectRef>
+          <a:fontRef idx="minor">
+            <a:schemeClr val="tx1"/>
+          </a:fontRef>
+        </p:style>
+      </p:cxnSp>
+      <p:sp>
+        <p:nvSpPr>
+          <p:cNvPr id="17" name="TextBox 16">
+            <a:extLst>
+              <a:ext uri="{FF2B5EF4-FFF2-40B4-BE49-F238E27FC236}">
+                <a16:creationId xmlns:a16="http://schemas.microsoft.com/office/drawing/2014/main" id="{F31CC4E2-DE6F-FF6D-816D-6FF621558B22}"/>
+              </a:ext>
+            </a:extLst>
+          </p:cNvPr>
+          <p:cNvSpPr txBox="1"/>
+          <p:nvPr/>
+        </p:nvSpPr>
+        <p:spPr>
+          <a:xfrm>
+            <a:off x="8199120" y="3842326"/>
+            <a:ext cx="3284942" cy="646331"/>
+          </a:xfrm>
+          <a:prstGeom prst="rect">
+            <a:avLst/>
+          </a:prstGeom>
+          <a:noFill/>
+          <a:ln>
+            <a:solidFill>
+              <a:schemeClr val="accent1"/>
+            </a:solidFill>
+          </a:ln>
+        </p:spPr>
+        <p:txBody>
+          <a:bodyPr wrap="square" rtlCol="0">
+            <a:spAutoFit/>
+          </a:bodyPr>
+          <a:lstStyle/>
+          <a:p>
+            <a:r>
+              <a:rPr lang="en-US" dirty="0"/>
+              <a:t>Small counting adjustment to start counting from 0</a:t>
             </a:r>
           </a:p>
         </p:txBody>
@@ -6797,7 +6854,7 @@
     </p:spTree>
     <p:extLst>
       <p:ext uri="{BB962C8B-B14F-4D97-AF65-F5344CB8AC3E}">
-        <p14:creationId xmlns:p14="http://schemas.microsoft.com/office/powerpoint/2010/main" val="3629362633"/>
+        <p14:creationId xmlns:p14="http://schemas.microsoft.com/office/powerpoint/2010/main" val="878294101"/>
       </p:ext>
     </p:extLst>
   </p:cSld>
@@ -6829,563 +6886,6 @@
           <p:cNvPr id="2" name="Title 1">
             <a:extLst>
               <a:ext uri="{FF2B5EF4-FFF2-40B4-BE49-F238E27FC236}">
-                <a16:creationId xmlns:a16="http://schemas.microsoft.com/office/drawing/2014/main" id="{19742EF4-B7D7-92F3-5641-9A65C5F4CB04}"/>
-              </a:ext>
-            </a:extLst>
-          </p:cNvPr>
-          <p:cNvSpPr>
-            <a:spLocks noGrp="1"/>
-          </p:cNvSpPr>
-          <p:nvPr>
-            <p:ph type="title"/>
-          </p:nvPr>
-        </p:nvSpPr>
-        <p:spPr>
-          <a:xfrm>
-            <a:off x="2231136" y="183227"/>
-            <a:ext cx="7729728" cy="1188720"/>
-          </a:xfrm>
-        </p:spPr>
-        <p:txBody>
-          <a:bodyPr/>
-          <a:lstStyle/>
-          <a:p>
-            <a:r>
-              <a:rPr lang="en-US" dirty="0"/>
-              <a:t>Colored </a:t>
-            </a:r>
-            <a:r>
-              <a:rPr lang="en-US" dirty="0" err="1"/>
-              <a:t>HexaGON</a:t>
-            </a:r>
-            <a:endParaRPr lang="en-US" dirty="0"/>
-          </a:p>
-        </p:txBody>
-      </p:sp>
-      <p:sp>
-        <p:nvSpPr>
-          <p:cNvPr id="3" name="Content Placeholder 2">
-            <a:extLst>
-              <a:ext uri="{FF2B5EF4-FFF2-40B4-BE49-F238E27FC236}">
-                <a16:creationId xmlns:a16="http://schemas.microsoft.com/office/drawing/2014/main" id="{740A170A-609E-0134-DBEE-C83E8BFB616A}"/>
-              </a:ext>
-            </a:extLst>
-          </p:cNvPr>
-          <p:cNvSpPr>
-            <a:spLocks noGrp="1"/>
-          </p:cNvSpPr>
-          <p:nvPr>
-            <p:ph idx="1"/>
-          </p:nvPr>
-        </p:nvSpPr>
-        <p:spPr>
-          <a:xfrm>
-            <a:off x="2231136" y="1706345"/>
-            <a:ext cx="7729728" cy="3101983"/>
-          </a:xfrm>
-        </p:spPr>
-        <p:txBody>
-          <a:bodyPr/>
-          <a:lstStyle/>
-          <a:p>
-            <a:r>
-              <a:rPr lang="en-US" u="sng" dirty="0"/>
-              <a:t>Pattern</a:t>
-            </a:r>
-          </a:p>
-          <a:p>
-            <a:pPr lvl="1"/>
-            <a:r>
-              <a:rPr lang="en-US" dirty="0"/>
-              <a:t>The shape is just forward and rotate by 360 / 6 for each of the 6 sides</a:t>
-            </a:r>
-          </a:p>
-          <a:p>
-            <a:pPr lvl="1"/>
-            <a:r>
-              <a:rPr lang="en-US" dirty="0"/>
-              <a:t>But the color?  </a:t>
-            </a:r>
-          </a:p>
-        </p:txBody>
-      </p:sp>
-      <p:sp>
-        <p:nvSpPr>
-          <p:cNvPr id="4" name="TextBox 3">
-            <a:extLst>
-              <a:ext uri="{FF2B5EF4-FFF2-40B4-BE49-F238E27FC236}">
-                <a16:creationId xmlns:a16="http://schemas.microsoft.com/office/drawing/2014/main" id="{3E3BA48B-2CE1-9EB2-9855-A2AEFA5DD5F2}"/>
-              </a:ext>
-            </a:extLst>
-          </p:cNvPr>
-          <p:cNvSpPr txBox="1"/>
-          <p:nvPr/>
-        </p:nvSpPr>
-        <p:spPr>
-          <a:xfrm>
-            <a:off x="2378724" y="3027996"/>
-            <a:ext cx="3834704" cy="4247317"/>
-          </a:xfrm>
-          <a:prstGeom prst="rect">
-            <a:avLst/>
-          </a:prstGeom>
-          <a:noFill/>
-        </p:spPr>
-        <p:txBody>
-          <a:bodyPr wrap="none" rtlCol="0">
-            <a:spAutoFit/>
-          </a:bodyPr>
-          <a:lstStyle/>
-          <a:p>
-            <a:r>
-              <a:rPr lang="en-US" dirty="0"/>
-              <a:t>Pseudocode:</a:t>
-            </a:r>
-          </a:p>
-          <a:p>
-            <a:endParaRPr lang="en-US" dirty="0"/>
-          </a:p>
-          <a:p>
-            <a:r>
-              <a:rPr lang="en-US" dirty="0"/>
-              <a:t>START </a:t>
-            </a:r>
-          </a:p>
-          <a:p>
-            <a:r>
-              <a:rPr lang="en-US" dirty="0"/>
-              <a:t>	SET FULL_CIRCLE = 360</a:t>
-            </a:r>
-          </a:p>
-          <a:p>
-            <a:r>
-              <a:rPr lang="en-US" dirty="0"/>
-              <a:t>	SET length = 100</a:t>
-            </a:r>
-          </a:p>
-          <a:p>
-            <a:r>
-              <a:rPr lang="en-US" dirty="0"/>
-              <a:t>	SET sides = 6</a:t>
-            </a:r>
-          </a:p>
-          <a:p>
-            <a:r>
-              <a:rPr lang="en-US" dirty="0"/>
-              <a:t>	SET angle = FULL_CIRCLE / sides</a:t>
-            </a:r>
-          </a:p>
-          <a:p>
-            <a:endParaRPr lang="en-US" dirty="0"/>
-          </a:p>
-          <a:p>
-            <a:r>
-              <a:rPr lang="en-US" dirty="0"/>
-              <a:t>	For </a:t>
-            </a:r>
-            <a:r>
-              <a:rPr lang="en-US" dirty="0" err="1"/>
-              <a:t>side_count</a:t>
-            </a:r>
-            <a:r>
-              <a:rPr lang="en-US" dirty="0"/>
-              <a:t> = 0 to sides-1:</a:t>
-            </a:r>
-          </a:p>
-          <a:p>
-            <a:r>
-              <a:rPr lang="en-US" dirty="0"/>
-              <a:t>		SET the color = ( …)</a:t>
-            </a:r>
-          </a:p>
-          <a:p>
-            <a:r>
-              <a:rPr lang="en-US" dirty="0"/>
-              <a:t>		forward length</a:t>
-            </a:r>
-          </a:p>
-          <a:p>
-            <a:r>
-              <a:rPr lang="en-US" dirty="0"/>
-              <a:t>		rotate right angle</a:t>
-            </a:r>
-          </a:p>
-          <a:p>
-            <a:r>
-              <a:rPr lang="en-US" dirty="0"/>
-              <a:t>		</a:t>
-            </a:r>
-          </a:p>
-          <a:p>
-            <a:endParaRPr lang="en-US" dirty="0"/>
-          </a:p>
-          <a:p>
-            <a:r>
-              <a:rPr lang="en-US" dirty="0"/>
-              <a:t> </a:t>
-            </a:r>
-          </a:p>
-        </p:txBody>
-      </p:sp>
-      <p:cxnSp>
-        <p:nvCxnSpPr>
-          <p:cNvPr id="6" name="Straight Arrow Connector 5">
-            <a:extLst>
-              <a:ext uri="{FF2B5EF4-FFF2-40B4-BE49-F238E27FC236}">
-                <a16:creationId xmlns:a16="http://schemas.microsoft.com/office/drawing/2014/main" id="{CCAB0D1D-FDDC-B579-EF35-6B4394F19B16}"/>
-              </a:ext>
-            </a:extLst>
-          </p:cNvPr>
-          <p:cNvCxnSpPr/>
-          <p:nvPr/>
-        </p:nvCxnSpPr>
-        <p:spPr>
-          <a:xfrm flipH="1">
-            <a:off x="8199120" y="1619603"/>
-            <a:ext cx="1013552" cy="352540"/>
-          </a:xfrm>
-          <a:prstGeom prst="straightConnector1">
-            <a:avLst/>
-          </a:prstGeom>
-          <a:ln>
-            <a:tailEnd type="triangle"/>
-          </a:ln>
-        </p:spPr>
-        <p:style>
-          <a:lnRef idx="1">
-            <a:schemeClr val="accent1"/>
-          </a:lnRef>
-          <a:fillRef idx="0">
-            <a:schemeClr val="accent1"/>
-          </a:fillRef>
-          <a:effectRef idx="0">
-            <a:schemeClr val="accent1"/>
-          </a:effectRef>
-          <a:fontRef idx="minor">
-            <a:schemeClr val="tx1"/>
-          </a:fontRef>
-        </p:style>
-      </p:cxnSp>
-      <p:sp>
-        <p:nvSpPr>
-          <p:cNvPr id="7" name="TextBox 6">
-            <a:extLst>
-              <a:ext uri="{FF2B5EF4-FFF2-40B4-BE49-F238E27FC236}">
-                <a16:creationId xmlns:a16="http://schemas.microsoft.com/office/drawing/2014/main" id="{9070E533-5304-230C-B4BB-9A4902A68076}"/>
-              </a:ext>
-            </a:extLst>
-          </p:cNvPr>
-          <p:cNvSpPr txBox="1"/>
-          <p:nvPr/>
-        </p:nvSpPr>
-        <p:spPr>
-          <a:xfrm>
-            <a:off x="9212672" y="1426541"/>
-            <a:ext cx="2266390" cy="369332"/>
-          </a:xfrm>
-          <a:prstGeom prst="rect">
-            <a:avLst/>
-          </a:prstGeom>
-          <a:noFill/>
-          <a:ln>
-            <a:solidFill>
-              <a:schemeClr val="accent1"/>
-            </a:solidFill>
-          </a:ln>
-        </p:spPr>
-        <p:txBody>
-          <a:bodyPr wrap="none" rtlCol="0">
-            <a:spAutoFit/>
-          </a:bodyPr>
-          <a:lstStyle/>
-          <a:p>
-            <a:r>
-              <a:rPr lang="en-US" dirty="0"/>
-              <a:t>We did this previously</a:t>
-            </a:r>
-          </a:p>
-        </p:txBody>
-      </p:sp>
-      <p:cxnSp>
-        <p:nvCxnSpPr>
-          <p:cNvPr id="9" name="Straight Arrow Connector 8">
-            <a:extLst>
-              <a:ext uri="{FF2B5EF4-FFF2-40B4-BE49-F238E27FC236}">
-                <a16:creationId xmlns:a16="http://schemas.microsoft.com/office/drawing/2014/main" id="{8CB69DA1-2AA6-9D88-E779-8A0430979D9D}"/>
-              </a:ext>
-            </a:extLst>
-          </p:cNvPr>
-          <p:cNvCxnSpPr/>
-          <p:nvPr/>
-        </p:nvCxnSpPr>
-        <p:spPr>
-          <a:xfrm flipH="1">
-            <a:off x="4993426" y="3047136"/>
-            <a:ext cx="3093720" cy="768794"/>
-          </a:xfrm>
-          <a:prstGeom prst="straightConnector1">
-            <a:avLst/>
-          </a:prstGeom>
-          <a:ln>
-            <a:tailEnd type="triangle"/>
-          </a:ln>
-        </p:spPr>
-        <p:style>
-          <a:lnRef idx="1">
-            <a:schemeClr val="accent1"/>
-          </a:lnRef>
-          <a:fillRef idx="0">
-            <a:schemeClr val="accent1"/>
-          </a:fillRef>
-          <a:effectRef idx="0">
-            <a:schemeClr val="accent1"/>
-          </a:effectRef>
-          <a:fontRef idx="minor">
-            <a:schemeClr val="tx1"/>
-          </a:fontRef>
-        </p:style>
-      </p:cxnSp>
-      <p:sp>
-        <p:nvSpPr>
-          <p:cNvPr id="10" name="TextBox 9">
-            <a:extLst>
-              <a:ext uri="{FF2B5EF4-FFF2-40B4-BE49-F238E27FC236}">
-                <a16:creationId xmlns:a16="http://schemas.microsoft.com/office/drawing/2014/main" id="{06DDB74B-3BE3-06D4-407D-E5E84757FFE9}"/>
-              </a:ext>
-            </a:extLst>
-          </p:cNvPr>
-          <p:cNvSpPr txBox="1"/>
-          <p:nvPr/>
-        </p:nvSpPr>
-        <p:spPr>
-          <a:xfrm>
-            <a:off x="8087146" y="2584069"/>
-            <a:ext cx="3747436" cy="646331"/>
-          </a:xfrm>
-          <a:prstGeom prst="rect">
-            <a:avLst/>
-          </a:prstGeom>
-          <a:noFill/>
-          <a:ln>
-            <a:solidFill>
-              <a:schemeClr val="accent1"/>
-            </a:solidFill>
-          </a:ln>
-        </p:spPr>
-        <p:txBody>
-          <a:bodyPr wrap="none" rtlCol="0">
-            <a:spAutoFit/>
-          </a:bodyPr>
-          <a:lstStyle/>
-          <a:p>
-            <a:r>
-              <a:rPr lang="en-US" dirty="0"/>
-              <a:t>A CONSTANT (should never change)</a:t>
-            </a:r>
-          </a:p>
-          <a:p>
-            <a:r>
-              <a:rPr lang="en-US" dirty="0"/>
-              <a:t>Use ALL_CAPS to denote constants</a:t>
-            </a:r>
-          </a:p>
-        </p:txBody>
-      </p:sp>
-      <p:cxnSp>
-        <p:nvCxnSpPr>
-          <p:cNvPr id="12" name="Straight Arrow Connector 11">
-            <a:extLst>
-              <a:ext uri="{FF2B5EF4-FFF2-40B4-BE49-F238E27FC236}">
-                <a16:creationId xmlns:a16="http://schemas.microsoft.com/office/drawing/2014/main" id="{01040095-B5CE-1058-5A4B-8DB8AC4BE06C}"/>
-              </a:ext>
-            </a:extLst>
-          </p:cNvPr>
-          <p:cNvCxnSpPr/>
-          <p:nvPr/>
-        </p:nvCxnSpPr>
-        <p:spPr>
-          <a:xfrm flipH="1">
-            <a:off x="5135880" y="5471160"/>
-            <a:ext cx="2951266" cy="167640"/>
-          </a:xfrm>
-          <a:prstGeom prst="straightConnector1">
-            <a:avLst/>
-          </a:prstGeom>
-          <a:ln>
-            <a:tailEnd type="triangle"/>
-          </a:ln>
-        </p:spPr>
-        <p:style>
-          <a:lnRef idx="1">
-            <a:schemeClr val="accent1"/>
-          </a:lnRef>
-          <a:fillRef idx="0">
-            <a:schemeClr val="accent1"/>
-          </a:fillRef>
-          <a:effectRef idx="0">
-            <a:schemeClr val="accent1"/>
-          </a:effectRef>
-          <a:fontRef idx="minor">
-            <a:schemeClr val="tx1"/>
-          </a:fontRef>
-        </p:style>
-      </p:cxnSp>
-      <p:sp>
-        <p:nvSpPr>
-          <p:cNvPr id="13" name="TextBox 12">
-            <a:extLst>
-              <a:ext uri="{FF2B5EF4-FFF2-40B4-BE49-F238E27FC236}">
-                <a16:creationId xmlns:a16="http://schemas.microsoft.com/office/drawing/2014/main" id="{AAC9F7C4-1A0D-74A8-6985-65DC9A48AE8B}"/>
-              </a:ext>
-            </a:extLst>
-          </p:cNvPr>
-          <p:cNvSpPr txBox="1"/>
-          <p:nvPr/>
-        </p:nvSpPr>
-        <p:spPr>
-          <a:xfrm>
-            <a:off x="8087146" y="4969794"/>
-            <a:ext cx="3747436" cy="923330"/>
-          </a:xfrm>
-          <a:prstGeom prst="rect">
-            <a:avLst/>
-          </a:prstGeom>
-          <a:noFill/>
-          <a:ln>
-            <a:solidFill>
-              <a:schemeClr val="accent1"/>
-            </a:solidFill>
-          </a:ln>
-        </p:spPr>
-        <p:txBody>
-          <a:bodyPr wrap="square" rtlCol="0">
-            <a:spAutoFit/>
-          </a:bodyPr>
-          <a:lstStyle/>
-          <a:p>
-            <a:r>
-              <a:rPr lang="en-US" dirty="0"/>
-              <a:t>There are other ways to do this, but today we develop a solution using expressions</a:t>
-            </a:r>
-          </a:p>
-        </p:txBody>
-      </p:sp>
-      <p:cxnSp>
-        <p:nvCxnSpPr>
-          <p:cNvPr id="15" name="Straight Arrow Connector 14">
-            <a:extLst>
-              <a:ext uri="{FF2B5EF4-FFF2-40B4-BE49-F238E27FC236}">
-                <a16:creationId xmlns:a16="http://schemas.microsoft.com/office/drawing/2014/main" id="{E55194EE-E018-FD9C-CFAD-F1E83D7844B5}"/>
-              </a:ext>
-            </a:extLst>
-          </p:cNvPr>
-          <p:cNvCxnSpPr>
-            <a:cxnSpLocks/>
-          </p:cNvCxnSpPr>
-          <p:nvPr/>
-        </p:nvCxnSpPr>
-        <p:spPr>
-          <a:xfrm flipH="1">
-            <a:off x="4800600" y="4282440"/>
-            <a:ext cx="3398520" cy="1036320"/>
-          </a:xfrm>
-          <a:prstGeom prst="straightConnector1">
-            <a:avLst/>
-          </a:prstGeom>
-          <a:ln>
-            <a:tailEnd type="triangle"/>
-          </a:ln>
-        </p:spPr>
-        <p:style>
-          <a:lnRef idx="1">
-            <a:schemeClr val="accent1"/>
-          </a:lnRef>
-          <a:fillRef idx="0">
-            <a:schemeClr val="accent1"/>
-          </a:fillRef>
-          <a:effectRef idx="0">
-            <a:schemeClr val="accent1"/>
-          </a:effectRef>
-          <a:fontRef idx="minor">
-            <a:schemeClr val="tx1"/>
-          </a:fontRef>
-        </p:style>
-      </p:cxnSp>
-      <p:sp>
-        <p:nvSpPr>
-          <p:cNvPr id="17" name="TextBox 16">
-            <a:extLst>
-              <a:ext uri="{FF2B5EF4-FFF2-40B4-BE49-F238E27FC236}">
-                <a16:creationId xmlns:a16="http://schemas.microsoft.com/office/drawing/2014/main" id="{F31CC4E2-DE6F-FF6D-816D-6FF621558B22}"/>
-              </a:ext>
-            </a:extLst>
-          </p:cNvPr>
-          <p:cNvSpPr txBox="1"/>
-          <p:nvPr/>
-        </p:nvSpPr>
-        <p:spPr>
-          <a:xfrm>
-            <a:off x="8199120" y="3842326"/>
-            <a:ext cx="3284942" cy="646331"/>
-          </a:xfrm>
-          <a:prstGeom prst="rect">
-            <a:avLst/>
-          </a:prstGeom>
-          <a:noFill/>
-          <a:ln>
-            <a:solidFill>
-              <a:schemeClr val="accent1"/>
-            </a:solidFill>
-          </a:ln>
-        </p:spPr>
-        <p:txBody>
-          <a:bodyPr wrap="square" rtlCol="0">
-            <a:spAutoFit/>
-          </a:bodyPr>
-          <a:lstStyle/>
-          <a:p>
-            <a:r>
-              <a:rPr lang="en-US" dirty="0"/>
-              <a:t>Small counting adjustment to start counting from 0</a:t>
-            </a:r>
-          </a:p>
-        </p:txBody>
-      </p:sp>
-    </p:spTree>
-    <p:extLst>
-      <p:ext uri="{BB962C8B-B14F-4D97-AF65-F5344CB8AC3E}">
-        <p14:creationId xmlns:p14="http://schemas.microsoft.com/office/powerpoint/2010/main" val="878294101"/>
-      </p:ext>
-    </p:extLst>
-  </p:cSld>
-  <p:clrMapOvr>
-    <a:masterClrMapping/>
-  </p:clrMapOvr>
-</p:sld>
-</file>
-
-<file path=ppt/slides/slide22.xml><?xml version="1.0" encoding="utf-8"?>
-<p:sld xmlns:a="http://schemas.openxmlformats.org/drawingml/2006/main" xmlns:r="http://schemas.openxmlformats.org/officeDocument/2006/relationships" xmlns:p="http://schemas.openxmlformats.org/presentationml/2006/main">
-  <p:cSld>
-    <p:spTree>
-      <p:nvGrpSpPr>
-        <p:cNvPr id="1" name=""/>
-        <p:cNvGrpSpPr/>
-        <p:nvPr/>
-      </p:nvGrpSpPr>
-      <p:grpSpPr>
-        <a:xfrm>
-          <a:off x="0" y="0"/>
-          <a:ext cx="0" cy="0"/>
-          <a:chOff x="0" y="0"/>
-          <a:chExt cx="0" cy="0"/>
-        </a:xfrm>
-      </p:grpSpPr>
-      <p:sp>
-        <p:nvSpPr>
-          <p:cNvPr id="2" name="Title 1">
-            <a:extLst>
-              <a:ext uri="{FF2B5EF4-FFF2-40B4-BE49-F238E27FC236}">
                 <a16:creationId xmlns:a16="http://schemas.microsoft.com/office/drawing/2014/main" id="{B629C574-86F0-5714-8E16-094F1267FB40}"/>
               </a:ext>
             </a:extLst>
@@ -7540,7 +7040,7 @@
 </p:sld>
 </file>
 
-<file path=ppt/slides/slide23.xml><?xml version="1.0" encoding="utf-8"?>
+<file path=ppt/slides/slide22.xml><?xml version="1.0" encoding="utf-8"?>
 <p:sld xmlns:a="http://schemas.openxmlformats.org/drawingml/2006/main" xmlns:r="http://schemas.openxmlformats.org/officeDocument/2006/relationships" xmlns:p="http://schemas.openxmlformats.org/presentationml/2006/main">
   <p:cSld>
     <p:bg>
@@ -7766,7 +7266,7 @@
 </p:sld>
 </file>
 
-<file path=ppt/slides/slide24.xml><?xml version="1.0" encoding="utf-8"?>
+<file path=ppt/slides/slide23.xml><?xml version="1.0" encoding="utf-8"?>
 <p:sld xmlns:a="http://schemas.openxmlformats.org/drawingml/2006/main" xmlns:r="http://schemas.openxmlformats.org/officeDocument/2006/relationships" xmlns:p="http://schemas.openxmlformats.org/presentationml/2006/main">
   <p:cSld>
     <p:spTree>
@@ -7996,7 +7496,7 @@
 </p:sld>
 </file>
 
-<file path=ppt/slides/slide25.xml><?xml version="1.0" encoding="utf-8"?>
+<file path=ppt/slides/slide24.xml><?xml version="1.0" encoding="utf-8"?>
 <p:sld xmlns:a="http://schemas.openxmlformats.org/drawingml/2006/main" xmlns:r="http://schemas.openxmlformats.org/officeDocument/2006/relationships" xmlns:p="http://schemas.openxmlformats.org/presentationml/2006/main">
   <p:cSld>
     <p:spTree>
@@ -8851,7 +8351,7 @@
 </p:sld>
 </file>
 
-<file path=ppt/slides/slide26.xml><?xml version="1.0" encoding="utf-8"?>
+<file path=ppt/slides/slide25.xml><?xml version="1.0" encoding="utf-8"?>
 <p:sld xmlns:a="http://schemas.openxmlformats.org/drawingml/2006/main" xmlns:r="http://schemas.openxmlformats.org/officeDocument/2006/relationships" xmlns:p="http://schemas.openxmlformats.org/presentationml/2006/main">
   <p:cSld>
     <p:spTree>
@@ -9836,7 +9336,7 @@
 </p:sld>
 </file>
 
-<file path=ppt/slides/slide27.xml><?xml version="1.0" encoding="utf-8"?>
+<file path=ppt/slides/slide26.xml><?xml version="1.0" encoding="utf-8"?>
 <p:sld xmlns:a="http://schemas.openxmlformats.org/drawingml/2006/main" xmlns:r="http://schemas.openxmlformats.org/officeDocument/2006/relationships" xmlns:p="http://schemas.openxmlformats.org/presentationml/2006/main">
   <p:cSld>
     <p:spTree>
@@ -10108,7 +9608,7 @@
 </p:sld>
 </file>
 
-<file path=ppt/slides/slide28.xml><?xml version="1.0" encoding="utf-8"?>
+<file path=ppt/slides/slide27.xml><?xml version="1.0" encoding="utf-8"?>
 <p:sld xmlns:a="http://schemas.openxmlformats.org/drawingml/2006/main" xmlns:r="http://schemas.openxmlformats.org/officeDocument/2006/relationships" xmlns:p="http://schemas.openxmlformats.org/presentationml/2006/main">
   <p:cSld>
     <p:spTree>
@@ -10435,7 +9935,7 @@
 </p:sld>
 </file>
 
-<file path=ppt/slides/slide29.xml><?xml version="1.0" encoding="utf-8"?>
+<file path=ppt/slides/slide28.xml><?xml version="1.0" encoding="utf-8"?>
 <p:sld xmlns:a="http://schemas.openxmlformats.org/drawingml/2006/main" xmlns:r="http://schemas.openxmlformats.org/officeDocument/2006/relationships" xmlns:p="http://schemas.openxmlformats.org/presentationml/2006/main">
   <p:cSld>
     <p:spTree>
@@ -10696,6 +10196,327 @@
     <p:extLst>
       <p:ext uri="{BB962C8B-B14F-4D97-AF65-F5344CB8AC3E}">
         <p14:creationId xmlns:p14="http://schemas.microsoft.com/office/powerpoint/2010/main" val="3597717938"/>
+      </p:ext>
+    </p:extLst>
+  </p:cSld>
+  <p:clrMapOvr>
+    <a:masterClrMapping/>
+  </p:clrMapOvr>
+</p:sld>
+</file>
+
+<file path=ppt/slides/slide29.xml><?xml version="1.0" encoding="utf-8"?>
+<p:sld xmlns:a="http://schemas.openxmlformats.org/drawingml/2006/main" xmlns:r="http://schemas.openxmlformats.org/officeDocument/2006/relationships" xmlns:p="http://schemas.openxmlformats.org/presentationml/2006/main">
+  <p:cSld>
+    <p:spTree>
+      <p:nvGrpSpPr>
+        <p:cNvPr id="1" name="">
+          <a:extLst>
+            <a:ext uri="{FF2B5EF4-FFF2-40B4-BE49-F238E27FC236}">
+              <a16:creationId xmlns:a16="http://schemas.microsoft.com/office/drawing/2014/main" id="{9482055E-EC4D-48F3-827D-0C6A5C1E9FBC}"/>
+            </a:ext>
+          </a:extLst>
+        </p:cNvPr>
+        <p:cNvGrpSpPr/>
+        <p:nvPr/>
+      </p:nvGrpSpPr>
+      <p:grpSpPr>
+        <a:xfrm>
+          <a:off x="0" y="0"/>
+          <a:ext cx="0" cy="0"/>
+          <a:chOff x="0" y="0"/>
+          <a:chExt cx="0" cy="0"/>
+        </a:xfrm>
+      </p:grpSpPr>
+      <p:sp>
+        <p:nvSpPr>
+          <p:cNvPr id="2" name="Title 1">
+            <a:extLst>
+              <a:ext uri="{FF2B5EF4-FFF2-40B4-BE49-F238E27FC236}">
+                <a16:creationId xmlns:a16="http://schemas.microsoft.com/office/drawing/2014/main" id="{9F3A1735-EE67-9F7F-E916-3B40035D412F}"/>
+              </a:ext>
+            </a:extLst>
+          </p:cNvPr>
+          <p:cNvSpPr>
+            <a:spLocks noGrp="1"/>
+          </p:cNvSpPr>
+          <p:nvPr>
+            <p:ph type="title"/>
+          </p:nvPr>
+        </p:nvSpPr>
+        <p:spPr/>
+        <p:txBody>
+          <a:bodyPr/>
+          <a:lstStyle/>
+          <a:p>
+            <a:r>
+              <a:rPr lang="en-CA" dirty="0"/>
+              <a:t>True/False in Expressions</a:t>
+            </a:r>
+          </a:p>
+        </p:txBody>
+      </p:sp>
+      <p:sp>
+        <p:nvSpPr>
+          <p:cNvPr id="3" name="Content Placeholder 2">
+            <a:extLst>
+              <a:ext uri="{FF2B5EF4-FFF2-40B4-BE49-F238E27FC236}">
+                <a16:creationId xmlns:a16="http://schemas.microsoft.com/office/drawing/2014/main" id="{0D0A46C8-0BE3-78C9-F703-5B88DA24B732}"/>
+              </a:ext>
+            </a:extLst>
+          </p:cNvPr>
+          <p:cNvSpPr>
+            <a:spLocks noGrp="1"/>
+          </p:cNvSpPr>
+          <p:nvPr>
+            <p:ph idx="1"/>
+          </p:nvPr>
+        </p:nvSpPr>
+        <p:spPr>
+          <a:xfrm>
+            <a:off x="2231136" y="2638044"/>
+            <a:ext cx="7729728" cy="3936927"/>
+          </a:xfrm>
+        </p:spPr>
+        <p:txBody>
+          <a:bodyPr>
+            <a:normAutofit/>
+          </a:bodyPr>
+          <a:lstStyle/>
+          <a:p>
+            <a:pPr marL="0" indent="0">
+              <a:buNone/>
+            </a:pPr>
+            <a:r>
+              <a:rPr lang="en-US" dirty="0"/>
+              <a:t>BEGIN</a:t>
+            </a:r>
+          </a:p>
+          <a:p>
+            <a:pPr marL="228600" lvl="1" indent="0">
+              <a:buNone/>
+            </a:pPr>
+            <a:r>
+              <a:rPr lang="en-US" dirty="0"/>
+              <a:t>SET numerator = 10</a:t>
+            </a:r>
+          </a:p>
+          <a:p>
+            <a:pPr marL="228600" lvl="1" indent="0">
+              <a:buNone/>
+            </a:pPr>
+            <a:r>
+              <a:rPr lang="en-US" dirty="0"/>
+              <a:t>SET denominator = 0</a:t>
+            </a:r>
+          </a:p>
+          <a:p>
+            <a:pPr marL="228600" lvl="1" indent="0">
+              <a:buNone/>
+            </a:pPr>
+            <a:r>
+              <a:rPr lang="en-US" dirty="0" err="1"/>
+              <a:t>improper_fraction</a:t>
+            </a:r>
+            <a:r>
+              <a:rPr lang="en-US" dirty="0"/>
+              <a:t> = denominator &gt; 0 and (numerator/denominator) &gt; 1</a:t>
+            </a:r>
+          </a:p>
+          <a:p>
+            <a:pPr marL="228600" lvl="1" indent="0">
+              <a:buNone/>
+            </a:pPr>
+            <a:r>
+              <a:rPr lang="en-US" dirty="0"/>
+              <a:t>print(</a:t>
+            </a:r>
+            <a:r>
+              <a:rPr lang="en-US" dirty="0" err="1"/>
+              <a:t>improper_fraction</a:t>
+            </a:r>
+            <a:r>
+              <a:rPr lang="en-US" dirty="0"/>
+              <a:t>)</a:t>
+            </a:r>
+          </a:p>
+          <a:p>
+            <a:pPr marL="0" indent="0">
+              <a:buNone/>
+            </a:pPr>
+            <a:r>
+              <a:rPr lang="en-US" dirty="0"/>
+              <a:t>END</a:t>
+            </a:r>
+            <a:br>
+              <a:rPr lang="en-US" dirty="0"/>
+            </a:br>
+            <a:endParaRPr lang="en-US" dirty="0"/>
+          </a:p>
+          <a:p>
+            <a:endParaRPr lang="en-CA" dirty="0"/>
+          </a:p>
+          <a:p>
+            <a:endParaRPr lang="en-CA" dirty="0"/>
+          </a:p>
+        </p:txBody>
+      </p:sp>
+      <p:cxnSp>
+        <p:nvCxnSpPr>
+          <p:cNvPr id="4" name="Straight Arrow Connector 3">
+            <a:extLst>
+              <a:ext uri="{FF2B5EF4-FFF2-40B4-BE49-F238E27FC236}">
+                <a16:creationId xmlns:a16="http://schemas.microsoft.com/office/drawing/2014/main" id="{224BCB64-93BF-CF8C-BEC4-E98FE7E12964}"/>
+              </a:ext>
+            </a:extLst>
+          </p:cNvPr>
+          <p:cNvCxnSpPr>
+            <a:cxnSpLocks/>
+          </p:cNvCxnSpPr>
+          <p:nvPr/>
+        </p:nvCxnSpPr>
+        <p:spPr>
+          <a:xfrm flipV="1">
+            <a:off x="5497285" y="4191000"/>
+            <a:ext cx="0" cy="1164771"/>
+          </a:xfrm>
+          <a:prstGeom prst="straightConnector1">
+            <a:avLst/>
+          </a:prstGeom>
+          <a:ln>
+            <a:tailEnd type="triangle"/>
+          </a:ln>
+        </p:spPr>
+        <p:style>
+          <a:lnRef idx="1">
+            <a:schemeClr val="accent1"/>
+          </a:lnRef>
+          <a:fillRef idx="0">
+            <a:schemeClr val="accent1"/>
+          </a:fillRef>
+          <a:effectRef idx="0">
+            <a:schemeClr val="accent1"/>
+          </a:effectRef>
+          <a:fontRef idx="minor">
+            <a:schemeClr val="tx1"/>
+          </a:fontRef>
+        </p:style>
+      </p:cxnSp>
+      <p:cxnSp>
+        <p:nvCxnSpPr>
+          <p:cNvPr id="11" name="Straight Arrow Connector 10">
+            <a:extLst>
+              <a:ext uri="{FF2B5EF4-FFF2-40B4-BE49-F238E27FC236}">
+                <a16:creationId xmlns:a16="http://schemas.microsoft.com/office/drawing/2014/main" id="{FD523463-ACA7-0853-E932-3D96646AEC8D}"/>
+              </a:ext>
+            </a:extLst>
+          </p:cNvPr>
+          <p:cNvCxnSpPr>
+            <a:cxnSpLocks/>
+          </p:cNvCxnSpPr>
+          <p:nvPr/>
+        </p:nvCxnSpPr>
+        <p:spPr>
+          <a:xfrm flipV="1">
+            <a:off x="8371114" y="4191000"/>
+            <a:ext cx="0" cy="1164771"/>
+          </a:xfrm>
+          <a:prstGeom prst="straightConnector1">
+            <a:avLst/>
+          </a:prstGeom>
+          <a:ln>
+            <a:tailEnd type="triangle"/>
+          </a:ln>
+        </p:spPr>
+        <p:style>
+          <a:lnRef idx="1">
+            <a:schemeClr val="accent1"/>
+          </a:lnRef>
+          <a:fillRef idx="0">
+            <a:schemeClr val="accent1"/>
+          </a:fillRef>
+          <a:effectRef idx="0">
+            <a:schemeClr val="accent1"/>
+          </a:effectRef>
+          <a:fontRef idx="minor">
+            <a:schemeClr val="tx1"/>
+          </a:fontRef>
+        </p:style>
+      </p:cxnSp>
+      <p:sp>
+        <p:nvSpPr>
+          <p:cNvPr id="5" name="TextBox 4">
+            <a:extLst>
+              <a:ext uri="{FF2B5EF4-FFF2-40B4-BE49-F238E27FC236}">
+                <a16:creationId xmlns:a16="http://schemas.microsoft.com/office/drawing/2014/main" id="{BFDCDFEA-BAF6-FE31-9FCD-A339F87C6725}"/>
+              </a:ext>
+            </a:extLst>
+          </p:cNvPr>
+          <p:cNvSpPr txBox="1"/>
+          <p:nvPr/>
+        </p:nvSpPr>
+        <p:spPr>
+          <a:xfrm>
+            <a:off x="5176523" y="5378157"/>
+            <a:ext cx="2269303" cy="923330"/>
+          </a:xfrm>
+          <a:prstGeom prst="rect">
+            <a:avLst/>
+          </a:prstGeom>
+          <a:noFill/>
+        </p:spPr>
+        <p:txBody>
+          <a:bodyPr wrap="square" rtlCol="0">
+            <a:spAutoFit/>
+          </a:bodyPr>
+          <a:lstStyle/>
+          <a:p>
+            <a:r>
+              <a:rPr lang="en-US" dirty="0"/>
+              <a:t>If denominator is zero this expression stops evaluating</a:t>
+            </a:r>
+          </a:p>
+        </p:txBody>
+      </p:sp>
+      <p:sp>
+        <p:nvSpPr>
+          <p:cNvPr id="6" name="TextBox 5">
+            <a:extLst>
+              <a:ext uri="{FF2B5EF4-FFF2-40B4-BE49-F238E27FC236}">
+                <a16:creationId xmlns:a16="http://schemas.microsoft.com/office/drawing/2014/main" id="{C4B12A45-BA33-F77F-AF32-F9E8CBD90338}"/>
+              </a:ext>
+            </a:extLst>
+          </p:cNvPr>
+          <p:cNvSpPr txBox="1"/>
+          <p:nvPr/>
+        </p:nvSpPr>
+        <p:spPr>
+          <a:xfrm>
+            <a:off x="8116101" y="5378157"/>
+            <a:ext cx="1662635" cy="369332"/>
+          </a:xfrm>
+          <a:prstGeom prst="rect">
+            <a:avLst/>
+          </a:prstGeom>
+          <a:noFill/>
+        </p:spPr>
+        <p:txBody>
+          <a:bodyPr wrap="none" rtlCol="0">
+            <a:spAutoFit/>
+          </a:bodyPr>
+          <a:lstStyle/>
+          <a:p>
+            <a:r>
+              <a:rPr lang="en-US" dirty="0"/>
+              <a:t>No need to run</a:t>
+            </a:r>
+          </a:p>
+        </p:txBody>
+      </p:sp>
+    </p:spTree>
+    <p:extLst>
+      <p:ext uri="{BB962C8B-B14F-4D97-AF65-F5344CB8AC3E}">
+        <p14:creationId xmlns:p14="http://schemas.microsoft.com/office/powerpoint/2010/main" val="1791067030"/>
       </p:ext>
     </p:extLst>
   </p:cSld>
@@ -10727,7 +10548,7 @@
           <p:cNvPr id="2" name="Title 1">
             <a:extLst>
               <a:ext uri="{FF2B5EF4-FFF2-40B4-BE49-F238E27FC236}">
-                <a16:creationId xmlns:a16="http://schemas.microsoft.com/office/drawing/2014/main" id="{5AE338C0-66AB-148B-AEB1-DE7475C03329}"/>
+                <a16:creationId xmlns:a16="http://schemas.microsoft.com/office/drawing/2014/main" id="{CD25298F-A86B-A447-BDE2-C87F1B019B95}"/>
               </a:ext>
             </a:extLst>
           </p:cNvPr>
@@ -10738,14 +10559,19 @@
             <p:ph type="title"/>
           </p:nvPr>
         </p:nvSpPr>
-        <p:spPr/>
+        <p:spPr>
+          <a:xfrm>
+            <a:off x="2231136" y="307075"/>
+            <a:ext cx="7729728" cy="1188720"/>
+          </a:xfrm>
+        </p:spPr>
         <p:txBody>
           <a:bodyPr/>
           <a:lstStyle/>
           <a:p>
             <a:r>
               <a:rPr lang="en-US" dirty="0"/>
-              <a:t>Code Examples</a:t>
+              <a:t>Expressions</a:t>
             </a:r>
           </a:p>
         </p:txBody>
@@ -10755,7 +10581,7 @@
           <p:cNvPr id="3" name="Content Placeholder 2">
             <a:extLst>
               <a:ext uri="{FF2B5EF4-FFF2-40B4-BE49-F238E27FC236}">
-                <a16:creationId xmlns:a16="http://schemas.microsoft.com/office/drawing/2014/main" id="{52BF1C45-1BC6-1344-58B8-103FD029F2E3}"/>
+                <a16:creationId xmlns:a16="http://schemas.microsoft.com/office/drawing/2014/main" id="{35F12C5D-5398-8E2E-01A0-82C448B5FF5E}"/>
               </a:ext>
             </a:extLst>
           </p:cNvPr>
@@ -10766,28 +10592,78 @@
             <p:ph idx="1"/>
           </p:nvPr>
         </p:nvSpPr>
-        <p:spPr/>
-        <p:txBody>
-          <a:bodyPr/>
-          <a:lstStyle/>
-          <a:p>
-            <a:r>
-              <a:rPr lang="en-US" dirty="0">
-                <a:hlinkClick r:id="rId2"/>
-              </a:rPr>
-              <a:t>https://colab.research.google.com/github/cdspower-upei/2026W-CS1910-Students/blob/main/Lectures/L04/L04_Examples.ipynb</a:t>
-            </a:r>
-            <a:endParaRPr lang="en-US" dirty="0"/>
-          </a:p>
-          <a:p>
-            <a:endParaRPr lang="en-US" dirty="0"/>
+        <p:spPr>
+          <a:xfrm>
+            <a:off x="2231136" y="1966015"/>
+            <a:ext cx="7729728" cy="3912881"/>
+          </a:xfrm>
+        </p:spPr>
+        <p:txBody>
+          <a:bodyPr>
+            <a:normAutofit/>
+          </a:bodyPr>
+          <a:lstStyle/>
+          <a:p>
+            <a:r>
+              <a:rPr lang="en-US" sz="2400" dirty="0"/>
+              <a:t>Combinations of literal values, variables, operators and function calls that the python interpreter evaluates to produce a single value</a:t>
+            </a:r>
+          </a:p>
+          <a:p>
+            <a:pPr lvl="1"/>
+            <a:r>
+              <a:rPr lang="en-US" sz="2000" dirty="0"/>
+              <a:t>Primarily compute and return results</a:t>
+            </a:r>
+          </a:p>
+          <a:p>
+            <a:r>
+              <a:rPr lang="en-US" sz="2400" dirty="0"/>
+              <a:t>Examples of Types of expressions</a:t>
+            </a:r>
+          </a:p>
+          <a:p>
+            <a:pPr lvl="1"/>
+            <a:r>
+              <a:rPr lang="en-US" sz="2000" dirty="0"/>
+              <a:t>Arithmetic expressions ( + - * / // **, …)</a:t>
+            </a:r>
+          </a:p>
+          <a:p>
+            <a:pPr lvl="1"/>
+            <a:r>
+              <a:rPr lang="en-US" sz="2000" dirty="0"/>
+              <a:t>Comparison expressions (&gt; &lt; &gt;= &lt;= ==, …)</a:t>
+            </a:r>
+          </a:p>
+          <a:p>
+            <a:pPr lvl="1"/>
+            <a:r>
+              <a:rPr lang="en-US" sz="2000" dirty="0"/>
+              <a:t>Logical expressions (and or not )</a:t>
+            </a:r>
+          </a:p>
+          <a:p>
+            <a:pPr lvl="1"/>
+            <a:r>
+              <a:rPr lang="en-US" sz="2000" dirty="0"/>
+              <a:t>Function call expression (abs( ), </a:t>
+            </a:r>
+            <a:r>
+              <a:rPr lang="en-US" sz="2000" dirty="0" err="1"/>
+              <a:t>len</a:t>
+            </a:r>
+            <a:r>
+              <a:rPr lang="en-US" sz="2000" dirty="0"/>
+              <a:t>( ), …)</a:t>
+            </a:r>
           </a:p>
         </p:txBody>
       </p:sp>
     </p:spTree>
     <p:extLst>
       <p:ext uri="{BB962C8B-B14F-4D97-AF65-F5344CB8AC3E}">
-        <p14:creationId xmlns:p14="http://schemas.microsoft.com/office/powerpoint/2010/main" val="645151527"/>
+        <p14:creationId xmlns:p14="http://schemas.microsoft.com/office/powerpoint/2010/main" val="800729723"/>
       </p:ext>
     </p:extLst>
   </p:cSld>
@@ -10802,13 +10678,7 @@
   <p:cSld>
     <p:spTree>
       <p:nvGrpSpPr>
-        <p:cNvPr id="1" name="">
-          <a:extLst>
-            <a:ext uri="{FF2B5EF4-FFF2-40B4-BE49-F238E27FC236}">
-              <a16:creationId xmlns:a16="http://schemas.microsoft.com/office/drawing/2014/main" id="{9482055E-EC4D-48F3-827D-0C6A5C1E9FBC}"/>
-            </a:ext>
-          </a:extLst>
-        </p:cNvPr>
+        <p:cNvPr id="1" name=""/>
         <p:cNvGrpSpPr/>
         <p:nvPr/>
       </p:nvGrpSpPr>
@@ -10825,7 +10695,7 @@
           <p:cNvPr id="2" name="Title 1">
             <a:extLst>
               <a:ext uri="{FF2B5EF4-FFF2-40B4-BE49-F238E27FC236}">
-                <a16:creationId xmlns:a16="http://schemas.microsoft.com/office/drawing/2014/main" id="{9F3A1735-EE67-9F7F-E916-3B40035D412F}"/>
+                <a16:creationId xmlns:a16="http://schemas.microsoft.com/office/drawing/2014/main" id="{03B8991B-4535-20C1-9E3D-075E1B88FCBB}"/>
               </a:ext>
             </a:extLst>
           </p:cNvPr>
@@ -10842,8 +10712,8 @@
           <a:lstStyle/>
           <a:p>
             <a:r>
-              <a:rPr lang="en-CA" dirty="0"/>
-              <a:t>True/False in Expressions</a:t>
+              <a:rPr lang="en-US" dirty="0"/>
+              <a:t>Short Circuits</a:t>
             </a:r>
           </a:p>
         </p:txBody>
@@ -10853,7 +10723,7 @@
           <p:cNvPr id="3" name="Content Placeholder 2">
             <a:extLst>
               <a:ext uri="{FF2B5EF4-FFF2-40B4-BE49-F238E27FC236}">
-                <a16:creationId xmlns:a16="http://schemas.microsoft.com/office/drawing/2014/main" id="{0D0A46C8-0BE3-78C9-F703-5B88DA24B732}"/>
+                <a16:creationId xmlns:a16="http://schemas.microsoft.com/office/drawing/2014/main" id="{BC697661-FD58-FCAA-9E69-08B9F6B7E188}"/>
               </a:ext>
             </a:extLst>
           </p:cNvPr>
@@ -10866,66 +10736,21 @@
         </p:nvSpPr>
         <p:spPr>
           <a:xfrm>
-            <a:off x="2231136" y="2638044"/>
-            <a:ext cx="7729728" cy="3936927"/>
-          </a:xfrm>
-        </p:spPr>
-        <p:txBody>
-          <a:bodyPr>
-            <a:normAutofit/>
-          </a:bodyPr>
-          <a:lstStyle/>
-          <a:p>
-            <a:pPr marL="0" indent="0">
-              <a:buNone/>
-            </a:pPr>
-            <a:r>
-              <a:rPr lang="en-US" dirty="0"/>
-              <a:t>BEGIN</a:t>
-            </a:r>
-          </a:p>
-          <a:p>
-            <a:pPr marL="228600" lvl="1" indent="0">
-              <a:buNone/>
-            </a:pPr>
-            <a:r>
-              <a:rPr lang="en-US" dirty="0"/>
-              <a:t>SET numerator = 10</a:t>
-            </a:r>
-          </a:p>
-          <a:p>
-            <a:pPr marL="228600" lvl="1" indent="0">
-              <a:buNone/>
-            </a:pPr>
-            <a:r>
-              <a:rPr lang="en-US" dirty="0"/>
-              <a:t>SET denominator = 0</a:t>
-            </a:r>
-          </a:p>
-          <a:p>
-            <a:pPr marL="228600" lvl="1" indent="0">
-              <a:buNone/>
-            </a:pPr>
+            <a:off x="2231136" y="2358203"/>
+            <a:ext cx="7729728" cy="3101983"/>
+          </a:xfrm>
+        </p:spPr>
+        <p:txBody>
+          <a:bodyPr/>
+          <a:lstStyle/>
+          <a:p>
+            <a:r>
+              <a:rPr lang="en-US" dirty="0"/>
+              <a:t>In Python dividing by zero will crash a program (</a:t>
+            </a:r>
             <a:r>
               <a:rPr lang="en-US" dirty="0" err="1"/>
-              <a:t>improper_fraction</a:t>
-            </a:r>
-            <a:r>
-              <a:rPr lang="en-US" dirty="0"/>
-              <a:t> = denominator &gt; 0 and (numerator/denominator) &gt; 1</a:t>
-            </a:r>
-          </a:p>
-          <a:p>
-            <a:pPr marL="228600" lvl="1" indent="0">
-              <a:buNone/>
-            </a:pPr>
-            <a:r>
-              <a:rPr lang="en-US" dirty="0"/>
-              <a:t>print(</a:t>
-            </a:r>
-            <a:r>
-              <a:rPr lang="en-US" dirty="0" err="1"/>
-              <a:t>improper_fraction</a:t>
+              <a:t>ZeroDivisionError</a:t>
             </a:r>
             <a:r>
               <a:rPr lang="en-US" dirty="0"/>
@@ -10933,44 +10758,86 @@
             </a:r>
           </a:p>
           <a:p>
-            <a:pPr marL="0" indent="0">
-              <a:buNone/>
-            </a:pPr>
-            <a:r>
-              <a:rPr lang="en-US" dirty="0"/>
-              <a:t>END</a:t>
-            </a:r>
-            <a:br>
-              <a:rPr lang="en-US" dirty="0"/>
-            </a:br>
             <a:endParaRPr lang="en-US" dirty="0"/>
           </a:p>
-          <a:p>
-            <a:endParaRPr lang="en-CA" dirty="0"/>
-          </a:p>
-          <a:p>
-            <a:endParaRPr lang="en-CA" dirty="0"/>
-          </a:p>
-        </p:txBody>
-      </p:sp>
+        </p:txBody>
+      </p:sp>
+      <p:pic>
+        <p:nvPicPr>
+          <p:cNvPr id="4" name="Picture 3">
+            <a:extLst>
+              <a:ext uri="{FF2B5EF4-FFF2-40B4-BE49-F238E27FC236}">
+                <a16:creationId xmlns:a16="http://schemas.microsoft.com/office/drawing/2014/main" id="{C2DA94B8-3957-373F-1B03-F7EC48DF2354}"/>
+              </a:ext>
+            </a:extLst>
+          </p:cNvPr>
+          <p:cNvPicPr>
+            <a:picLocks noChangeAspect="1"/>
+          </p:cNvPicPr>
+          <p:nvPr/>
+        </p:nvPicPr>
+        <p:blipFill>
+          <a:blip r:embed="rId2"/>
+          <a:stretch>
+            <a:fillRect/>
+          </a:stretch>
+        </p:blipFill>
+        <p:spPr>
+          <a:xfrm>
+            <a:off x="2376004" y="5442728"/>
+            <a:ext cx="6883400" cy="1346200"/>
+          </a:xfrm>
+          <a:prstGeom prst="rect">
+            <a:avLst/>
+          </a:prstGeom>
+        </p:spPr>
+      </p:pic>
+      <p:pic>
+        <p:nvPicPr>
+          <p:cNvPr id="7" name="Picture 6">
+            <a:extLst>
+              <a:ext uri="{FF2B5EF4-FFF2-40B4-BE49-F238E27FC236}">
+                <a16:creationId xmlns:a16="http://schemas.microsoft.com/office/drawing/2014/main" id="{7DACB6ED-B8C6-03B8-52B6-14AC72DD8A82}"/>
+              </a:ext>
+            </a:extLst>
+          </p:cNvPr>
+          <p:cNvPicPr>
+            <a:picLocks noChangeAspect="1"/>
+          </p:cNvPicPr>
+          <p:nvPr/>
+        </p:nvPicPr>
+        <p:blipFill>
+          <a:blip r:embed="rId3"/>
+          <a:stretch>
+            <a:fillRect/>
+          </a:stretch>
+        </p:blipFill>
+        <p:spPr>
+          <a:xfrm>
+            <a:off x="2376004" y="2828314"/>
+            <a:ext cx="4572000" cy="1790700"/>
+          </a:xfrm>
+          <a:prstGeom prst="rect">
+            <a:avLst/>
+          </a:prstGeom>
+        </p:spPr>
+      </p:pic>
       <p:cxnSp>
         <p:nvCxnSpPr>
-          <p:cNvPr id="4" name="Straight Arrow Connector 3">
-            <a:extLst>
-              <a:ext uri="{FF2B5EF4-FFF2-40B4-BE49-F238E27FC236}">
-                <a16:creationId xmlns:a16="http://schemas.microsoft.com/office/drawing/2014/main" id="{224BCB64-93BF-CF8C-BEC4-E98FE7E12964}"/>
-              </a:ext>
-            </a:extLst>
-          </p:cNvPr>
-          <p:cNvCxnSpPr>
-            <a:cxnSpLocks/>
-          </p:cNvCxnSpPr>
+          <p:cNvPr id="9" name="Straight Arrow Connector 8">
+            <a:extLst>
+              <a:ext uri="{FF2B5EF4-FFF2-40B4-BE49-F238E27FC236}">
+                <a16:creationId xmlns:a16="http://schemas.microsoft.com/office/drawing/2014/main" id="{B8189919-737A-9235-2BA7-611F448EBCEA}"/>
+              </a:ext>
+            </a:extLst>
+          </p:cNvPr>
+          <p:cNvCxnSpPr/>
           <p:nvPr/>
         </p:nvCxnSpPr>
         <p:spPr>
-          <a:xfrm flipV="1">
-            <a:off x="5497285" y="4191000"/>
-            <a:ext cx="0" cy="1164771"/>
+          <a:xfrm flipH="1">
+            <a:off x="4399722" y="5115339"/>
+            <a:ext cx="2438400" cy="1000489"/>
           </a:xfrm>
           <a:prstGeom prst="straightConnector1">
             <a:avLst/>
@@ -10994,53 +10861,12 @@
           </a:fontRef>
         </p:style>
       </p:cxnSp>
-      <p:cxnSp>
-        <p:nvCxnSpPr>
-          <p:cNvPr id="11" name="Straight Arrow Connector 10">
-            <a:extLst>
-              <a:ext uri="{FF2B5EF4-FFF2-40B4-BE49-F238E27FC236}">
-                <a16:creationId xmlns:a16="http://schemas.microsoft.com/office/drawing/2014/main" id="{FD523463-ACA7-0853-E932-3D96646AEC8D}"/>
-              </a:ext>
-            </a:extLst>
-          </p:cNvPr>
-          <p:cNvCxnSpPr>
-            <a:cxnSpLocks/>
-          </p:cNvCxnSpPr>
-          <p:nvPr/>
-        </p:nvCxnSpPr>
-        <p:spPr>
-          <a:xfrm flipV="1">
-            <a:off x="8371114" y="4191000"/>
-            <a:ext cx="0" cy="1164771"/>
-          </a:xfrm>
-          <a:prstGeom prst="straightConnector1">
-            <a:avLst/>
-          </a:prstGeom>
-          <a:ln>
-            <a:tailEnd type="triangle"/>
-          </a:ln>
-        </p:spPr>
-        <p:style>
-          <a:lnRef idx="1">
-            <a:schemeClr val="accent1"/>
-          </a:lnRef>
-          <a:fillRef idx="0">
-            <a:schemeClr val="accent1"/>
-          </a:fillRef>
-          <a:effectRef idx="0">
-            <a:schemeClr val="accent1"/>
-          </a:effectRef>
-          <a:fontRef idx="minor">
-            <a:schemeClr val="tx1"/>
-          </a:fontRef>
-        </p:style>
-      </p:cxnSp>
-      <p:sp>
-        <p:nvSpPr>
-          <p:cNvPr id="5" name="TextBox 4">
-            <a:extLst>
-              <a:ext uri="{FF2B5EF4-FFF2-40B4-BE49-F238E27FC236}">
-                <a16:creationId xmlns:a16="http://schemas.microsoft.com/office/drawing/2014/main" id="{BFDCDFEA-BAF6-FE31-9FCD-A339F87C6725}"/>
+      <p:sp>
+        <p:nvSpPr>
+          <p:cNvPr id="10" name="TextBox 9">
+            <a:extLst>
+              <a:ext uri="{FF2B5EF4-FFF2-40B4-BE49-F238E27FC236}">
+                <a16:creationId xmlns:a16="http://schemas.microsoft.com/office/drawing/2014/main" id="{D2586AD3-C854-A428-3553-34A8A448789E}"/>
               </a:ext>
             </a:extLst>
           </p:cNvPr>
@@ -11049,8 +10875,8 @@
         </p:nvSpPr>
         <p:spPr>
           <a:xfrm>
-            <a:off x="5176523" y="5378157"/>
-            <a:ext cx="2269303" cy="923330"/>
+            <a:off x="6761101" y="4729387"/>
+            <a:ext cx="5010282" cy="369332"/>
           </a:xfrm>
           <a:prstGeom prst="rect">
             <a:avLst/>
@@ -11058,41 +10884,6 @@
           <a:noFill/>
         </p:spPr>
         <p:txBody>
-          <a:bodyPr wrap="square" rtlCol="0">
-            <a:spAutoFit/>
-          </a:bodyPr>
-          <a:lstStyle/>
-          <a:p>
-            <a:r>
-              <a:rPr lang="en-US" dirty="0"/>
-              <a:t>If denominator is zero this expression stops evaluating</a:t>
-            </a:r>
-          </a:p>
-        </p:txBody>
-      </p:sp>
-      <p:sp>
-        <p:nvSpPr>
-          <p:cNvPr id="6" name="TextBox 5">
-            <a:extLst>
-              <a:ext uri="{FF2B5EF4-FFF2-40B4-BE49-F238E27FC236}">
-                <a16:creationId xmlns:a16="http://schemas.microsoft.com/office/drawing/2014/main" id="{C4B12A45-BA33-F77F-AF32-F9E8CBD90338}"/>
-              </a:ext>
-            </a:extLst>
-          </p:cNvPr>
-          <p:cNvSpPr txBox="1"/>
-          <p:nvPr/>
-        </p:nvSpPr>
-        <p:spPr>
-          <a:xfrm>
-            <a:off x="8116101" y="5378157"/>
-            <a:ext cx="1662635" cy="369332"/>
-          </a:xfrm>
-          <a:prstGeom prst="rect">
-            <a:avLst/>
-          </a:prstGeom>
-          <a:noFill/>
-        </p:spPr>
-        <p:txBody>
           <a:bodyPr wrap="none" rtlCol="0">
             <a:spAutoFit/>
           </a:bodyPr>
@@ -11100,7 +10891,15 @@
           <a:p>
             <a:r>
               <a:rPr lang="en-US" dirty="0"/>
-              <a:t>No need to run</a:t>
+              <a:t>If </a:t>
+            </a:r>
+            <a:r>
+              <a:rPr lang="en-US" dirty="0" err="1"/>
+              <a:t>test_value</a:t>
+            </a:r>
+            <a:r>
+              <a:rPr lang="en-US" dirty="0"/>
+              <a:t> is zero this expression stops evaluating</a:t>
             </a:r>
           </a:p>
         </p:txBody>
@@ -11108,7 +10907,7 @@
     </p:spTree>
     <p:extLst>
       <p:ext uri="{BB962C8B-B14F-4D97-AF65-F5344CB8AC3E}">
-        <p14:creationId xmlns:p14="http://schemas.microsoft.com/office/powerpoint/2010/main" val="1791067030"/>
+        <p14:creationId xmlns:p14="http://schemas.microsoft.com/office/powerpoint/2010/main" val="3962015641"/>
       </p:ext>
     </p:extLst>
   </p:cSld>
@@ -11140,250 +10939,6 @@
           <p:cNvPr id="2" name="Title 1">
             <a:extLst>
               <a:ext uri="{FF2B5EF4-FFF2-40B4-BE49-F238E27FC236}">
-                <a16:creationId xmlns:a16="http://schemas.microsoft.com/office/drawing/2014/main" id="{03B8991B-4535-20C1-9E3D-075E1B88FCBB}"/>
-              </a:ext>
-            </a:extLst>
-          </p:cNvPr>
-          <p:cNvSpPr>
-            <a:spLocks noGrp="1"/>
-          </p:cNvSpPr>
-          <p:nvPr>
-            <p:ph type="title"/>
-          </p:nvPr>
-        </p:nvSpPr>
-        <p:spPr/>
-        <p:txBody>
-          <a:bodyPr/>
-          <a:lstStyle/>
-          <a:p>
-            <a:r>
-              <a:rPr lang="en-US" dirty="0"/>
-              <a:t>Short Circuits</a:t>
-            </a:r>
-          </a:p>
-        </p:txBody>
-      </p:sp>
-      <p:sp>
-        <p:nvSpPr>
-          <p:cNvPr id="3" name="Content Placeholder 2">
-            <a:extLst>
-              <a:ext uri="{FF2B5EF4-FFF2-40B4-BE49-F238E27FC236}">
-                <a16:creationId xmlns:a16="http://schemas.microsoft.com/office/drawing/2014/main" id="{BC697661-FD58-FCAA-9E69-08B9F6B7E188}"/>
-              </a:ext>
-            </a:extLst>
-          </p:cNvPr>
-          <p:cNvSpPr>
-            <a:spLocks noGrp="1"/>
-          </p:cNvSpPr>
-          <p:nvPr>
-            <p:ph idx="1"/>
-          </p:nvPr>
-        </p:nvSpPr>
-        <p:spPr>
-          <a:xfrm>
-            <a:off x="2231136" y="2358203"/>
-            <a:ext cx="7729728" cy="3101983"/>
-          </a:xfrm>
-        </p:spPr>
-        <p:txBody>
-          <a:bodyPr/>
-          <a:lstStyle/>
-          <a:p>
-            <a:r>
-              <a:rPr lang="en-US" dirty="0"/>
-              <a:t>In Python dividing by zero will crash a program (</a:t>
-            </a:r>
-            <a:r>
-              <a:rPr lang="en-US" dirty="0" err="1"/>
-              <a:t>ZeroDivisionError</a:t>
-            </a:r>
-            <a:r>
-              <a:rPr lang="en-US" dirty="0"/>
-              <a:t>)</a:t>
-            </a:r>
-          </a:p>
-          <a:p>
-            <a:endParaRPr lang="en-US" dirty="0"/>
-          </a:p>
-        </p:txBody>
-      </p:sp>
-      <p:pic>
-        <p:nvPicPr>
-          <p:cNvPr id="4" name="Picture 3">
-            <a:extLst>
-              <a:ext uri="{FF2B5EF4-FFF2-40B4-BE49-F238E27FC236}">
-                <a16:creationId xmlns:a16="http://schemas.microsoft.com/office/drawing/2014/main" id="{C2DA94B8-3957-373F-1B03-F7EC48DF2354}"/>
-              </a:ext>
-            </a:extLst>
-          </p:cNvPr>
-          <p:cNvPicPr>
-            <a:picLocks noChangeAspect="1"/>
-          </p:cNvPicPr>
-          <p:nvPr/>
-        </p:nvPicPr>
-        <p:blipFill>
-          <a:blip r:embed="rId2"/>
-          <a:stretch>
-            <a:fillRect/>
-          </a:stretch>
-        </p:blipFill>
-        <p:spPr>
-          <a:xfrm>
-            <a:off x="2376004" y="5442728"/>
-            <a:ext cx="6883400" cy="1346200"/>
-          </a:xfrm>
-          <a:prstGeom prst="rect">
-            <a:avLst/>
-          </a:prstGeom>
-        </p:spPr>
-      </p:pic>
-      <p:pic>
-        <p:nvPicPr>
-          <p:cNvPr id="7" name="Picture 6">
-            <a:extLst>
-              <a:ext uri="{FF2B5EF4-FFF2-40B4-BE49-F238E27FC236}">
-                <a16:creationId xmlns:a16="http://schemas.microsoft.com/office/drawing/2014/main" id="{7DACB6ED-B8C6-03B8-52B6-14AC72DD8A82}"/>
-              </a:ext>
-            </a:extLst>
-          </p:cNvPr>
-          <p:cNvPicPr>
-            <a:picLocks noChangeAspect="1"/>
-          </p:cNvPicPr>
-          <p:nvPr/>
-        </p:nvPicPr>
-        <p:blipFill>
-          <a:blip r:embed="rId3"/>
-          <a:stretch>
-            <a:fillRect/>
-          </a:stretch>
-        </p:blipFill>
-        <p:spPr>
-          <a:xfrm>
-            <a:off x="2376004" y="2828314"/>
-            <a:ext cx="4572000" cy="1790700"/>
-          </a:xfrm>
-          <a:prstGeom prst="rect">
-            <a:avLst/>
-          </a:prstGeom>
-        </p:spPr>
-      </p:pic>
-      <p:cxnSp>
-        <p:nvCxnSpPr>
-          <p:cNvPr id="9" name="Straight Arrow Connector 8">
-            <a:extLst>
-              <a:ext uri="{FF2B5EF4-FFF2-40B4-BE49-F238E27FC236}">
-                <a16:creationId xmlns:a16="http://schemas.microsoft.com/office/drawing/2014/main" id="{B8189919-737A-9235-2BA7-611F448EBCEA}"/>
-              </a:ext>
-            </a:extLst>
-          </p:cNvPr>
-          <p:cNvCxnSpPr/>
-          <p:nvPr/>
-        </p:nvCxnSpPr>
-        <p:spPr>
-          <a:xfrm flipH="1">
-            <a:off x="4399722" y="5115339"/>
-            <a:ext cx="2438400" cy="1000489"/>
-          </a:xfrm>
-          <a:prstGeom prst="straightConnector1">
-            <a:avLst/>
-          </a:prstGeom>
-          <a:ln>
-            <a:tailEnd type="triangle"/>
-          </a:ln>
-        </p:spPr>
-        <p:style>
-          <a:lnRef idx="1">
-            <a:schemeClr val="accent1"/>
-          </a:lnRef>
-          <a:fillRef idx="0">
-            <a:schemeClr val="accent1"/>
-          </a:fillRef>
-          <a:effectRef idx="0">
-            <a:schemeClr val="accent1"/>
-          </a:effectRef>
-          <a:fontRef idx="minor">
-            <a:schemeClr val="tx1"/>
-          </a:fontRef>
-        </p:style>
-      </p:cxnSp>
-      <p:sp>
-        <p:nvSpPr>
-          <p:cNvPr id="10" name="TextBox 9">
-            <a:extLst>
-              <a:ext uri="{FF2B5EF4-FFF2-40B4-BE49-F238E27FC236}">
-                <a16:creationId xmlns:a16="http://schemas.microsoft.com/office/drawing/2014/main" id="{D2586AD3-C854-A428-3553-34A8A448789E}"/>
-              </a:ext>
-            </a:extLst>
-          </p:cNvPr>
-          <p:cNvSpPr txBox="1"/>
-          <p:nvPr/>
-        </p:nvSpPr>
-        <p:spPr>
-          <a:xfrm>
-            <a:off x="6761101" y="4729387"/>
-            <a:ext cx="5010282" cy="369332"/>
-          </a:xfrm>
-          <a:prstGeom prst="rect">
-            <a:avLst/>
-          </a:prstGeom>
-          <a:noFill/>
-        </p:spPr>
-        <p:txBody>
-          <a:bodyPr wrap="none" rtlCol="0">
-            <a:spAutoFit/>
-          </a:bodyPr>
-          <a:lstStyle/>
-          <a:p>
-            <a:r>
-              <a:rPr lang="en-US" dirty="0"/>
-              <a:t>If </a:t>
-            </a:r>
-            <a:r>
-              <a:rPr lang="en-US" dirty="0" err="1"/>
-              <a:t>test_value</a:t>
-            </a:r>
-            <a:r>
-              <a:rPr lang="en-US" dirty="0"/>
-              <a:t> is zero this expression stops evaluating</a:t>
-            </a:r>
-          </a:p>
-        </p:txBody>
-      </p:sp>
-    </p:spTree>
-    <p:extLst>
-      <p:ext uri="{BB962C8B-B14F-4D97-AF65-F5344CB8AC3E}">
-        <p14:creationId xmlns:p14="http://schemas.microsoft.com/office/powerpoint/2010/main" val="3962015641"/>
-      </p:ext>
-    </p:extLst>
-  </p:cSld>
-  <p:clrMapOvr>
-    <a:masterClrMapping/>
-  </p:clrMapOvr>
-</p:sld>
-</file>
-
-<file path=ppt/slides/slide32.xml><?xml version="1.0" encoding="utf-8"?>
-<p:sld xmlns:a="http://schemas.openxmlformats.org/drawingml/2006/main" xmlns:r="http://schemas.openxmlformats.org/officeDocument/2006/relationships" xmlns:p="http://schemas.openxmlformats.org/presentationml/2006/main">
-  <p:cSld>
-    <p:spTree>
-      <p:nvGrpSpPr>
-        <p:cNvPr id="1" name=""/>
-        <p:cNvGrpSpPr/>
-        <p:nvPr/>
-      </p:nvGrpSpPr>
-      <p:grpSpPr>
-        <a:xfrm>
-          <a:off x="0" y="0"/>
-          <a:ext cx="0" cy="0"/>
-          <a:chOff x="0" y="0"/>
-          <a:chExt cx="0" cy="0"/>
-        </a:xfrm>
-      </p:grpSpPr>
-      <p:sp>
-        <p:nvSpPr>
-          <p:cNvPr id="2" name="Title 1">
-            <a:extLst>
-              <a:ext uri="{FF2B5EF4-FFF2-40B4-BE49-F238E27FC236}">
                 <a16:creationId xmlns:a16="http://schemas.microsoft.com/office/drawing/2014/main" id="{8F900BA0-8961-A514-500A-64C802713E57}"/>
               </a:ext>
             </a:extLst>
@@ -11478,7 +11033,7 @@
 </p:sld>
 </file>
 
-<file path=ppt/slides/slide33.xml><?xml version="1.0" encoding="utf-8"?>
+<file path=ppt/slides/slide32.xml><?xml version="1.0" encoding="utf-8"?>
 <p:sld xmlns:a="http://schemas.openxmlformats.org/drawingml/2006/main" xmlns:r="http://schemas.openxmlformats.org/officeDocument/2006/relationships" xmlns:p="http://schemas.openxmlformats.org/presentationml/2006/main">
   <p:cSld>
     <p:spTree>
@@ -11742,6 +11297,399 @@
     <p:extLst>
       <p:ext uri="{BB962C8B-B14F-4D97-AF65-F5344CB8AC3E}">
         <p14:creationId xmlns:p14="http://schemas.microsoft.com/office/powerpoint/2010/main" val="3208861966"/>
+      </p:ext>
+    </p:extLst>
+  </p:cSld>
+  <p:clrMapOvr>
+    <a:masterClrMapping/>
+  </p:clrMapOvr>
+</p:sld>
+</file>
+
+<file path=ppt/slides/slide33.xml><?xml version="1.0" encoding="utf-8"?>
+<p:sld xmlns:a="http://schemas.openxmlformats.org/drawingml/2006/main" xmlns:r="http://schemas.openxmlformats.org/officeDocument/2006/relationships" xmlns:p="http://schemas.openxmlformats.org/presentationml/2006/main">
+  <p:cSld>
+    <p:spTree>
+      <p:nvGrpSpPr>
+        <p:cNvPr id="1" name=""/>
+        <p:cNvGrpSpPr/>
+        <p:nvPr/>
+      </p:nvGrpSpPr>
+      <p:grpSpPr>
+        <a:xfrm>
+          <a:off x="0" y="0"/>
+          <a:ext cx="0" cy="0"/>
+          <a:chOff x="0" y="0"/>
+          <a:chExt cx="0" cy="0"/>
+        </a:xfrm>
+      </p:grpSpPr>
+      <p:sp>
+        <p:nvSpPr>
+          <p:cNvPr id="2" name="Title 1">
+            <a:extLst>
+              <a:ext uri="{FF2B5EF4-FFF2-40B4-BE49-F238E27FC236}">
+                <a16:creationId xmlns:a16="http://schemas.microsoft.com/office/drawing/2014/main" id="{359B281F-492B-E78D-89B1-2327C516CF5E}"/>
+              </a:ext>
+            </a:extLst>
+          </p:cNvPr>
+          <p:cNvSpPr>
+            <a:spLocks noGrp="1"/>
+          </p:cNvSpPr>
+          <p:nvPr>
+            <p:ph type="title"/>
+          </p:nvPr>
+        </p:nvSpPr>
+        <p:spPr>
+          <a:xfrm>
+            <a:off x="2231136" y="302083"/>
+            <a:ext cx="7729728" cy="1188720"/>
+          </a:xfrm>
+        </p:spPr>
+        <p:txBody>
+          <a:bodyPr/>
+          <a:lstStyle/>
+          <a:p>
+            <a:r>
+              <a:rPr lang="en-US" dirty="0"/>
+              <a:t>Python Notes</a:t>
+            </a:r>
+          </a:p>
+        </p:txBody>
+      </p:sp>
+      <p:sp>
+        <p:nvSpPr>
+          <p:cNvPr id="3" name="Content Placeholder 2">
+            <a:extLst>
+              <a:ext uri="{FF2B5EF4-FFF2-40B4-BE49-F238E27FC236}">
+                <a16:creationId xmlns:a16="http://schemas.microsoft.com/office/drawing/2014/main" id="{D058956C-8FA2-0E1B-78A3-BCD2BA080750}"/>
+              </a:ext>
+            </a:extLst>
+          </p:cNvPr>
+          <p:cNvSpPr>
+            <a:spLocks noGrp="1"/>
+          </p:cNvSpPr>
+          <p:nvPr>
+            <p:ph idx="1"/>
+          </p:nvPr>
+        </p:nvSpPr>
+        <p:spPr>
+          <a:xfrm>
+            <a:off x="2231136" y="1909174"/>
+            <a:ext cx="9218742" cy="4465122"/>
+          </a:xfrm>
+        </p:spPr>
+        <p:txBody>
+          <a:bodyPr>
+            <a:normAutofit/>
+          </a:bodyPr>
+          <a:lstStyle/>
+          <a:p>
+            <a:r>
+              <a:rPr lang="en-US" sz="2000" dirty="0"/>
+              <a:t>Combining operators can be misleading </a:t>
+            </a:r>
+          </a:p>
+          <a:p>
+            <a:pPr lvl="1"/>
+            <a:r>
+              <a:rPr lang="en-US" sz="1800" dirty="0"/>
+              <a:t>Consider: </a:t>
+            </a:r>
+            <a:r>
+              <a:rPr lang="en-US" sz="1800" dirty="0">
+                <a:latin typeface="Courier New" panose="02070309020205020404" pitchFamily="49" charset="0"/>
+                <a:cs typeface="Courier New" panose="02070309020205020404" pitchFamily="49" charset="0"/>
+              </a:rPr>
+              <a:t>3 &lt; 5 == True</a:t>
+            </a:r>
+          </a:p>
+          <a:p>
+            <a:pPr lvl="1"/>
+            <a:r>
+              <a:rPr lang="en-US" sz="1800" dirty="0">
+                <a:cs typeface="Courier New" panose="02070309020205020404" pitchFamily="49" charset="0"/>
+              </a:rPr>
+              <a:t>Python translates this to: 3 &lt; 5 and 5 == True </a:t>
+            </a:r>
+          </a:p>
+          <a:p>
+            <a:pPr lvl="1"/>
+            <a:r>
+              <a:rPr lang="en-US" sz="1800" dirty="0">
+                <a:cs typeface="Courier New" panose="02070309020205020404" pitchFamily="49" charset="0"/>
+              </a:rPr>
+              <a:t>Convenient for: </a:t>
+            </a:r>
+          </a:p>
+          <a:p>
+            <a:pPr lvl="2"/>
+            <a:r>
+              <a:rPr lang="en-US" sz="1800" dirty="0" err="1">
+                <a:latin typeface="Courier New" panose="02070309020205020404" pitchFamily="49" charset="0"/>
+                <a:cs typeface="Courier New" panose="02070309020205020404" pitchFamily="49" charset="0"/>
+              </a:rPr>
+              <a:t>b_grade</a:t>
+            </a:r>
+            <a:r>
+              <a:rPr lang="en-US" sz="1800" dirty="0">
+                <a:latin typeface="Courier New" panose="02070309020205020404" pitchFamily="49" charset="0"/>
+                <a:cs typeface="Courier New" panose="02070309020205020404" pitchFamily="49" charset="0"/>
+              </a:rPr>
+              <a:t> = 70 &lt; grade  and grade &lt; 80</a:t>
+            </a:r>
+          </a:p>
+          <a:p>
+            <a:pPr lvl="2"/>
+            <a:r>
+              <a:rPr lang="en-US" sz="1800" dirty="0">
+                <a:latin typeface="Courier New" panose="02070309020205020404" pitchFamily="49" charset="0"/>
+                <a:cs typeface="Courier New" panose="02070309020205020404" pitchFamily="49" charset="0"/>
+              </a:rPr>
+              <a:t>70 &lt; grade &lt; 80</a:t>
+            </a:r>
+            <a:endParaRPr lang="en-US" sz="2000" dirty="0">
+              <a:latin typeface="Courier New" panose="02070309020205020404" pitchFamily="49" charset="0"/>
+              <a:cs typeface="Courier New" panose="02070309020205020404" pitchFamily="49" charset="0"/>
+            </a:endParaRPr>
+          </a:p>
+          <a:p>
+            <a:r>
+              <a:rPr lang="en-US" sz="2000" dirty="0">
+                <a:cs typeface="Courier New" panose="02070309020205020404" pitchFamily="49" charset="0"/>
+              </a:rPr>
+              <a:t>Programmers never write </a:t>
+            </a:r>
+            <a:r>
+              <a:rPr lang="en-US" sz="2000" dirty="0">
+                <a:latin typeface="Courier New" panose="02070309020205020404" pitchFamily="49" charset="0"/>
+                <a:cs typeface="Courier New" panose="02070309020205020404" pitchFamily="49" charset="0"/>
+              </a:rPr>
+              <a:t>x == True</a:t>
+            </a:r>
+          </a:p>
+          <a:p>
+            <a:pPr lvl="1"/>
+            <a:r>
+              <a:rPr lang="en-US" sz="1800" dirty="0">
+                <a:cs typeface="Courier New" panose="02070309020205020404" pitchFamily="49" charset="0"/>
+              </a:rPr>
+              <a:t>Just write </a:t>
+            </a:r>
+            <a:r>
+              <a:rPr lang="en-US" sz="1800" dirty="0">
+                <a:latin typeface="Courier New" panose="02070309020205020404" pitchFamily="49" charset="0"/>
+                <a:cs typeface="Courier New" panose="02070309020205020404" pitchFamily="49" charset="0"/>
+              </a:rPr>
+              <a:t>x</a:t>
+            </a:r>
+            <a:r>
+              <a:rPr lang="en-US" sz="1800" dirty="0">
+                <a:cs typeface="Courier New" panose="02070309020205020404" pitchFamily="49" charset="0"/>
+              </a:rPr>
+              <a:t> </a:t>
+            </a:r>
+          </a:p>
+          <a:p>
+            <a:pPr lvl="1"/>
+            <a:r>
+              <a:rPr lang="en-US" sz="1800" strike="sngStrike" dirty="0" err="1">
+                <a:latin typeface="Courier New" panose="02070309020205020404" pitchFamily="49" charset="0"/>
+                <a:cs typeface="Courier New" panose="02070309020205020404" pitchFamily="49" charset="0"/>
+              </a:rPr>
+              <a:t>pass_course</a:t>
+            </a:r>
+            <a:r>
+              <a:rPr lang="en-US" sz="1800" strike="sngStrike" dirty="0">
+                <a:latin typeface="Courier New" panose="02070309020205020404" pitchFamily="49" charset="0"/>
+                <a:cs typeface="Courier New" panose="02070309020205020404" pitchFamily="49" charset="0"/>
+              </a:rPr>
+              <a:t> = </a:t>
+            </a:r>
+            <a:r>
+              <a:rPr lang="en-US" sz="1800" strike="sngStrike" dirty="0" err="1">
+                <a:latin typeface="Courier New" panose="02070309020205020404" pitchFamily="49" charset="0"/>
+                <a:cs typeface="Courier New" panose="02070309020205020404" pitchFamily="49" charset="0"/>
+              </a:rPr>
+              <a:t>testgrades</a:t>
+            </a:r>
+            <a:r>
+              <a:rPr lang="en-US" sz="1800" strike="sngStrike" dirty="0">
+                <a:latin typeface="Courier New" panose="02070309020205020404" pitchFamily="49" charset="0"/>
+                <a:cs typeface="Courier New" panose="02070309020205020404" pitchFamily="49" charset="0"/>
+              </a:rPr>
+              <a:t> &gt; 50 == True</a:t>
+            </a:r>
+          </a:p>
+          <a:p>
+            <a:pPr lvl="1"/>
+            <a:r>
+              <a:rPr lang="en-US" sz="1800" dirty="0" err="1">
+                <a:latin typeface="Courier New" panose="02070309020205020404" pitchFamily="49" charset="0"/>
+                <a:cs typeface="Courier New" panose="02070309020205020404" pitchFamily="49" charset="0"/>
+              </a:rPr>
+              <a:t>pass_course</a:t>
+            </a:r>
+            <a:r>
+              <a:rPr lang="en-US" sz="1800" dirty="0">
+                <a:latin typeface="Courier New" panose="02070309020205020404" pitchFamily="49" charset="0"/>
+                <a:cs typeface="Courier New" panose="02070309020205020404" pitchFamily="49" charset="0"/>
+              </a:rPr>
+              <a:t> = </a:t>
+            </a:r>
+            <a:r>
+              <a:rPr lang="en-US" sz="1800" dirty="0" err="1">
+                <a:latin typeface="Courier New" panose="02070309020205020404" pitchFamily="49" charset="0"/>
+                <a:cs typeface="Courier New" panose="02070309020205020404" pitchFamily="49" charset="0"/>
+              </a:rPr>
+              <a:t>testgrades</a:t>
+            </a:r>
+            <a:r>
+              <a:rPr lang="en-US" sz="1800" dirty="0">
+                <a:latin typeface="Courier New" panose="02070309020205020404" pitchFamily="49" charset="0"/>
+                <a:cs typeface="Courier New" panose="02070309020205020404" pitchFamily="49" charset="0"/>
+              </a:rPr>
+              <a:t> &gt; 50 </a:t>
+            </a:r>
+          </a:p>
+          <a:p>
+            <a:pPr marL="0" indent="0">
+              <a:buNone/>
+            </a:pPr>
+            <a:endParaRPr lang="en-US" sz="2000" dirty="0">
+              <a:cs typeface="Courier New" panose="02070309020205020404" pitchFamily="49" charset="0"/>
+            </a:endParaRPr>
+          </a:p>
+        </p:txBody>
+      </p:sp>
+      <p:sp>
+        <p:nvSpPr>
+          <p:cNvPr id="4" name="Cross 3">
+            <a:extLst>
+              <a:ext uri="{FF2B5EF4-FFF2-40B4-BE49-F238E27FC236}">
+                <a16:creationId xmlns:a16="http://schemas.microsoft.com/office/drawing/2014/main" id="{03F227D7-53C5-95DC-C4F0-DA8473734FD1}"/>
+              </a:ext>
+            </a:extLst>
+          </p:cNvPr>
+          <p:cNvSpPr/>
+          <p:nvPr/>
+        </p:nvSpPr>
+        <p:spPr>
+          <a:xfrm rot="18677720">
+            <a:off x="7898296" y="5194853"/>
+            <a:ext cx="278295" cy="291548"/>
+          </a:xfrm>
+          <a:prstGeom prst="plus">
+            <a:avLst/>
+          </a:prstGeom>
+        </p:spPr>
+        <p:style>
+          <a:lnRef idx="2">
+            <a:schemeClr val="accent1">
+              <a:shade val="15000"/>
+            </a:schemeClr>
+          </a:lnRef>
+          <a:fillRef idx="1">
+            <a:schemeClr val="accent1"/>
+          </a:fillRef>
+          <a:effectRef idx="0">
+            <a:schemeClr val="accent1"/>
+          </a:effectRef>
+          <a:fontRef idx="minor">
+            <a:schemeClr val="lt1"/>
+          </a:fontRef>
+        </p:style>
+        <p:txBody>
+          <a:bodyPr rtlCol="0" anchor="ctr"/>
+          <a:lstStyle/>
+          <a:p>
+            <a:pPr algn="ctr"/>
+            <a:endParaRPr lang="en-US"/>
+          </a:p>
+        </p:txBody>
+      </p:sp>
+      <p:cxnSp>
+        <p:nvCxnSpPr>
+          <p:cNvPr id="6" name="Straight Arrow Connector 5">
+            <a:extLst>
+              <a:ext uri="{FF2B5EF4-FFF2-40B4-BE49-F238E27FC236}">
+                <a16:creationId xmlns:a16="http://schemas.microsoft.com/office/drawing/2014/main" id="{6C2F3130-5121-4428-933F-3D3E53928B58}"/>
+              </a:ext>
+            </a:extLst>
+          </p:cNvPr>
+          <p:cNvCxnSpPr/>
+          <p:nvPr/>
+        </p:nvCxnSpPr>
+        <p:spPr>
+          <a:xfrm flipH="1">
+            <a:off x="5128591" y="4028661"/>
+            <a:ext cx="3273287" cy="106017"/>
+          </a:xfrm>
+          <a:prstGeom prst="straightConnector1">
+            <a:avLst/>
+          </a:prstGeom>
+          <a:ln>
+            <a:tailEnd type="triangle"/>
+          </a:ln>
+        </p:spPr>
+        <p:style>
+          <a:lnRef idx="1">
+            <a:schemeClr val="accent1"/>
+          </a:lnRef>
+          <a:fillRef idx="0">
+            <a:schemeClr val="accent1"/>
+          </a:fillRef>
+          <a:effectRef idx="0">
+            <a:schemeClr val="accent1"/>
+          </a:effectRef>
+          <a:fontRef idx="minor">
+            <a:schemeClr val="tx1"/>
+          </a:fontRef>
+        </p:style>
+      </p:cxnSp>
+      <p:sp>
+        <p:nvSpPr>
+          <p:cNvPr id="7" name="TextBox 6">
+            <a:extLst>
+              <a:ext uri="{FF2B5EF4-FFF2-40B4-BE49-F238E27FC236}">
+                <a16:creationId xmlns:a16="http://schemas.microsoft.com/office/drawing/2014/main" id="{5859B77A-9617-007F-4A53-DE6896A16F11}"/>
+              </a:ext>
+            </a:extLst>
+          </p:cNvPr>
+          <p:cNvSpPr txBox="1"/>
+          <p:nvPr/>
+        </p:nvSpPr>
+        <p:spPr>
+          <a:xfrm>
+            <a:off x="8401878" y="3712337"/>
+            <a:ext cx="2660857" cy="369332"/>
+          </a:xfrm>
+          <a:prstGeom prst="rect">
+            <a:avLst/>
+          </a:prstGeom>
+          <a:noFill/>
+          <a:ln>
+            <a:solidFill>
+              <a:schemeClr val="accent1"/>
+            </a:solidFill>
+          </a:ln>
+        </p:spPr>
+        <p:txBody>
+          <a:bodyPr wrap="none" rtlCol="0">
+            <a:spAutoFit/>
+          </a:bodyPr>
+          <a:lstStyle/>
+          <a:p>
+            <a:r>
+              <a:rPr lang="en-US" dirty="0"/>
+              <a:t>Handy compressed format</a:t>
+            </a:r>
+          </a:p>
+        </p:txBody>
+      </p:sp>
+    </p:spTree>
+    <p:extLst>
+      <p:ext uri="{BB962C8B-B14F-4D97-AF65-F5344CB8AC3E}">
+        <p14:creationId xmlns:p14="http://schemas.microsoft.com/office/powerpoint/2010/main" val="3570195655"/>
       </p:ext>
     </p:extLst>
   </p:cSld>
@@ -11773,399 +11721,6 @@
           <p:cNvPr id="2" name="Title 1">
             <a:extLst>
               <a:ext uri="{FF2B5EF4-FFF2-40B4-BE49-F238E27FC236}">
-                <a16:creationId xmlns:a16="http://schemas.microsoft.com/office/drawing/2014/main" id="{359B281F-492B-E78D-89B1-2327C516CF5E}"/>
-              </a:ext>
-            </a:extLst>
-          </p:cNvPr>
-          <p:cNvSpPr>
-            <a:spLocks noGrp="1"/>
-          </p:cNvSpPr>
-          <p:nvPr>
-            <p:ph type="title"/>
-          </p:nvPr>
-        </p:nvSpPr>
-        <p:spPr>
-          <a:xfrm>
-            <a:off x="2231136" y="302083"/>
-            <a:ext cx="7729728" cy="1188720"/>
-          </a:xfrm>
-        </p:spPr>
-        <p:txBody>
-          <a:bodyPr/>
-          <a:lstStyle/>
-          <a:p>
-            <a:r>
-              <a:rPr lang="en-US" dirty="0"/>
-              <a:t>Python Notes</a:t>
-            </a:r>
-          </a:p>
-        </p:txBody>
-      </p:sp>
-      <p:sp>
-        <p:nvSpPr>
-          <p:cNvPr id="3" name="Content Placeholder 2">
-            <a:extLst>
-              <a:ext uri="{FF2B5EF4-FFF2-40B4-BE49-F238E27FC236}">
-                <a16:creationId xmlns:a16="http://schemas.microsoft.com/office/drawing/2014/main" id="{D058956C-8FA2-0E1B-78A3-BCD2BA080750}"/>
-              </a:ext>
-            </a:extLst>
-          </p:cNvPr>
-          <p:cNvSpPr>
-            <a:spLocks noGrp="1"/>
-          </p:cNvSpPr>
-          <p:nvPr>
-            <p:ph idx="1"/>
-          </p:nvPr>
-        </p:nvSpPr>
-        <p:spPr>
-          <a:xfrm>
-            <a:off x="2231136" y="1909174"/>
-            <a:ext cx="9218742" cy="4465122"/>
-          </a:xfrm>
-        </p:spPr>
-        <p:txBody>
-          <a:bodyPr>
-            <a:normAutofit/>
-          </a:bodyPr>
-          <a:lstStyle/>
-          <a:p>
-            <a:r>
-              <a:rPr lang="en-US" sz="2000" dirty="0"/>
-              <a:t>Combining operators can be misleading </a:t>
-            </a:r>
-          </a:p>
-          <a:p>
-            <a:pPr lvl="1"/>
-            <a:r>
-              <a:rPr lang="en-US" sz="1800" dirty="0"/>
-              <a:t>Consider: </a:t>
-            </a:r>
-            <a:r>
-              <a:rPr lang="en-US" sz="1800" dirty="0">
-                <a:latin typeface="Courier New" panose="02070309020205020404" pitchFamily="49" charset="0"/>
-                <a:cs typeface="Courier New" panose="02070309020205020404" pitchFamily="49" charset="0"/>
-              </a:rPr>
-              <a:t>3 &lt; 5 == True</a:t>
-            </a:r>
-          </a:p>
-          <a:p>
-            <a:pPr lvl="1"/>
-            <a:r>
-              <a:rPr lang="en-US" sz="1800" dirty="0">
-                <a:cs typeface="Courier New" panose="02070309020205020404" pitchFamily="49" charset="0"/>
-              </a:rPr>
-              <a:t>Python translates this to: 3 &lt; 5 and 5 == True </a:t>
-            </a:r>
-          </a:p>
-          <a:p>
-            <a:pPr lvl="1"/>
-            <a:r>
-              <a:rPr lang="en-US" sz="1800" dirty="0">
-                <a:cs typeface="Courier New" panose="02070309020205020404" pitchFamily="49" charset="0"/>
-              </a:rPr>
-              <a:t>Convenient for: </a:t>
-            </a:r>
-          </a:p>
-          <a:p>
-            <a:pPr lvl="2"/>
-            <a:r>
-              <a:rPr lang="en-US" sz="1800" dirty="0" err="1">
-                <a:latin typeface="Courier New" panose="02070309020205020404" pitchFamily="49" charset="0"/>
-                <a:cs typeface="Courier New" panose="02070309020205020404" pitchFamily="49" charset="0"/>
-              </a:rPr>
-              <a:t>b_grade</a:t>
-            </a:r>
-            <a:r>
-              <a:rPr lang="en-US" sz="1800" dirty="0">
-                <a:latin typeface="Courier New" panose="02070309020205020404" pitchFamily="49" charset="0"/>
-                <a:cs typeface="Courier New" panose="02070309020205020404" pitchFamily="49" charset="0"/>
-              </a:rPr>
-              <a:t> = 70 &lt; grade  and grade &lt; 80</a:t>
-            </a:r>
-          </a:p>
-          <a:p>
-            <a:pPr lvl="2"/>
-            <a:r>
-              <a:rPr lang="en-US" sz="1800" dirty="0">
-                <a:latin typeface="Courier New" panose="02070309020205020404" pitchFamily="49" charset="0"/>
-                <a:cs typeface="Courier New" panose="02070309020205020404" pitchFamily="49" charset="0"/>
-              </a:rPr>
-              <a:t>70 &lt; grade &lt; 80</a:t>
-            </a:r>
-            <a:endParaRPr lang="en-US" sz="2000" dirty="0">
-              <a:latin typeface="Courier New" panose="02070309020205020404" pitchFamily="49" charset="0"/>
-              <a:cs typeface="Courier New" panose="02070309020205020404" pitchFamily="49" charset="0"/>
-            </a:endParaRPr>
-          </a:p>
-          <a:p>
-            <a:r>
-              <a:rPr lang="en-US" sz="2000" dirty="0">
-                <a:cs typeface="Courier New" panose="02070309020205020404" pitchFamily="49" charset="0"/>
-              </a:rPr>
-              <a:t>Programmers never write </a:t>
-            </a:r>
-            <a:r>
-              <a:rPr lang="en-US" sz="2000" dirty="0">
-                <a:latin typeface="Courier New" panose="02070309020205020404" pitchFamily="49" charset="0"/>
-                <a:cs typeface="Courier New" panose="02070309020205020404" pitchFamily="49" charset="0"/>
-              </a:rPr>
-              <a:t>x == True</a:t>
-            </a:r>
-          </a:p>
-          <a:p>
-            <a:pPr lvl="1"/>
-            <a:r>
-              <a:rPr lang="en-US" sz="1800" dirty="0">
-                <a:cs typeface="Courier New" panose="02070309020205020404" pitchFamily="49" charset="0"/>
-              </a:rPr>
-              <a:t>Just write </a:t>
-            </a:r>
-            <a:r>
-              <a:rPr lang="en-US" sz="1800" dirty="0">
-                <a:latin typeface="Courier New" panose="02070309020205020404" pitchFamily="49" charset="0"/>
-                <a:cs typeface="Courier New" panose="02070309020205020404" pitchFamily="49" charset="0"/>
-              </a:rPr>
-              <a:t>x</a:t>
-            </a:r>
-            <a:r>
-              <a:rPr lang="en-US" sz="1800" dirty="0">
-                <a:cs typeface="Courier New" panose="02070309020205020404" pitchFamily="49" charset="0"/>
-              </a:rPr>
-              <a:t> </a:t>
-            </a:r>
-          </a:p>
-          <a:p>
-            <a:pPr lvl="1"/>
-            <a:r>
-              <a:rPr lang="en-US" sz="1800" strike="sngStrike" dirty="0" err="1">
-                <a:latin typeface="Courier New" panose="02070309020205020404" pitchFamily="49" charset="0"/>
-                <a:cs typeface="Courier New" panose="02070309020205020404" pitchFamily="49" charset="0"/>
-              </a:rPr>
-              <a:t>pass_course</a:t>
-            </a:r>
-            <a:r>
-              <a:rPr lang="en-US" sz="1800" strike="sngStrike" dirty="0">
-                <a:latin typeface="Courier New" panose="02070309020205020404" pitchFamily="49" charset="0"/>
-                <a:cs typeface="Courier New" panose="02070309020205020404" pitchFamily="49" charset="0"/>
-              </a:rPr>
-              <a:t> = </a:t>
-            </a:r>
-            <a:r>
-              <a:rPr lang="en-US" sz="1800" strike="sngStrike" dirty="0" err="1">
-                <a:latin typeface="Courier New" panose="02070309020205020404" pitchFamily="49" charset="0"/>
-                <a:cs typeface="Courier New" panose="02070309020205020404" pitchFamily="49" charset="0"/>
-              </a:rPr>
-              <a:t>testgrades</a:t>
-            </a:r>
-            <a:r>
-              <a:rPr lang="en-US" sz="1800" strike="sngStrike" dirty="0">
-                <a:latin typeface="Courier New" panose="02070309020205020404" pitchFamily="49" charset="0"/>
-                <a:cs typeface="Courier New" panose="02070309020205020404" pitchFamily="49" charset="0"/>
-              </a:rPr>
-              <a:t> &gt; 50 == True</a:t>
-            </a:r>
-          </a:p>
-          <a:p>
-            <a:pPr lvl="1"/>
-            <a:r>
-              <a:rPr lang="en-US" sz="1800" dirty="0" err="1">
-                <a:latin typeface="Courier New" panose="02070309020205020404" pitchFamily="49" charset="0"/>
-                <a:cs typeface="Courier New" panose="02070309020205020404" pitchFamily="49" charset="0"/>
-              </a:rPr>
-              <a:t>pass_course</a:t>
-            </a:r>
-            <a:r>
-              <a:rPr lang="en-US" sz="1800" dirty="0">
-                <a:latin typeface="Courier New" panose="02070309020205020404" pitchFamily="49" charset="0"/>
-                <a:cs typeface="Courier New" panose="02070309020205020404" pitchFamily="49" charset="0"/>
-              </a:rPr>
-              <a:t> = </a:t>
-            </a:r>
-            <a:r>
-              <a:rPr lang="en-US" sz="1800" dirty="0" err="1">
-                <a:latin typeface="Courier New" panose="02070309020205020404" pitchFamily="49" charset="0"/>
-                <a:cs typeface="Courier New" panose="02070309020205020404" pitchFamily="49" charset="0"/>
-              </a:rPr>
-              <a:t>testgrades</a:t>
-            </a:r>
-            <a:r>
-              <a:rPr lang="en-US" sz="1800" dirty="0">
-                <a:latin typeface="Courier New" panose="02070309020205020404" pitchFamily="49" charset="0"/>
-                <a:cs typeface="Courier New" panose="02070309020205020404" pitchFamily="49" charset="0"/>
-              </a:rPr>
-              <a:t> &gt; 50 </a:t>
-            </a:r>
-          </a:p>
-          <a:p>
-            <a:pPr marL="0" indent="0">
-              <a:buNone/>
-            </a:pPr>
-            <a:endParaRPr lang="en-US" sz="2000" dirty="0">
-              <a:cs typeface="Courier New" panose="02070309020205020404" pitchFamily="49" charset="0"/>
-            </a:endParaRPr>
-          </a:p>
-        </p:txBody>
-      </p:sp>
-      <p:sp>
-        <p:nvSpPr>
-          <p:cNvPr id="4" name="Cross 3">
-            <a:extLst>
-              <a:ext uri="{FF2B5EF4-FFF2-40B4-BE49-F238E27FC236}">
-                <a16:creationId xmlns:a16="http://schemas.microsoft.com/office/drawing/2014/main" id="{03F227D7-53C5-95DC-C4F0-DA8473734FD1}"/>
-              </a:ext>
-            </a:extLst>
-          </p:cNvPr>
-          <p:cNvSpPr/>
-          <p:nvPr/>
-        </p:nvSpPr>
-        <p:spPr>
-          <a:xfrm rot="18677720">
-            <a:off x="7898296" y="5194853"/>
-            <a:ext cx="278295" cy="291548"/>
-          </a:xfrm>
-          <a:prstGeom prst="plus">
-            <a:avLst/>
-          </a:prstGeom>
-        </p:spPr>
-        <p:style>
-          <a:lnRef idx="2">
-            <a:schemeClr val="accent1">
-              <a:shade val="15000"/>
-            </a:schemeClr>
-          </a:lnRef>
-          <a:fillRef idx="1">
-            <a:schemeClr val="accent1"/>
-          </a:fillRef>
-          <a:effectRef idx="0">
-            <a:schemeClr val="accent1"/>
-          </a:effectRef>
-          <a:fontRef idx="minor">
-            <a:schemeClr val="lt1"/>
-          </a:fontRef>
-        </p:style>
-        <p:txBody>
-          <a:bodyPr rtlCol="0" anchor="ctr"/>
-          <a:lstStyle/>
-          <a:p>
-            <a:pPr algn="ctr"/>
-            <a:endParaRPr lang="en-US"/>
-          </a:p>
-        </p:txBody>
-      </p:sp>
-      <p:cxnSp>
-        <p:nvCxnSpPr>
-          <p:cNvPr id="6" name="Straight Arrow Connector 5">
-            <a:extLst>
-              <a:ext uri="{FF2B5EF4-FFF2-40B4-BE49-F238E27FC236}">
-                <a16:creationId xmlns:a16="http://schemas.microsoft.com/office/drawing/2014/main" id="{6C2F3130-5121-4428-933F-3D3E53928B58}"/>
-              </a:ext>
-            </a:extLst>
-          </p:cNvPr>
-          <p:cNvCxnSpPr/>
-          <p:nvPr/>
-        </p:nvCxnSpPr>
-        <p:spPr>
-          <a:xfrm flipH="1">
-            <a:off x="5128591" y="4028661"/>
-            <a:ext cx="3273287" cy="106017"/>
-          </a:xfrm>
-          <a:prstGeom prst="straightConnector1">
-            <a:avLst/>
-          </a:prstGeom>
-          <a:ln>
-            <a:tailEnd type="triangle"/>
-          </a:ln>
-        </p:spPr>
-        <p:style>
-          <a:lnRef idx="1">
-            <a:schemeClr val="accent1"/>
-          </a:lnRef>
-          <a:fillRef idx="0">
-            <a:schemeClr val="accent1"/>
-          </a:fillRef>
-          <a:effectRef idx="0">
-            <a:schemeClr val="accent1"/>
-          </a:effectRef>
-          <a:fontRef idx="minor">
-            <a:schemeClr val="tx1"/>
-          </a:fontRef>
-        </p:style>
-      </p:cxnSp>
-      <p:sp>
-        <p:nvSpPr>
-          <p:cNvPr id="7" name="TextBox 6">
-            <a:extLst>
-              <a:ext uri="{FF2B5EF4-FFF2-40B4-BE49-F238E27FC236}">
-                <a16:creationId xmlns:a16="http://schemas.microsoft.com/office/drawing/2014/main" id="{5859B77A-9617-007F-4A53-DE6896A16F11}"/>
-              </a:ext>
-            </a:extLst>
-          </p:cNvPr>
-          <p:cNvSpPr txBox="1"/>
-          <p:nvPr/>
-        </p:nvSpPr>
-        <p:spPr>
-          <a:xfrm>
-            <a:off x="8401878" y="3712337"/>
-            <a:ext cx="2660857" cy="369332"/>
-          </a:xfrm>
-          <a:prstGeom prst="rect">
-            <a:avLst/>
-          </a:prstGeom>
-          <a:noFill/>
-          <a:ln>
-            <a:solidFill>
-              <a:schemeClr val="accent1"/>
-            </a:solidFill>
-          </a:ln>
-        </p:spPr>
-        <p:txBody>
-          <a:bodyPr wrap="none" rtlCol="0">
-            <a:spAutoFit/>
-          </a:bodyPr>
-          <a:lstStyle/>
-          <a:p>
-            <a:r>
-              <a:rPr lang="en-US" dirty="0"/>
-              <a:t>Handy compressed format</a:t>
-            </a:r>
-          </a:p>
-        </p:txBody>
-      </p:sp>
-    </p:spTree>
-    <p:extLst>
-      <p:ext uri="{BB962C8B-B14F-4D97-AF65-F5344CB8AC3E}">
-        <p14:creationId xmlns:p14="http://schemas.microsoft.com/office/powerpoint/2010/main" val="3570195655"/>
-      </p:ext>
-    </p:extLst>
-  </p:cSld>
-  <p:clrMapOvr>
-    <a:masterClrMapping/>
-  </p:clrMapOvr>
-</p:sld>
-</file>
-
-<file path=ppt/slides/slide35.xml><?xml version="1.0" encoding="utf-8"?>
-<p:sld xmlns:a="http://schemas.openxmlformats.org/drawingml/2006/main" xmlns:r="http://schemas.openxmlformats.org/officeDocument/2006/relationships" xmlns:p="http://schemas.openxmlformats.org/presentationml/2006/main">
-  <p:cSld>
-    <p:spTree>
-      <p:nvGrpSpPr>
-        <p:cNvPr id="1" name=""/>
-        <p:cNvGrpSpPr/>
-        <p:nvPr/>
-      </p:nvGrpSpPr>
-      <p:grpSpPr>
-        <a:xfrm>
-          <a:off x="0" y="0"/>
-          <a:ext cx="0" cy="0"/>
-          <a:chOff x="0" y="0"/>
-          <a:chExt cx="0" cy="0"/>
-        </a:xfrm>
-      </p:grpSpPr>
-      <p:sp>
-        <p:nvSpPr>
-          <p:cNvPr id="2" name="Title 1">
-            <a:extLst>
-              <a:ext uri="{FF2B5EF4-FFF2-40B4-BE49-F238E27FC236}">
                 <a16:creationId xmlns:a16="http://schemas.microsoft.com/office/drawing/2014/main" id="{A410408B-17CB-DCC0-D22D-3E295A90D9DD}"/>
               </a:ext>
             </a:extLst>
@@ -12423,7 +11978,7 @@
 </p:sld>
 </file>
 
-<file path=ppt/slides/slide36.xml><?xml version="1.0" encoding="utf-8"?>
+<file path=ppt/slides/slide35.xml><?xml version="1.0" encoding="utf-8"?>
 <p:sld xmlns:a="http://schemas.openxmlformats.org/drawingml/2006/main" xmlns:r="http://schemas.openxmlformats.org/officeDocument/2006/relationships" xmlns:p="http://schemas.openxmlformats.org/presentationml/2006/main">
   <p:cSld>
     <p:bg>
@@ -12651,7 +12206,7 @@
 </p:sld>
 </file>
 
-<file path=ppt/slides/slide37.xml><?xml version="1.0" encoding="utf-8"?>
+<file path=ppt/slides/slide36.xml><?xml version="1.0" encoding="utf-8"?>
 <p:sld xmlns:a="http://schemas.openxmlformats.org/drawingml/2006/main" xmlns:r="http://schemas.openxmlformats.org/officeDocument/2006/relationships" xmlns:p="http://schemas.openxmlformats.org/presentationml/2006/main">
   <p:cSld>
     <p:bg>
@@ -12920,7 +12475,7 @@
 </p:sld>
 </file>
 
-<file path=ppt/slides/slide38.xml><?xml version="1.0" encoding="utf-8"?>
+<file path=ppt/slides/slide37.xml><?xml version="1.0" encoding="utf-8"?>
 <p:sld xmlns:a="http://schemas.openxmlformats.org/drawingml/2006/main" xmlns:r="http://schemas.openxmlformats.org/officeDocument/2006/relationships" xmlns:p="http://schemas.openxmlformats.org/presentationml/2006/main">
   <p:cSld>
     <p:bg>
@@ -13149,7 +12704,7 @@
 </p:sld>
 </file>
 
-<file path=ppt/slides/slide39.xml><?xml version="1.0" encoding="utf-8"?>
+<file path=ppt/slides/slide38.xml><?xml version="1.0" encoding="utf-8"?>
 <p:sld xmlns:a="http://schemas.openxmlformats.org/drawingml/2006/main" xmlns:r="http://schemas.openxmlformats.org/officeDocument/2006/relationships" xmlns:p="http://schemas.openxmlformats.org/presentationml/2006/main">
   <p:cSld>
     <p:spTree>
@@ -13312,7 +12867,7 @@
           <p:cNvPr id="2" name="Title 1">
             <a:extLst>
               <a:ext uri="{FF2B5EF4-FFF2-40B4-BE49-F238E27FC236}">
-                <a16:creationId xmlns:a16="http://schemas.microsoft.com/office/drawing/2014/main" id="{CD25298F-A86B-A447-BDE2-C87F1B019B95}"/>
+                <a16:creationId xmlns:a16="http://schemas.microsoft.com/office/drawing/2014/main" id="{56A66DF5-BF40-0CEC-5545-A32225483AD5}"/>
               </a:ext>
             </a:extLst>
           </p:cNvPr>
@@ -13323,19 +12878,14 @@
             <p:ph type="title"/>
           </p:nvPr>
         </p:nvSpPr>
-        <p:spPr>
-          <a:xfrm>
-            <a:off x="2231136" y="307075"/>
-            <a:ext cx="7729728" cy="1188720"/>
-          </a:xfrm>
-        </p:spPr>
+        <p:spPr/>
         <p:txBody>
           <a:bodyPr/>
           <a:lstStyle/>
           <a:p>
             <a:r>
               <a:rPr lang="en-US" dirty="0"/>
-              <a:t>Expressions</a:t>
+              <a:t>Arithmetic Expressions</a:t>
             </a:r>
           </a:p>
         </p:txBody>
@@ -13345,7 +12895,7 @@
           <p:cNvPr id="3" name="Content Placeholder 2">
             <a:extLst>
               <a:ext uri="{FF2B5EF4-FFF2-40B4-BE49-F238E27FC236}">
-                <a16:creationId xmlns:a16="http://schemas.microsoft.com/office/drawing/2014/main" id="{35F12C5D-5398-8E2E-01A0-82C448B5FF5E}"/>
+                <a16:creationId xmlns:a16="http://schemas.microsoft.com/office/drawing/2014/main" id="{47D3A038-3F53-2BA0-23DD-F10DAE609793}"/>
               </a:ext>
             </a:extLst>
           </p:cNvPr>
@@ -13356,78 +12906,67 @@
             <p:ph idx="1"/>
           </p:nvPr>
         </p:nvSpPr>
-        <p:spPr>
-          <a:xfrm>
-            <a:off x="2231136" y="1966015"/>
-            <a:ext cx="7729728" cy="3912881"/>
-          </a:xfrm>
-        </p:spPr>
+        <p:spPr/>
         <p:txBody>
           <a:bodyPr>
-            <a:normAutofit/>
+            <a:normAutofit lnSpcReduction="10000"/>
           </a:bodyPr>
           <a:lstStyle/>
           <a:p>
             <a:r>
               <a:rPr lang="en-US" sz="2400" dirty="0"/>
-              <a:t>Combinations of literal values, variables, operators and function calls that the python interpreter evaluates to produce a single value</a:t>
+              <a:t>Follows mathematical operator precedence (BEDMAS)</a:t>
             </a:r>
           </a:p>
           <a:p>
             <a:pPr lvl="1"/>
             <a:r>
               <a:rPr lang="en-US" sz="2000" dirty="0"/>
-              <a:t>Primarily compute and return results</a:t>
+              <a:t>Left to right evaluation</a:t>
             </a:r>
           </a:p>
           <a:p>
             <a:r>
               <a:rPr lang="en-US" sz="2400" dirty="0"/>
-              <a:t>Examples of Types of expressions</a:t>
+              <a:t>Supports: + - * / // % **</a:t>
+            </a:r>
+          </a:p>
+          <a:p>
+            <a:r>
+              <a:rPr lang="en-US" sz="2400" dirty="0"/>
+              <a:t> Be mindful of the return type for the expression</a:t>
             </a:r>
           </a:p>
           <a:p>
             <a:pPr lvl="1"/>
             <a:r>
               <a:rPr lang="en-US" sz="2000" dirty="0"/>
-              <a:t>Arithmetic expressions ( + - * / // **, …)</a:t>
-            </a:r>
-          </a:p>
-          <a:p>
-            <a:pPr lvl="1"/>
+              <a:t>Generally, if </a:t>
+            </a:r>
+            <a:r>
+              <a:rPr lang="en-US" sz="2000" dirty="0" err="1"/>
+              <a:t>ints</a:t>
+            </a:r>
             <a:r>
               <a:rPr lang="en-US" sz="2000" dirty="0"/>
-              <a:t>Comparison expressions (&gt; &lt; &gt;= &lt;= ==, …)</a:t>
-            </a:r>
-          </a:p>
-          <a:p>
-            <a:pPr lvl="1"/>
-            <a:r>
-              <a:rPr lang="en-US" sz="2000" dirty="0"/>
-              <a:t>Logical expressions (and or not )</a:t>
-            </a:r>
-          </a:p>
-          <a:p>
-            <a:pPr lvl="1"/>
-            <a:r>
-              <a:rPr lang="en-US" sz="2000" dirty="0"/>
-              <a:t>Function call expression (abs( ), </a:t>
-            </a:r>
-            <a:r>
-              <a:rPr lang="en-US" sz="2000" dirty="0" err="1"/>
-              <a:t>len</a:t>
-            </a:r>
-            <a:r>
-              <a:rPr lang="en-US" sz="2000" dirty="0"/>
-              <a:t>( ), …)</a:t>
-            </a:r>
+              <a:t> and floats are both involved then the result is “elevated” to float</a:t>
+            </a:r>
+          </a:p>
+          <a:p>
+            <a:r>
+              <a:rPr lang="en-US" sz="2400" dirty="0"/>
+              <a:t>String concatenation is supported with +</a:t>
+            </a:r>
+          </a:p>
+          <a:p>
+            <a:endParaRPr lang="en-US" sz="2400" dirty="0"/>
           </a:p>
         </p:txBody>
       </p:sp>
     </p:spTree>
     <p:extLst>
       <p:ext uri="{BB962C8B-B14F-4D97-AF65-F5344CB8AC3E}">
-        <p14:creationId xmlns:p14="http://schemas.microsoft.com/office/powerpoint/2010/main" val="800729723"/>
+        <p14:creationId xmlns:p14="http://schemas.microsoft.com/office/powerpoint/2010/main" val="3778481574"/>
       </p:ext>
     </p:extLst>
   </p:cSld>
@@ -13459,7 +12998,7 @@
           <p:cNvPr id="2" name="Title 1">
             <a:extLst>
               <a:ext uri="{FF2B5EF4-FFF2-40B4-BE49-F238E27FC236}">
-                <a16:creationId xmlns:a16="http://schemas.microsoft.com/office/drawing/2014/main" id="{56A66DF5-BF40-0CEC-5545-A32225483AD5}"/>
+                <a16:creationId xmlns:a16="http://schemas.microsoft.com/office/drawing/2014/main" id="{577EC603-3165-DA15-6251-B4D6774BBF00}"/>
               </a:ext>
             </a:extLst>
           </p:cNvPr>
@@ -13477,7 +13016,7 @@
           <a:p>
             <a:r>
               <a:rPr lang="en-US" dirty="0"/>
-              <a:t>Arithmetic Expressions</a:t>
+              <a:t>Self Check</a:t>
             </a:r>
           </a:p>
         </p:txBody>
@@ -13487,7 +13026,7 @@
           <p:cNvPr id="3" name="Content Placeholder 2">
             <a:extLst>
               <a:ext uri="{FF2B5EF4-FFF2-40B4-BE49-F238E27FC236}">
-                <a16:creationId xmlns:a16="http://schemas.microsoft.com/office/drawing/2014/main" id="{47D3A038-3F53-2BA0-23DD-F10DAE609793}"/>
+                <a16:creationId xmlns:a16="http://schemas.microsoft.com/office/drawing/2014/main" id="{453FD934-EEA7-EF93-C861-66F16A99CD28}"/>
               </a:ext>
             </a:extLst>
           </p:cNvPr>
@@ -13498,67 +13037,462 @@
             <p:ph idx="1"/>
           </p:nvPr>
         </p:nvSpPr>
-        <p:spPr/>
+        <p:spPr>
+          <a:xfrm>
+            <a:off x="2231136" y="2455848"/>
+            <a:ext cx="7946808" cy="711640"/>
+          </a:xfrm>
+        </p:spPr>
         <p:txBody>
           <a:bodyPr>
-            <a:normAutofit lnSpcReduction="10000"/>
+            <a:normAutofit fontScale="92500" lnSpcReduction="10000"/>
           </a:bodyPr>
           <a:lstStyle/>
           <a:p>
             <a:r>
-              <a:rPr lang="en-US" sz="2400" dirty="0"/>
-              <a:t>Follows mathematical operator precedence (BEDMAS)</a:t>
-            </a:r>
-          </a:p>
-          <a:p>
-            <a:pPr lvl="1"/>
-            <a:r>
-              <a:rPr lang="en-US" sz="2000" dirty="0"/>
-              <a:t>Left to right evaluation</a:t>
-            </a:r>
-          </a:p>
-          <a:p>
-            <a:r>
-              <a:rPr lang="en-US" sz="2400" dirty="0"/>
-              <a:t>Supports: + - * / // % **</a:t>
-            </a:r>
-          </a:p>
-          <a:p>
-            <a:r>
-              <a:rPr lang="en-US" sz="2400" dirty="0"/>
-              <a:t> Be mindful of the return type for the expression</a:t>
-            </a:r>
-          </a:p>
-          <a:p>
-            <a:pPr lvl="1"/>
-            <a:r>
-              <a:rPr lang="en-US" sz="2000" dirty="0"/>
-              <a:t>Generally, if </a:t>
-            </a:r>
-            <a:r>
-              <a:rPr lang="en-US" sz="2000" dirty="0" err="1"/>
-              <a:t>ints</a:t>
-            </a:r>
-            <a:r>
-              <a:rPr lang="en-US" sz="2000" dirty="0"/>
-              <a:t> and floats are both involved then the result is “elevated” to float</a:t>
-            </a:r>
-          </a:p>
-          <a:p>
-            <a:r>
-              <a:rPr lang="en-US" sz="2400" dirty="0"/>
-              <a:t>String concatenation is supported with +</a:t>
-            </a:r>
-          </a:p>
-          <a:p>
-            <a:endParaRPr lang="en-US" sz="2400" dirty="0"/>
+              <a:rPr lang="en-US" dirty="0"/>
+              <a:t>What do the following arithmetic expressions evaluate to? </a:t>
+            </a:r>
+          </a:p>
+          <a:p>
+            <a:pPr marL="0" indent="0" algn="ctr">
+              <a:buNone/>
+            </a:pPr>
+            <a:r>
+              <a:rPr lang="en-US" dirty="0"/>
+              <a:t>(Be mindful of your return types)</a:t>
+            </a:r>
+          </a:p>
+          <a:p>
+            <a:pPr marL="0" indent="0">
+              <a:buNone/>
+            </a:pPr>
+            <a:endParaRPr lang="en-US" dirty="0"/>
+          </a:p>
+        </p:txBody>
+      </p:sp>
+      <p:sp>
+        <p:nvSpPr>
+          <p:cNvPr id="4" name="TextBox 3">
+            <a:extLst>
+              <a:ext uri="{FF2B5EF4-FFF2-40B4-BE49-F238E27FC236}">
+                <a16:creationId xmlns:a16="http://schemas.microsoft.com/office/drawing/2014/main" id="{068BF6E7-1819-1ADD-0081-2741E0E36592}"/>
+              </a:ext>
+            </a:extLst>
+          </p:cNvPr>
+          <p:cNvSpPr txBox="1"/>
+          <p:nvPr/>
+        </p:nvSpPr>
+        <p:spPr>
+          <a:xfrm>
+            <a:off x="2231136" y="3349684"/>
+            <a:ext cx="5147563" cy="369332"/>
+          </a:xfrm>
+          <a:prstGeom prst="rect">
+            <a:avLst/>
+          </a:prstGeom>
+          <a:noFill/>
+          <a:ln>
+            <a:solidFill>
+              <a:srgbClr val="404040"/>
+            </a:solidFill>
+          </a:ln>
+        </p:spPr>
+        <p:txBody>
+          <a:bodyPr wrap="none" rtlCol="0">
+            <a:spAutoFit/>
+          </a:bodyPr>
+          <a:lstStyle/>
+          <a:p>
+            <a:r>
+              <a:rPr lang="en-US" dirty="0">
+                <a:latin typeface="Courier New" panose="02070309020205020404" pitchFamily="49" charset="0"/>
+                <a:cs typeface="Courier New" panose="02070309020205020404" pitchFamily="49" charset="0"/>
+              </a:rPr>
+              <a:t>int(“5” + “5”) + int(“5”) + int(“5”)</a:t>
+            </a:r>
+          </a:p>
+        </p:txBody>
+      </p:sp>
+      <p:sp>
+        <p:nvSpPr>
+          <p:cNvPr id="5" name="TextBox 4">
+            <a:extLst>
+              <a:ext uri="{FF2B5EF4-FFF2-40B4-BE49-F238E27FC236}">
+                <a16:creationId xmlns:a16="http://schemas.microsoft.com/office/drawing/2014/main" id="{AA0E8036-CC17-CD3F-90DE-2F7CB8BCDC66}"/>
+              </a:ext>
+            </a:extLst>
+          </p:cNvPr>
+          <p:cNvSpPr txBox="1"/>
+          <p:nvPr/>
+        </p:nvSpPr>
+        <p:spPr>
+          <a:xfrm>
+            <a:off x="2231136" y="3929715"/>
+            <a:ext cx="2114681" cy="369332"/>
+          </a:xfrm>
+          <a:prstGeom prst="rect">
+            <a:avLst/>
+          </a:prstGeom>
+          <a:noFill/>
+          <a:ln>
+            <a:solidFill>
+              <a:srgbClr val="404040"/>
+            </a:solidFill>
+          </a:ln>
+        </p:spPr>
+        <p:txBody>
+          <a:bodyPr wrap="none" rtlCol="0">
+            <a:spAutoFit/>
+          </a:bodyPr>
+          <a:lstStyle/>
+          <a:p>
+            <a:r>
+              <a:rPr lang="en-US" dirty="0">
+                <a:latin typeface="Courier New" panose="02070309020205020404" pitchFamily="49" charset="0"/>
+                <a:cs typeface="Courier New" panose="02070309020205020404" pitchFamily="49" charset="0"/>
+              </a:rPr>
+              <a:t>3 // 5 * 12345</a:t>
+            </a:r>
+          </a:p>
+        </p:txBody>
+      </p:sp>
+      <p:sp>
+        <p:nvSpPr>
+          <p:cNvPr id="6" name="TextBox 5">
+            <a:extLst>
+              <a:ext uri="{FF2B5EF4-FFF2-40B4-BE49-F238E27FC236}">
+                <a16:creationId xmlns:a16="http://schemas.microsoft.com/office/drawing/2014/main" id="{98F87B62-8C9E-8028-CC65-CC9C42A9C141}"/>
+              </a:ext>
+            </a:extLst>
+          </p:cNvPr>
+          <p:cNvSpPr txBox="1"/>
+          <p:nvPr/>
+        </p:nvSpPr>
+        <p:spPr>
+          <a:xfrm>
+            <a:off x="2231136" y="4663440"/>
+            <a:ext cx="2528256" cy="369332"/>
+          </a:xfrm>
+          <a:prstGeom prst="rect">
+            <a:avLst/>
+          </a:prstGeom>
+          <a:noFill/>
+          <a:ln>
+            <a:solidFill>
+              <a:srgbClr val="404040"/>
+            </a:solidFill>
+          </a:ln>
+        </p:spPr>
+        <p:txBody>
+          <a:bodyPr wrap="none" rtlCol="0">
+            <a:spAutoFit/>
+          </a:bodyPr>
+          <a:lstStyle/>
+          <a:p>
+            <a:r>
+              <a:rPr lang="en-US" dirty="0">
+                <a:latin typeface="Courier New" panose="02070309020205020404" pitchFamily="49" charset="0"/>
+                <a:cs typeface="Courier New" panose="02070309020205020404" pitchFamily="49" charset="0"/>
+              </a:rPr>
+              <a:t>77 / 10 + 77 % 10</a:t>
+            </a:r>
+          </a:p>
+        </p:txBody>
+      </p:sp>
+      <p:sp>
+        <p:nvSpPr>
+          <p:cNvPr id="7" name="TextBox 6">
+            <a:extLst>
+              <a:ext uri="{FF2B5EF4-FFF2-40B4-BE49-F238E27FC236}">
+                <a16:creationId xmlns:a16="http://schemas.microsoft.com/office/drawing/2014/main" id="{48CA3701-9CD5-9B60-7011-12FB339F6134}"/>
+              </a:ext>
+            </a:extLst>
+          </p:cNvPr>
+          <p:cNvSpPr txBox="1"/>
+          <p:nvPr/>
+        </p:nvSpPr>
+        <p:spPr>
+          <a:xfrm>
+            <a:off x="7545547" y="4649986"/>
+            <a:ext cx="2666114" cy="369332"/>
+          </a:xfrm>
+          <a:prstGeom prst="rect">
+            <a:avLst/>
+          </a:prstGeom>
+          <a:noFill/>
+          <a:ln>
+            <a:solidFill>
+              <a:srgbClr val="404040"/>
+            </a:solidFill>
+          </a:ln>
+        </p:spPr>
+        <p:txBody>
+          <a:bodyPr wrap="none" rtlCol="0">
+            <a:spAutoFit/>
+          </a:bodyPr>
+          <a:lstStyle/>
+          <a:p>
+            <a:r>
+              <a:rPr lang="en-US" dirty="0">
+                <a:latin typeface="Courier New" panose="02070309020205020404" pitchFamily="49" charset="0"/>
+                <a:cs typeface="Courier New" panose="02070309020205020404" pitchFamily="49" charset="0"/>
+              </a:rPr>
+              <a:t>“hello” + str(8/2)</a:t>
+            </a:r>
+          </a:p>
+        </p:txBody>
+      </p:sp>
+      <p:sp>
+        <p:nvSpPr>
+          <p:cNvPr id="8" name="TextBox 7">
+            <a:extLst>
+              <a:ext uri="{FF2B5EF4-FFF2-40B4-BE49-F238E27FC236}">
+                <a16:creationId xmlns:a16="http://schemas.microsoft.com/office/drawing/2014/main" id="{921BEA43-46D3-CA05-0F49-5167895C72BC}"/>
+              </a:ext>
+            </a:extLst>
+          </p:cNvPr>
+          <p:cNvSpPr txBox="1"/>
+          <p:nvPr/>
+        </p:nvSpPr>
+        <p:spPr>
+          <a:xfrm>
+            <a:off x="7649688" y="3927510"/>
+            <a:ext cx="2528256" cy="369332"/>
+          </a:xfrm>
+          <a:prstGeom prst="rect">
+            <a:avLst/>
+          </a:prstGeom>
+          <a:noFill/>
+          <a:ln>
+            <a:solidFill>
+              <a:srgbClr val="404040"/>
+            </a:solidFill>
+          </a:ln>
+        </p:spPr>
+        <p:txBody>
+          <a:bodyPr wrap="none" rtlCol="0">
+            <a:spAutoFit/>
+          </a:bodyPr>
+          <a:lstStyle/>
+          <a:p>
+            <a:r>
+              <a:rPr lang="en-US" dirty="0">
+                <a:latin typeface="Courier New" panose="02070309020205020404" pitchFamily="49" charset="0"/>
+                <a:cs typeface="Courier New" panose="02070309020205020404" pitchFamily="49" charset="0"/>
+              </a:rPr>
+              <a:t>“hello” + “world”</a:t>
+            </a:r>
+          </a:p>
+        </p:txBody>
+      </p:sp>
+      <p:sp>
+        <p:nvSpPr>
+          <p:cNvPr id="9" name="TextBox 8">
+            <a:extLst>
+              <a:ext uri="{FF2B5EF4-FFF2-40B4-BE49-F238E27FC236}">
+                <a16:creationId xmlns:a16="http://schemas.microsoft.com/office/drawing/2014/main" id="{8C8542FA-ED61-648B-3E15-01D353FB8AFF}"/>
+              </a:ext>
+            </a:extLst>
+          </p:cNvPr>
+          <p:cNvSpPr txBox="1"/>
+          <p:nvPr/>
+        </p:nvSpPr>
+        <p:spPr>
+          <a:xfrm>
+            <a:off x="2270760" y="5394960"/>
+            <a:ext cx="2114681" cy="369332"/>
+          </a:xfrm>
+          <a:prstGeom prst="rect">
+            <a:avLst/>
+          </a:prstGeom>
+          <a:noFill/>
+          <a:ln>
+            <a:solidFill>
+              <a:srgbClr val="404040"/>
+            </a:solidFill>
+          </a:ln>
+        </p:spPr>
+        <p:txBody>
+          <a:bodyPr wrap="none" rtlCol="0">
+            <a:spAutoFit/>
+          </a:bodyPr>
+          <a:lstStyle/>
+          <a:p>
+            <a:r>
+              <a:rPr lang="en-US" dirty="0">
+                <a:latin typeface="Courier New" panose="02070309020205020404" pitchFamily="49" charset="0"/>
+                <a:cs typeface="Courier New" panose="02070309020205020404" pitchFamily="49" charset="0"/>
+              </a:rPr>
+              <a:t>5 + 4.2 + 0.8 </a:t>
+            </a:r>
+          </a:p>
+        </p:txBody>
+      </p:sp>
+      <p:sp>
+        <p:nvSpPr>
+          <p:cNvPr id="10" name="TextBox 9">
+            <a:extLst>
+              <a:ext uri="{FF2B5EF4-FFF2-40B4-BE49-F238E27FC236}">
+                <a16:creationId xmlns:a16="http://schemas.microsoft.com/office/drawing/2014/main" id="{B6B12473-4C56-4877-CF2B-1F9F5DFA0A11}"/>
+              </a:ext>
+            </a:extLst>
+          </p:cNvPr>
+          <p:cNvSpPr txBox="1"/>
+          <p:nvPr/>
+        </p:nvSpPr>
+        <p:spPr>
+          <a:xfrm>
+            <a:off x="7545547" y="5372462"/>
+            <a:ext cx="873957" cy="369332"/>
+          </a:xfrm>
+          <a:prstGeom prst="rect">
+            <a:avLst/>
+          </a:prstGeom>
+          <a:noFill/>
+          <a:ln>
+            <a:solidFill>
+              <a:srgbClr val="404040"/>
+            </a:solidFill>
+          </a:ln>
+        </p:spPr>
+        <p:txBody>
+          <a:bodyPr wrap="none" rtlCol="0">
+            <a:spAutoFit/>
+          </a:bodyPr>
+          <a:lstStyle/>
+          <a:p>
+            <a:r>
+              <a:rPr lang="en-US" dirty="0">
+                <a:latin typeface="Courier New" panose="02070309020205020404" pitchFamily="49" charset="0"/>
+                <a:cs typeface="Courier New" panose="02070309020205020404" pitchFamily="49" charset="0"/>
+              </a:rPr>
+              <a:t>8 / 2</a:t>
+            </a:r>
+          </a:p>
+        </p:txBody>
+      </p:sp>
+      <p:sp>
+        <p:nvSpPr>
+          <p:cNvPr id="11" name="TextBox 10">
+            <a:extLst>
+              <a:ext uri="{FF2B5EF4-FFF2-40B4-BE49-F238E27FC236}">
+                <a16:creationId xmlns:a16="http://schemas.microsoft.com/office/drawing/2014/main" id="{3B365EEA-583D-11D0-1448-32FBA5EB2A79}"/>
+              </a:ext>
+            </a:extLst>
+          </p:cNvPr>
+          <p:cNvSpPr txBox="1"/>
+          <p:nvPr/>
+        </p:nvSpPr>
+        <p:spPr>
+          <a:xfrm>
+            <a:off x="2270760" y="6126480"/>
+            <a:ext cx="1149674" cy="369332"/>
+          </a:xfrm>
+          <a:prstGeom prst="rect">
+            <a:avLst/>
+          </a:prstGeom>
+          <a:noFill/>
+          <a:ln>
+            <a:solidFill>
+              <a:schemeClr val="accent1"/>
+            </a:solidFill>
+          </a:ln>
+        </p:spPr>
+        <p:txBody>
+          <a:bodyPr wrap="none" rtlCol="0">
+            <a:spAutoFit/>
+          </a:bodyPr>
+          <a:lstStyle/>
+          <a:p>
+            <a:r>
+              <a:rPr lang="en-US" dirty="0">
+                <a:latin typeface="Courier New" panose="02070309020205020404" pitchFamily="49" charset="0"/>
+                <a:cs typeface="Courier New" panose="02070309020205020404" pitchFamily="49" charset="0"/>
+              </a:rPr>
+              <a:t>7.0 % 2</a:t>
+            </a:r>
+          </a:p>
+        </p:txBody>
+      </p:sp>
+      <p:cxnSp>
+        <p:nvCxnSpPr>
+          <p:cNvPr id="13" name="Straight Arrow Connector 12">
+            <a:extLst>
+              <a:ext uri="{FF2B5EF4-FFF2-40B4-BE49-F238E27FC236}">
+                <a16:creationId xmlns:a16="http://schemas.microsoft.com/office/drawing/2014/main" id="{102E8328-47BA-1E45-5BFC-45A9BEB78565}"/>
+              </a:ext>
+            </a:extLst>
+          </p:cNvPr>
+          <p:cNvCxnSpPr/>
+          <p:nvPr/>
+        </p:nvCxnSpPr>
+        <p:spPr>
+          <a:xfrm flipH="1">
+            <a:off x="3687885" y="6314718"/>
+            <a:ext cx="1117032" cy="0"/>
+          </a:xfrm>
+          <a:prstGeom prst="straightConnector1">
+            <a:avLst/>
+          </a:prstGeom>
+          <a:ln>
+            <a:tailEnd type="triangle"/>
+          </a:ln>
+        </p:spPr>
+        <p:style>
+          <a:lnRef idx="1">
+            <a:schemeClr val="accent1"/>
+          </a:lnRef>
+          <a:fillRef idx="0">
+            <a:schemeClr val="accent1"/>
+          </a:fillRef>
+          <a:effectRef idx="0">
+            <a:schemeClr val="accent1"/>
+          </a:effectRef>
+          <a:fontRef idx="minor">
+            <a:schemeClr val="tx1"/>
+          </a:fontRef>
+        </p:style>
+      </p:cxnSp>
+      <p:sp>
+        <p:nvSpPr>
+          <p:cNvPr id="14" name="TextBox 13">
+            <a:extLst>
+              <a:ext uri="{FF2B5EF4-FFF2-40B4-BE49-F238E27FC236}">
+                <a16:creationId xmlns:a16="http://schemas.microsoft.com/office/drawing/2014/main" id="{B685086A-09E0-9AB9-85AB-A97A2E0EB2A5}"/>
+              </a:ext>
+            </a:extLst>
+          </p:cNvPr>
+          <p:cNvSpPr txBox="1"/>
+          <p:nvPr/>
+        </p:nvSpPr>
+        <p:spPr>
+          <a:xfrm>
+            <a:off x="4777652" y="6126480"/>
+            <a:ext cx="5218865" cy="369332"/>
+          </a:xfrm>
+          <a:prstGeom prst="rect">
+            <a:avLst/>
+          </a:prstGeom>
+          <a:noFill/>
+        </p:spPr>
+        <p:txBody>
+          <a:bodyPr wrap="none" rtlCol="0">
+            <a:spAutoFit/>
+          </a:bodyPr>
+          <a:lstStyle/>
+          <a:p>
+            <a:r>
+              <a:rPr lang="en-US" dirty="0"/>
+              <a:t>Python supports modulus with floating point numbers</a:t>
+            </a:r>
           </a:p>
         </p:txBody>
       </p:sp>
     </p:spTree>
     <p:extLst>
       <p:ext uri="{BB962C8B-B14F-4D97-AF65-F5344CB8AC3E}">
-        <p14:creationId xmlns:p14="http://schemas.microsoft.com/office/powerpoint/2010/main" val="3778481574"/>
+        <p14:creationId xmlns:p14="http://schemas.microsoft.com/office/powerpoint/2010/main" val="2703984473"/>
       </p:ext>
     </p:extLst>
   </p:cSld>
@@ -13590,7 +13524,7 @@
           <p:cNvPr id="2" name="Title 1">
             <a:extLst>
               <a:ext uri="{FF2B5EF4-FFF2-40B4-BE49-F238E27FC236}">
-                <a16:creationId xmlns:a16="http://schemas.microsoft.com/office/drawing/2014/main" id="{577EC603-3165-DA15-6251-B4D6774BBF00}"/>
+                <a16:creationId xmlns:a16="http://schemas.microsoft.com/office/drawing/2014/main" id="{16141022-5ABF-969D-4898-7EB00CE16000}"/>
               </a:ext>
             </a:extLst>
           </p:cNvPr>
@@ -13608,7 +13542,7 @@
           <a:p>
             <a:r>
               <a:rPr lang="en-US" dirty="0"/>
-              <a:t>Self Check</a:t>
+              <a:t>Assignment Operators</a:t>
             </a:r>
           </a:p>
         </p:txBody>
@@ -13618,7 +13552,7 @@
           <p:cNvPr id="3" name="Content Placeholder 2">
             <a:extLst>
               <a:ext uri="{FF2B5EF4-FFF2-40B4-BE49-F238E27FC236}">
-                <a16:creationId xmlns:a16="http://schemas.microsoft.com/office/drawing/2014/main" id="{453FD934-EEA7-EF93-C861-66F16A99CD28}"/>
+                <a16:creationId xmlns:a16="http://schemas.microsoft.com/office/drawing/2014/main" id="{D60594AD-A0F6-49B5-7C08-68FA00A4491D}"/>
               </a:ext>
             </a:extLst>
           </p:cNvPr>
@@ -13631,460 +13565,143 @@
         </p:nvSpPr>
         <p:spPr>
           <a:xfrm>
-            <a:off x="2231136" y="2455848"/>
-            <a:ext cx="7946808" cy="711640"/>
+            <a:off x="2231136" y="2638044"/>
+            <a:ext cx="7729728" cy="4067556"/>
           </a:xfrm>
         </p:spPr>
         <p:txBody>
           <a:bodyPr>
-            <a:normAutofit fontScale="92500" lnSpcReduction="10000"/>
+            <a:normAutofit/>
           </a:bodyPr>
           <a:lstStyle/>
           <a:p>
             <a:r>
               <a:rPr lang="en-US" dirty="0"/>
-              <a:t>What do the following arithmetic expressions evaluate to? </a:t>
-            </a:r>
-          </a:p>
-          <a:p>
-            <a:pPr marL="0" indent="0" algn="ctr">
-              <a:buNone/>
-            </a:pPr>
-            <a:r>
-              <a:rPr lang="en-US" dirty="0"/>
-              <a:t>(Be mindful of your return types)</a:t>
-            </a:r>
-          </a:p>
-          <a:p>
-            <a:pPr marL="0" indent="0">
-              <a:buNone/>
-            </a:pPr>
-            <a:endParaRPr lang="en-US" dirty="0"/>
-          </a:p>
-        </p:txBody>
-      </p:sp>
-      <p:sp>
-        <p:nvSpPr>
-          <p:cNvPr id="4" name="TextBox 3">
-            <a:extLst>
-              <a:ext uri="{FF2B5EF4-FFF2-40B4-BE49-F238E27FC236}">
-                <a16:creationId xmlns:a16="http://schemas.microsoft.com/office/drawing/2014/main" id="{068BF6E7-1819-1ADD-0081-2741E0E36592}"/>
-              </a:ext>
-            </a:extLst>
-          </p:cNvPr>
-          <p:cNvSpPr txBox="1"/>
-          <p:nvPr/>
-        </p:nvSpPr>
-        <p:spPr>
-          <a:xfrm>
-            <a:off x="2231136" y="3349684"/>
-            <a:ext cx="5147563" cy="369332"/>
-          </a:xfrm>
-          <a:prstGeom prst="rect">
-            <a:avLst/>
-          </a:prstGeom>
-          <a:noFill/>
-          <a:ln>
-            <a:solidFill>
-              <a:srgbClr val="404040"/>
-            </a:solidFill>
-          </a:ln>
-        </p:spPr>
-        <p:txBody>
-          <a:bodyPr wrap="none" rtlCol="0">
-            <a:spAutoFit/>
-          </a:bodyPr>
-          <a:lstStyle/>
-          <a:p>
+              <a:t>Recall from last day that variables are assigned a value using =</a:t>
+            </a:r>
+          </a:p>
+          <a:p>
+            <a:pPr lvl="1"/>
+            <a:r>
+              <a:rPr lang="en-US" dirty="0"/>
+              <a:t>Example: </a:t>
+            </a:r>
             <a:r>
               <a:rPr lang="en-US" dirty="0">
                 <a:latin typeface="Courier New" panose="02070309020205020404" pitchFamily="49" charset="0"/>
                 <a:cs typeface="Courier New" panose="02070309020205020404" pitchFamily="49" charset="0"/>
               </a:rPr>
-              <a:t>int(“5” + “5”) + int(“5”) + int(“5”)</a:t>
-            </a:r>
-          </a:p>
-        </p:txBody>
-      </p:sp>
-      <p:sp>
-        <p:nvSpPr>
-          <p:cNvPr id="5" name="TextBox 4">
-            <a:extLst>
-              <a:ext uri="{FF2B5EF4-FFF2-40B4-BE49-F238E27FC236}">
-                <a16:creationId xmlns:a16="http://schemas.microsoft.com/office/drawing/2014/main" id="{AA0E8036-CC17-CD3F-90DE-2F7CB8BCDC66}"/>
-              </a:ext>
-            </a:extLst>
-          </p:cNvPr>
-          <p:cNvSpPr txBox="1"/>
-          <p:nvPr/>
-        </p:nvSpPr>
-        <p:spPr>
-          <a:xfrm>
-            <a:off x="2231136" y="3929715"/>
-            <a:ext cx="2114681" cy="369332"/>
-          </a:xfrm>
-          <a:prstGeom prst="rect">
-            <a:avLst/>
-          </a:prstGeom>
-          <a:noFill/>
-          <a:ln>
-            <a:solidFill>
-              <a:srgbClr val="404040"/>
-            </a:solidFill>
-          </a:ln>
-        </p:spPr>
-        <p:txBody>
-          <a:bodyPr wrap="none" rtlCol="0">
-            <a:spAutoFit/>
-          </a:bodyPr>
-          <a:lstStyle/>
-          <a:p>
-            <a:r>
-              <a:rPr lang="en-US" dirty="0">
+              <a:t>a = 29</a:t>
+            </a:r>
+          </a:p>
+          <a:p>
+            <a:endParaRPr lang="en-US" dirty="0"/>
+          </a:p>
+          <a:p>
+            <a:r>
+              <a:rPr lang="en-US" dirty="0"/>
+              <a:t>Select Other Assignment Operators:</a:t>
+            </a:r>
+          </a:p>
+          <a:p>
+            <a:r>
+              <a:rPr lang="en-CA" dirty="0">
                 <a:latin typeface="Courier New" panose="02070309020205020404" pitchFamily="49" charset="0"/>
                 <a:cs typeface="Courier New" panose="02070309020205020404" pitchFamily="49" charset="0"/>
               </a:rPr>
-              <a:t>3 // 5 * 12345</a:t>
-            </a:r>
-          </a:p>
-        </p:txBody>
-      </p:sp>
-      <p:sp>
-        <p:nvSpPr>
-          <p:cNvPr id="6" name="TextBox 5">
-            <a:extLst>
-              <a:ext uri="{FF2B5EF4-FFF2-40B4-BE49-F238E27FC236}">
-                <a16:creationId xmlns:a16="http://schemas.microsoft.com/office/drawing/2014/main" id="{98F87B62-8C9E-8028-CC65-CC9C42A9C141}"/>
-              </a:ext>
-            </a:extLst>
-          </p:cNvPr>
-          <p:cNvSpPr txBox="1"/>
-          <p:nvPr/>
-        </p:nvSpPr>
-        <p:spPr>
-          <a:xfrm>
-            <a:off x="2231136" y="4663440"/>
-            <a:ext cx="2528256" cy="369332"/>
-          </a:xfrm>
-          <a:prstGeom prst="rect">
-            <a:avLst/>
-          </a:prstGeom>
-          <a:noFill/>
-          <a:ln>
-            <a:solidFill>
-              <a:srgbClr val="404040"/>
-            </a:solidFill>
-          </a:ln>
-        </p:spPr>
-        <p:txBody>
-          <a:bodyPr wrap="none" rtlCol="0">
-            <a:spAutoFit/>
-          </a:bodyPr>
-          <a:lstStyle/>
-          <a:p>
-            <a:r>
-              <a:rPr lang="en-US" dirty="0">
+              <a:t>+= </a:t>
+            </a:r>
+            <a:r>
+              <a:rPr lang="en-CA" dirty="0">
+                <a:cs typeface="Courier New" panose="02070309020205020404" pitchFamily="49" charset="0"/>
+              </a:rPr>
+              <a:t>Addition Assignment (add and then assign)  </a:t>
+            </a:r>
+          </a:p>
+          <a:p>
+            <a:r>
+              <a:rPr lang="en-CA" dirty="0">
                 <a:latin typeface="Courier New" panose="02070309020205020404" pitchFamily="49" charset="0"/>
                 <a:cs typeface="Courier New" panose="02070309020205020404" pitchFamily="49" charset="0"/>
               </a:rPr>
-              <a:t>77 / 10 + 77 % 10</a:t>
-            </a:r>
-          </a:p>
-        </p:txBody>
-      </p:sp>
-      <p:sp>
-        <p:nvSpPr>
-          <p:cNvPr id="7" name="TextBox 6">
-            <a:extLst>
-              <a:ext uri="{FF2B5EF4-FFF2-40B4-BE49-F238E27FC236}">
-                <a16:creationId xmlns:a16="http://schemas.microsoft.com/office/drawing/2014/main" id="{48CA3701-9CD5-9B60-7011-12FB339F6134}"/>
-              </a:ext>
-            </a:extLst>
-          </p:cNvPr>
-          <p:cNvSpPr txBox="1"/>
-          <p:nvPr/>
-        </p:nvSpPr>
-        <p:spPr>
-          <a:xfrm>
-            <a:off x="7545547" y="4649986"/>
-            <a:ext cx="2666114" cy="369332"/>
-          </a:xfrm>
-          <a:prstGeom prst="rect">
-            <a:avLst/>
-          </a:prstGeom>
-          <a:noFill/>
-          <a:ln>
-            <a:solidFill>
-              <a:srgbClr val="404040"/>
-            </a:solidFill>
-          </a:ln>
-        </p:spPr>
-        <p:txBody>
-          <a:bodyPr wrap="none" rtlCol="0">
-            <a:spAutoFit/>
-          </a:bodyPr>
-          <a:lstStyle/>
-          <a:p>
-            <a:r>
-              <a:rPr lang="en-US" dirty="0">
+              <a:t>-= </a:t>
+            </a:r>
+            <a:r>
+              <a:rPr lang="en-CA" dirty="0">
+                <a:cs typeface="Courier New" panose="02070309020205020404" pitchFamily="49" charset="0"/>
+              </a:rPr>
+              <a:t>Subtraction Assignment</a:t>
+            </a:r>
+          </a:p>
+          <a:p>
+            <a:r>
+              <a:rPr lang="en-CA" dirty="0">
                 <a:latin typeface="Courier New" panose="02070309020205020404" pitchFamily="49" charset="0"/>
                 <a:cs typeface="Courier New" panose="02070309020205020404" pitchFamily="49" charset="0"/>
               </a:rPr>
-              <a:t>“hello” + str(8/2)</a:t>
-            </a:r>
-          </a:p>
-        </p:txBody>
-      </p:sp>
-      <p:sp>
-        <p:nvSpPr>
-          <p:cNvPr id="8" name="TextBox 7">
-            <a:extLst>
-              <a:ext uri="{FF2B5EF4-FFF2-40B4-BE49-F238E27FC236}">
-                <a16:creationId xmlns:a16="http://schemas.microsoft.com/office/drawing/2014/main" id="{921BEA43-46D3-CA05-0F49-5167895C72BC}"/>
-              </a:ext>
-            </a:extLst>
-          </p:cNvPr>
-          <p:cNvSpPr txBox="1"/>
-          <p:nvPr/>
-        </p:nvSpPr>
-        <p:spPr>
-          <a:xfrm>
-            <a:off x="7649688" y="3927510"/>
-            <a:ext cx="2528256" cy="369332"/>
-          </a:xfrm>
-          <a:prstGeom prst="rect">
-            <a:avLst/>
-          </a:prstGeom>
-          <a:noFill/>
-          <a:ln>
-            <a:solidFill>
-              <a:srgbClr val="404040"/>
-            </a:solidFill>
-          </a:ln>
-        </p:spPr>
-        <p:txBody>
-          <a:bodyPr wrap="none" rtlCol="0">
-            <a:spAutoFit/>
-          </a:bodyPr>
-          <a:lstStyle/>
-          <a:p>
-            <a:r>
-              <a:rPr lang="en-US" dirty="0">
+              <a:t>/= </a:t>
+            </a:r>
+            <a:r>
+              <a:rPr lang="en-CA" dirty="0">
+                <a:cs typeface="Courier New" panose="02070309020205020404" pitchFamily="49" charset="0"/>
+              </a:rPr>
+              <a:t>Division Assignment </a:t>
+            </a:r>
+          </a:p>
+          <a:p>
+            <a:r>
+              <a:rPr lang="en-CA" dirty="0">
                 <a:latin typeface="Courier New" panose="02070309020205020404" pitchFamily="49" charset="0"/>
                 <a:cs typeface="Courier New" panose="02070309020205020404" pitchFamily="49" charset="0"/>
               </a:rPr>
-              <a:t>“hello” + “world”</a:t>
-            </a:r>
-          </a:p>
-        </p:txBody>
-      </p:sp>
-      <p:sp>
-        <p:nvSpPr>
-          <p:cNvPr id="9" name="TextBox 8">
-            <a:extLst>
-              <a:ext uri="{FF2B5EF4-FFF2-40B4-BE49-F238E27FC236}">
-                <a16:creationId xmlns:a16="http://schemas.microsoft.com/office/drawing/2014/main" id="{8C8542FA-ED61-648B-3E15-01D353FB8AFF}"/>
-              </a:ext>
-            </a:extLst>
-          </p:cNvPr>
-          <p:cNvSpPr txBox="1"/>
-          <p:nvPr/>
-        </p:nvSpPr>
-        <p:spPr>
-          <a:xfrm>
-            <a:off x="2270760" y="5394960"/>
-            <a:ext cx="2114681" cy="369332"/>
-          </a:xfrm>
-          <a:prstGeom prst="rect">
-            <a:avLst/>
-          </a:prstGeom>
-          <a:noFill/>
-          <a:ln>
-            <a:solidFill>
-              <a:srgbClr val="404040"/>
-            </a:solidFill>
-          </a:ln>
-        </p:spPr>
-        <p:txBody>
-          <a:bodyPr wrap="none" rtlCol="0">
-            <a:spAutoFit/>
-          </a:bodyPr>
-          <a:lstStyle/>
-          <a:p>
-            <a:r>
-              <a:rPr lang="en-US" dirty="0">
+              <a:t>//=</a:t>
+            </a:r>
+            <a:r>
+              <a:rPr lang="en-CA" dirty="0">
+                <a:cs typeface="Courier New" panose="02070309020205020404" pitchFamily="49" charset="0"/>
+              </a:rPr>
+              <a:t> Floor Division Assignment</a:t>
+            </a:r>
+          </a:p>
+          <a:p>
+            <a:r>
+              <a:rPr lang="en-CA" dirty="0">
                 <a:latin typeface="Courier New" panose="02070309020205020404" pitchFamily="49" charset="0"/>
                 <a:cs typeface="Courier New" panose="02070309020205020404" pitchFamily="49" charset="0"/>
               </a:rPr>
-              <a:t>5 + 4.2 + 0.8 </a:t>
-            </a:r>
-          </a:p>
-        </p:txBody>
-      </p:sp>
-      <p:sp>
-        <p:nvSpPr>
-          <p:cNvPr id="10" name="TextBox 9">
-            <a:extLst>
-              <a:ext uri="{FF2B5EF4-FFF2-40B4-BE49-F238E27FC236}">
-                <a16:creationId xmlns:a16="http://schemas.microsoft.com/office/drawing/2014/main" id="{B6B12473-4C56-4877-CF2B-1F9F5DFA0A11}"/>
-              </a:ext>
-            </a:extLst>
-          </p:cNvPr>
-          <p:cNvSpPr txBox="1"/>
-          <p:nvPr/>
-        </p:nvSpPr>
-        <p:spPr>
-          <a:xfrm>
-            <a:off x="7545547" y="5372462"/>
-            <a:ext cx="873957" cy="369332"/>
-          </a:xfrm>
-          <a:prstGeom prst="rect">
-            <a:avLst/>
-          </a:prstGeom>
-          <a:noFill/>
-          <a:ln>
-            <a:solidFill>
-              <a:srgbClr val="404040"/>
-            </a:solidFill>
-          </a:ln>
-        </p:spPr>
-        <p:txBody>
-          <a:bodyPr wrap="none" rtlCol="0">
-            <a:spAutoFit/>
-          </a:bodyPr>
-          <a:lstStyle/>
-          <a:p>
-            <a:r>
-              <a:rPr lang="en-US" dirty="0">
+              <a:t>*= </a:t>
+            </a:r>
+            <a:r>
+              <a:rPr lang="en-CA" dirty="0">
+                <a:cs typeface="Courier New" panose="02070309020205020404" pitchFamily="49" charset="0"/>
+              </a:rPr>
+              <a:t>Multiplication Assignment</a:t>
+            </a:r>
+          </a:p>
+          <a:p>
+            <a:r>
+              <a:rPr lang="en-CA" dirty="0">
                 <a:latin typeface="Courier New" panose="02070309020205020404" pitchFamily="49" charset="0"/>
                 <a:cs typeface="Courier New" panose="02070309020205020404" pitchFamily="49" charset="0"/>
               </a:rPr>
-              <a:t>8 / 2</a:t>
-            </a:r>
-          </a:p>
-        </p:txBody>
-      </p:sp>
-      <p:sp>
-        <p:nvSpPr>
-          <p:cNvPr id="11" name="TextBox 10">
-            <a:extLst>
-              <a:ext uri="{FF2B5EF4-FFF2-40B4-BE49-F238E27FC236}">
-                <a16:creationId xmlns:a16="http://schemas.microsoft.com/office/drawing/2014/main" id="{3B365EEA-583D-11D0-1448-32FBA5EB2A79}"/>
-              </a:ext>
-            </a:extLst>
-          </p:cNvPr>
-          <p:cNvSpPr txBox="1"/>
-          <p:nvPr/>
-        </p:nvSpPr>
-        <p:spPr>
-          <a:xfrm>
-            <a:off x="2270760" y="6126480"/>
-            <a:ext cx="1149674" cy="369332"/>
-          </a:xfrm>
-          <a:prstGeom prst="rect">
-            <a:avLst/>
-          </a:prstGeom>
-          <a:noFill/>
-          <a:ln>
-            <a:solidFill>
-              <a:schemeClr val="accent1"/>
-            </a:solidFill>
-          </a:ln>
-        </p:spPr>
-        <p:txBody>
-          <a:bodyPr wrap="none" rtlCol="0">
-            <a:spAutoFit/>
-          </a:bodyPr>
-          <a:lstStyle/>
-          <a:p>
-            <a:r>
-              <a:rPr lang="en-US" dirty="0">
-                <a:latin typeface="Courier New" panose="02070309020205020404" pitchFamily="49" charset="0"/>
+              <a:t>%=</a:t>
+            </a:r>
+            <a:r>
+              <a:rPr lang="en-CA" dirty="0">
                 <a:cs typeface="Courier New" panose="02070309020205020404" pitchFamily="49" charset="0"/>
               </a:rPr>
-              <a:t>7.0 % 2</a:t>
-            </a:r>
-          </a:p>
-        </p:txBody>
-      </p:sp>
-      <p:cxnSp>
-        <p:nvCxnSpPr>
-          <p:cNvPr id="13" name="Straight Arrow Connector 12">
-            <a:extLst>
-              <a:ext uri="{FF2B5EF4-FFF2-40B4-BE49-F238E27FC236}">
-                <a16:creationId xmlns:a16="http://schemas.microsoft.com/office/drawing/2014/main" id="{102E8328-47BA-1E45-5BFC-45A9BEB78565}"/>
-              </a:ext>
-            </a:extLst>
-          </p:cNvPr>
-          <p:cNvCxnSpPr/>
-          <p:nvPr/>
-        </p:nvCxnSpPr>
-        <p:spPr>
-          <a:xfrm flipH="1">
-            <a:off x="3687885" y="6314718"/>
-            <a:ext cx="1117032" cy="0"/>
-          </a:xfrm>
-          <a:prstGeom prst="straightConnector1">
-            <a:avLst/>
-          </a:prstGeom>
-          <a:ln>
-            <a:tailEnd type="triangle"/>
-          </a:ln>
-        </p:spPr>
-        <p:style>
-          <a:lnRef idx="1">
-            <a:schemeClr val="accent1"/>
-          </a:lnRef>
-          <a:fillRef idx="0">
-            <a:schemeClr val="accent1"/>
-          </a:fillRef>
-          <a:effectRef idx="0">
-            <a:schemeClr val="accent1"/>
-          </a:effectRef>
-          <a:fontRef idx="minor">
-            <a:schemeClr val="tx1"/>
-          </a:fontRef>
-        </p:style>
-      </p:cxnSp>
-      <p:sp>
-        <p:nvSpPr>
-          <p:cNvPr id="14" name="TextBox 13">
-            <a:extLst>
-              <a:ext uri="{FF2B5EF4-FFF2-40B4-BE49-F238E27FC236}">
-                <a16:creationId xmlns:a16="http://schemas.microsoft.com/office/drawing/2014/main" id="{B685086A-09E0-9AB9-85AB-A97A2E0EB2A5}"/>
-              </a:ext>
-            </a:extLst>
-          </p:cNvPr>
-          <p:cNvSpPr txBox="1"/>
-          <p:nvPr/>
-        </p:nvSpPr>
-        <p:spPr>
-          <a:xfrm>
-            <a:off x="4777652" y="6126480"/>
-            <a:ext cx="5218865" cy="369332"/>
-          </a:xfrm>
-          <a:prstGeom prst="rect">
-            <a:avLst/>
-          </a:prstGeom>
-          <a:noFill/>
-        </p:spPr>
-        <p:txBody>
-          <a:bodyPr wrap="none" rtlCol="0">
-            <a:spAutoFit/>
-          </a:bodyPr>
-          <a:lstStyle/>
-          <a:p>
-            <a:r>
-              <a:rPr lang="en-US" dirty="0"/>
-              <a:t>Python supports modulus with floating point numbers</a:t>
-            </a:r>
+              <a:t> Modulus Assignment</a:t>
+            </a:r>
+            <a:endParaRPr lang="en-US" dirty="0">
+              <a:cs typeface="Courier New" panose="02070309020205020404" pitchFamily="49" charset="0"/>
+            </a:endParaRPr>
           </a:p>
         </p:txBody>
       </p:sp>
     </p:spTree>
     <p:extLst>
       <p:ext uri="{BB962C8B-B14F-4D97-AF65-F5344CB8AC3E}">
-        <p14:creationId xmlns:p14="http://schemas.microsoft.com/office/powerpoint/2010/main" val="2703984473"/>
+        <p14:creationId xmlns:p14="http://schemas.microsoft.com/office/powerpoint/2010/main" val="1682851500"/>
       </p:ext>
     </p:extLst>
   </p:cSld>
@@ -14116,215 +13733,6 @@
           <p:cNvPr id="2" name="Title 1">
             <a:extLst>
               <a:ext uri="{FF2B5EF4-FFF2-40B4-BE49-F238E27FC236}">
-                <a16:creationId xmlns:a16="http://schemas.microsoft.com/office/drawing/2014/main" id="{16141022-5ABF-969D-4898-7EB00CE16000}"/>
-              </a:ext>
-            </a:extLst>
-          </p:cNvPr>
-          <p:cNvSpPr>
-            <a:spLocks noGrp="1"/>
-          </p:cNvSpPr>
-          <p:nvPr>
-            <p:ph type="title"/>
-          </p:nvPr>
-        </p:nvSpPr>
-        <p:spPr/>
-        <p:txBody>
-          <a:bodyPr/>
-          <a:lstStyle/>
-          <a:p>
-            <a:r>
-              <a:rPr lang="en-US" dirty="0"/>
-              <a:t>Assignment Operators</a:t>
-            </a:r>
-          </a:p>
-        </p:txBody>
-      </p:sp>
-      <p:sp>
-        <p:nvSpPr>
-          <p:cNvPr id="3" name="Content Placeholder 2">
-            <a:extLst>
-              <a:ext uri="{FF2B5EF4-FFF2-40B4-BE49-F238E27FC236}">
-                <a16:creationId xmlns:a16="http://schemas.microsoft.com/office/drawing/2014/main" id="{D60594AD-A0F6-49B5-7C08-68FA00A4491D}"/>
-              </a:ext>
-            </a:extLst>
-          </p:cNvPr>
-          <p:cNvSpPr>
-            <a:spLocks noGrp="1"/>
-          </p:cNvSpPr>
-          <p:nvPr>
-            <p:ph idx="1"/>
-          </p:nvPr>
-        </p:nvSpPr>
-        <p:spPr>
-          <a:xfrm>
-            <a:off x="2231136" y="2638044"/>
-            <a:ext cx="7729728" cy="4067556"/>
-          </a:xfrm>
-        </p:spPr>
-        <p:txBody>
-          <a:bodyPr>
-            <a:normAutofit/>
-          </a:bodyPr>
-          <a:lstStyle/>
-          <a:p>
-            <a:r>
-              <a:rPr lang="en-US" dirty="0"/>
-              <a:t>Recall from last day that variables are assigned a value using =</a:t>
-            </a:r>
-          </a:p>
-          <a:p>
-            <a:pPr lvl="1"/>
-            <a:r>
-              <a:rPr lang="en-US" dirty="0"/>
-              <a:t>Example: </a:t>
-            </a:r>
-            <a:r>
-              <a:rPr lang="en-US" dirty="0">
-                <a:latin typeface="Courier New" panose="02070309020205020404" pitchFamily="49" charset="0"/>
-                <a:cs typeface="Courier New" panose="02070309020205020404" pitchFamily="49" charset="0"/>
-              </a:rPr>
-              <a:t>a = 29</a:t>
-            </a:r>
-          </a:p>
-          <a:p>
-            <a:endParaRPr lang="en-US" dirty="0"/>
-          </a:p>
-          <a:p>
-            <a:r>
-              <a:rPr lang="en-US" dirty="0"/>
-              <a:t>Select Other Assignment Operators:</a:t>
-            </a:r>
-          </a:p>
-          <a:p>
-            <a:r>
-              <a:rPr lang="en-CA" dirty="0">
-                <a:latin typeface="Courier New" panose="02070309020205020404" pitchFamily="49" charset="0"/>
-                <a:cs typeface="Courier New" panose="02070309020205020404" pitchFamily="49" charset="0"/>
-              </a:rPr>
-              <a:t>+= </a:t>
-            </a:r>
-            <a:r>
-              <a:rPr lang="en-CA" dirty="0">
-                <a:cs typeface="Courier New" panose="02070309020205020404" pitchFamily="49" charset="0"/>
-              </a:rPr>
-              <a:t>Addition Assignment (add and then assign)  </a:t>
-            </a:r>
-          </a:p>
-          <a:p>
-            <a:r>
-              <a:rPr lang="en-CA" dirty="0">
-                <a:latin typeface="Courier New" panose="02070309020205020404" pitchFamily="49" charset="0"/>
-                <a:cs typeface="Courier New" panose="02070309020205020404" pitchFamily="49" charset="0"/>
-              </a:rPr>
-              <a:t>-= </a:t>
-            </a:r>
-            <a:r>
-              <a:rPr lang="en-CA" dirty="0">
-                <a:cs typeface="Courier New" panose="02070309020205020404" pitchFamily="49" charset="0"/>
-              </a:rPr>
-              <a:t>Subtraction Assignment</a:t>
-            </a:r>
-          </a:p>
-          <a:p>
-            <a:r>
-              <a:rPr lang="en-CA" dirty="0">
-                <a:latin typeface="Courier New" panose="02070309020205020404" pitchFamily="49" charset="0"/>
-                <a:cs typeface="Courier New" panose="02070309020205020404" pitchFamily="49" charset="0"/>
-              </a:rPr>
-              <a:t>/= </a:t>
-            </a:r>
-            <a:r>
-              <a:rPr lang="en-CA" dirty="0">
-                <a:cs typeface="Courier New" panose="02070309020205020404" pitchFamily="49" charset="0"/>
-              </a:rPr>
-              <a:t>Division Assignment </a:t>
-            </a:r>
-          </a:p>
-          <a:p>
-            <a:r>
-              <a:rPr lang="en-CA" dirty="0">
-                <a:latin typeface="Courier New" panose="02070309020205020404" pitchFamily="49" charset="0"/>
-                <a:cs typeface="Courier New" panose="02070309020205020404" pitchFamily="49" charset="0"/>
-              </a:rPr>
-              <a:t>//=</a:t>
-            </a:r>
-            <a:r>
-              <a:rPr lang="en-CA" dirty="0">
-                <a:cs typeface="Courier New" panose="02070309020205020404" pitchFamily="49" charset="0"/>
-              </a:rPr>
-              <a:t> Floor Division Assignment</a:t>
-            </a:r>
-          </a:p>
-          <a:p>
-            <a:r>
-              <a:rPr lang="en-CA" dirty="0">
-                <a:latin typeface="Courier New" panose="02070309020205020404" pitchFamily="49" charset="0"/>
-                <a:cs typeface="Courier New" panose="02070309020205020404" pitchFamily="49" charset="0"/>
-              </a:rPr>
-              <a:t>*= </a:t>
-            </a:r>
-            <a:r>
-              <a:rPr lang="en-CA" dirty="0">
-                <a:cs typeface="Courier New" panose="02070309020205020404" pitchFamily="49" charset="0"/>
-              </a:rPr>
-              <a:t>Multiplication Assignment</a:t>
-            </a:r>
-          </a:p>
-          <a:p>
-            <a:r>
-              <a:rPr lang="en-CA" dirty="0">
-                <a:latin typeface="Courier New" panose="02070309020205020404" pitchFamily="49" charset="0"/>
-                <a:cs typeface="Courier New" panose="02070309020205020404" pitchFamily="49" charset="0"/>
-              </a:rPr>
-              <a:t>%=</a:t>
-            </a:r>
-            <a:r>
-              <a:rPr lang="en-CA" dirty="0">
-                <a:cs typeface="Courier New" panose="02070309020205020404" pitchFamily="49" charset="0"/>
-              </a:rPr>
-              <a:t> Modulus Assignment</a:t>
-            </a:r>
-            <a:endParaRPr lang="en-US" dirty="0">
-              <a:cs typeface="Courier New" panose="02070309020205020404" pitchFamily="49" charset="0"/>
-            </a:endParaRPr>
-          </a:p>
-        </p:txBody>
-      </p:sp>
-    </p:spTree>
-    <p:extLst>
-      <p:ext uri="{BB962C8B-B14F-4D97-AF65-F5344CB8AC3E}">
-        <p14:creationId xmlns:p14="http://schemas.microsoft.com/office/powerpoint/2010/main" val="1682851500"/>
-      </p:ext>
-    </p:extLst>
-  </p:cSld>
-  <p:clrMapOvr>
-    <a:masterClrMapping/>
-  </p:clrMapOvr>
-</p:sld>
-</file>
-
-<file path=ppt/slides/slide8.xml><?xml version="1.0" encoding="utf-8"?>
-<p:sld xmlns:a="http://schemas.openxmlformats.org/drawingml/2006/main" xmlns:r="http://schemas.openxmlformats.org/officeDocument/2006/relationships" xmlns:p="http://schemas.openxmlformats.org/presentationml/2006/main">
-  <p:cSld>
-    <p:spTree>
-      <p:nvGrpSpPr>
-        <p:cNvPr id="1" name=""/>
-        <p:cNvGrpSpPr/>
-        <p:nvPr/>
-      </p:nvGrpSpPr>
-      <p:grpSpPr>
-        <a:xfrm>
-          <a:off x="0" y="0"/>
-          <a:ext cx="0" cy="0"/>
-          <a:chOff x="0" y="0"/>
-          <a:chExt cx="0" cy="0"/>
-        </a:xfrm>
-      </p:grpSpPr>
-      <p:sp>
-        <p:nvSpPr>
-          <p:cNvPr id="2" name="Title 1">
-            <a:extLst>
-              <a:ext uri="{FF2B5EF4-FFF2-40B4-BE49-F238E27FC236}">
                 <a16:creationId xmlns:a16="http://schemas.microsoft.com/office/drawing/2014/main" id="{241BDD13-0A49-D0E1-13D8-65E2FD51F204}"/>
               </a:ext>
             </a:extLst>
@@ -14609,7 +14017,7 @@
 </p:sld>
 </file>
 
-<file path=ppt/slides/slide9.xml><?xml version="1.0" encoding="utf-8"?>
+<file path=ppt/slides/slide8.xml><?xml version="1.0" encoding="utf-8"?>
 <p:sld xmlns:a="http://schemas.openxmlformats.org/drawingml/2006/main" xmlns:r="http://schemas.openxmlformats.org/officeDocument/2006/relationships" xmlns:p="http://schemas.openxmlformats.org/presentationml/2006/main">
   <p:cSld>
     <p:bg>
@@ -14995,6 +14403,485 @@
     <p:extLst>
       <p:ext uri="{BB962C8B-B14F-4D97-AF65-F5344CB8AC3E}">
         <p14:creationId xmlns:p14="http://schemas.microsoft.com/office/powerpoint/2010/main" val="16947571"/>
+      </p:ext>
+    </p:extLst>
+  </p:cSld>
+  <p:clrMapOvr>
+    <a:masterClrMapping/>
+  </p:clrMapOvr>
+</p:sld>
+</file>
+
+<file path=ppt/slides/slide9.xml><?xml version="1.0" encoding="utf-8"?>
+<p:sld xmlns:a="http://schemas.openxmlformats.org/drawingml/2006/main" xmlns:r="http://schemas.openxmlformats.org/officeDocument/2006/relationships" xmlns:p="http://schemas.openxmlformats.org/presentationml/2006/main">
+  <p:cSld>
+    <p:bg>
+      <p:bgPr>
+        <a:solidFill>
+          <a:schemeClr val="bg1"/>
+        </a:solidFill>
+        <a:effectLst/>
+      </p:bgPr>
+    </p:bg>
+    <p:spTree>
+      <p:nvGrpSpPr>
+        <p:cNvPr id="1" name="">
+          <a:extLst>
+            <a:ext uri="{FF2B5EF4-FFF2-40B4-BE49-F238E27FC236}">
+              <a16:creationId xmlns:a16="http://schemas.microsoft.com/office/drawing/2014/main" id="{972F4FE0-3C7F-E749-2FBC-B976BFA9C564}"/>
+            </a:ext>
+          </a:extLst>
+        </p:cNvPr>
+        <p:cNvGrpSpPr/>
+        <p:nvPr/>
+      </p:nvGrpSpPr>
+      <p:grpSpPr>
+        <a:xfrm>
+          <a:off x="0" y="0"/>
+          <a:ext cx="0" cy="0"/>
+          <a:chOff x="0" y="0"/>
+          <a:chExt cx="0" cy="0"/>
+        </a:xfrm>
+      </p:grpSpPr>
+      <p:sp>
+        <p:nvSpPr>
+          <p:cNvPr id="9" name="Rectangle 8">
+            <a:extLst>
+              <a:ext uri="{FF2B5EF4-FFF2-40B4-BE49-F238E27FC236}">
+                <a16:creationId xmlns:a16="http://schemas.microsoft.com/office/drawing/2014/main" id="{2AEFFFF2-9EB4-4B6C-B9F8-2BA3EF89A21C}"/>
+              </a:ext>
+              <a:ext uri="{C183D7F6-B498-43B3-948B-1728B52AA6E4}">
+                <adec:decorative xmlns:adec="http://schemas.microsoft.com/office/drawing/2017/decorative" val="1"/>
+              </a:ext>
+            </a:extLst>
+          </p:cNvPr>
+          <p:cNvSpPr>
+            <a:spLocks noGrp="1" noRot="1" noChangeAspect="1" noMove="1" noResize="1" noEditPoints="1" noAdjustHandles="1" noChangeArrowheads="1" noChangeShapeType="1" noTextEdit="1"/>
+          </p:cNvSpPr>
+          <p:nvPr>
+            <p:extLst>
+              <p:ext uri="{386F3935-93C4-4BCD-93E2-E3B085C9AB24}">
+                <p16:designElem xmlns:p16="http://schemas.microsoft.com/office/powerpoint/2015/main" val="1"/>
+              </p:ext>
+            </p:extLst>
+          </p:nvPr>
+        </p:nvSpPr>
+        <p:spPr>
+          <a:xfrm>
+            <a:off x="1" y="0"/>
+            <a:ext cx="3070172" cy="6858000"/>
+          </a:xfrm>
+          <a:prstGeom prst="rect">
+            <a:avLst/>
+          </a:prstGeom>
+          <a:solidFill>
+            <a:schemeClr val="tx2"/>
+          </a:solidFill>
+          <a:ln>
+            <a:noFill/>
+          </a:ln>
+        </p:spPr>
+        <p:style>
+          <a:lnRef idx="2">
+            <a:schemeClr val="accent1">
+              <a:shade val="50000"/>
+            </a:schemeClr>
+          </a:lnRef>
+          <a:fillRef idx="1">
+            <a:schemeClr val="accent1"/>
+          </a:fillRef>
+          <a:effectRef idx="0">
+            <a:schemeClr val="accent1"/>
+          </a:effectRef>
+          <a:fontRef idx="minor">
+            <a:schemeClr val="lt1"/>
+          </a:fontRef>
+        </p:style>
+        <p:txBody>
+          <a:bodyPr rtlCol="0" anchor="ctr"/>
+          <a:lstStyle/>
+          <a:p>
+            <a:pPr algn="ctr"/>
+            <a:endParaRPr lang="en-US"/>
+          </a:p>
+        </p:txBody>
+      </p:sp>
+      <p:sp useBgFill="1">
+        <p:nvSpPr>
+          <p:cNvPr id="10" name="Rectangle 9">
+            <a:extLst>
+              <a:ext uri="{FF2B5EF4-FFF2-40B4-BE49-F238E27FC236}">
+                <a16:creationId xmlns:a16="http://schemas.microsoft.com/office/drawing/2014/main" id="{0D65299F-028F-4AFC-B46A-8DB33E20FE4A}"/>
+              </a:ext>
+              <a:ext uri="{C183D7F6-B498-43B3-948B-1728B52AA6E4}">
+                <adec:decorative xmlns:adec="http://schemas.microsoft.com/office/drawing/2017/decorative" val="1"/>
+              </a:ext>
+            </a:extLst>
+          </p:cNvPr>
+          <p:cNvSpPr>
+            <a:spLocks noGrp="1" noRot="1" noChangeAspect="1" noMove="1" noResize="1" noEditPoints="1" noAdjustHandles="1" noChangeArrowheads="1" noChangeShapeType="1" noTextEdit="1"/>
+          </p:cNvSpPr>
+          <p:nvPr>
+            <p:extLst>
+              <p:ext uri="{386F3935-93C4-4BCD-93E2-E3B085C9AB24}">
+                <p16:designElem xmlns:p16="http://schemas.microsoft.com/office/powerpoint/2015/main" val="1"/>
+              </p:ext>
+            </p:extLst>
+          </p:nvPr>
+        </p:nvSpPr>
+        <p:spPr>
+          <a:xfrm>
+            <a:off x="3070172" y="0"/>
+            <a:ext cx="9121828" cy="6858000"/>
+          </a:xfrm>
+          <a:prstGeom prst="rect">
+            <a:avLst/>
+          </a:prstGeom>
+          <a:ln>
+            <a:noFill/>
+          </a:ln>
+        </p:spPr>
+        <p:style>
+          <a:lnRef idx="2">
+            <a:schemeClr val="accent1">
+              <a:shade val="50000"/>
+            </a:schemeClr>
+          </a:lnRef>
+          <a:fillRef idx="1">
+            <a:schemeClr val="accent1"/>
+          </a:fillRef>
+          <a:effectRef idx="0">
+            <a:schemeClr val="accent1"/>
+          </a:effectRef>
+          <a:fontRef idx="minor">
+            <a:schemeClr val="lt1"/>
+          </a:fontRef>
+        </p:style>
+        <p:txBody>
+          <a:bodyPr rtlCol="0" anchor="ctr"/>
+          <a:lstStyle/>
+          <a:p>
+            <a:pPr algn="ctr"/>
+            <a:endParaRPr lang="en-US"/>
+          </a:p>
+        </p:txBody>
+      </p:sp>
+      <p:sp>
+        <p:nvSpPr>
+          <p:cNvPr id="11" name="Oval 10">
+            <a:extLst>
+              <a:ext uri="{FF2B5EF4-FFF2-40B4-BE49-F238E27FC236}">
+                <a16:creationId xmlns:a16="http://schemas.microsoft.com/office/drawing/2014/main" id="{BAC87F6E-526A-49B5-995D-42DB656594C9}"/>
+              </a:ext>
+              <a:ext uri="{C183D7F6-B498-43B3-948B-1728B52AA6E4}">
+                <adec:decorative xmlns:adec="http://schemas.microsoft.com/office/drawing/2017/decorative" val="1"/>
+              </a:ext>
+            </a:extLst>
+          </p:cNvPr>
+          <p:cNvSpPr>
+            <a:spLocks noGrp="1" noRot="1" noChangeAspect="1" noMove="1" noResize="1" noEditPoints="1" noAdjustHandles="1" noChangeArrowheads="1" noChangeShapeType="1" noTextEdit="1"/>
+          </p:cNvSpPr>
+          <p:nvPr>
+            <p:extLst>
+              <p:ext uri="{386F3935-93C4-4BCD-93E2-E3B085C9AB24}">
+                <p16:designElem xmlns:p16="http://schemas.microsoft.com/office/powerpoint/2015/main" val="1"/>
+              </p:ext>
+            </p:extLst>
+          </p:nvPr>
+        </p:nvSpPr>
+        <p:spPr>
+          <a:xfrm>
+            <a:off x="1117423" y="1443035"/>
+            <a:ext cx="3971932" cy="3971930"/>
+          </a:xfrm>
+          <a:prstGeom prst="ellipse">
+            <a:avLst/>
+          </a:prstGeom>
+          <a:solidFill>
+            <a:srgbClr val="FFFFFF"/>
+          </a:solidFill>
+          <a:ln w="31750">
+            <a:solidFill>
+              <a:schemeClr val="accent2">
+                <a:lumMod val="75000"/>
+              </a:schemeClr>
+            </a:solidFill>
+          </a:ln>
+        </p:spPr>
+        <p:style>
+          <a:lnRef idx="2">
+            <a:schemeClr val="accent1">
+              <a:shade val="50000"/>
+            </a:schemeClr>
+          </a:lnRef>
+          <a:fillRef idx="1">
+            <a:schemeClr val="accent1"/>
+          </a:fillRef>
+          <a:effectRef idx="0">
+            <a:schemeClr val="accent1"/>
+          </a:effectRef>
+          <a:fontRef idx="minor">
+            <a:schemeClr val="lt1"/>
+          </a:fontRef>
+        </p:style>
+        <p:txBody>
+          <a:bodyPr rtlCol="0" anchor="ctr"/>
+          <a:lstStyle/>
+          <a:p>
+            <a:pPr algn="ctr"/>
+            <a:endParaRPr lang="en-US"/>
+          </a:p>
+        </p:txBody>
+      </p:sp>
+      <p:sp>
+        <p:nvSpPr>
+          <p:cNvPr id="2" name="Title 1">
+            <a:extLst>
+              <a:ext uri="{FF2B5EF4-FFF2-40B4-BE49-F238E27FC236}">
+                <a16:creationId xmlns:a16="http://schemas.microsoft.com/office/drawing/2014/main" id="{93DCFF69-D55E-A196-66FD-40D15AFC9785}"/>
+              </a:ext>
+            </a:extLst>
+          </p:cNvPr>
+          <p:cNvSpPr>
+            <a:spLocks noGrp="1"/>
+          </p:cNvSpPr>
+          <p:nvPr>
+            <p:ph type="title"/>
+          </p:nvPr>
+        </p:nvSpPr>
+        <p:spPr>
+          <a:xfrm>
+            <a:off x="1260873" y="1586484"/>
+            <a:ext cx="3685032" cy="3685032"/>
+          </a:xfrm>
+          <a:prstGeom prst="ellipse">
+            <a:avLst/>
+          </a:prstGeom>
+          <a:solidFill>
+            <a:schemeClr val="accent2">
+              <a:lumMod val="75000"/>
+            </a:schemeClr>
+          </a:solidFill>
+          <a:ln>
+            <a:noFill/>
+          </a:ln>
+        </p:spPr>
+        <p:txBody>
+          <a:bodyPr vert="horz" lIns="182880" tIns="182880" rIns="182880" bIns="182880" rtlCol="0" anchor="ctr">
+            <a:normAutofit/>
+          </a:bodyPr>
+          <a:lstStyle/>
+          <a:p>
+            <a:r>
+              <a:rPr lang="en-US" sz="2600" kern="1200" cap="all" spc="200" baseline="0" dirty="0">
+                <a:solidFill>
+                  <a:srgbClr val="FFFFFF"/>
+                </a:solidFill>
+                <a:latin typeface="+mj-lt"/>
+                <a:ea typeface="+mj-ea"/>
+                <a:cs typeface="+mj-cs"/>
+              </a:rPr>
+              <a:t>Pair Problem Solving / Discussion</a:t>
+            </a:r>
+          </a:p>
+        </p:txBody>
+      </p:sp>
+      <p:sp>
+        <p:nvSpPr>
+          <p:cNvPr id="7" name="TextBox 6">
+            <a:extLst>
+              <a:ext uri="{FF2B5EF4-FFF2-40B4-BE49-F238E27FC236}">
+                <a16:creationId xmlns:a16="http://schemas.microsoft.com/office/drawing/2014/main" id="{03A13ACA-B4BE-0E3A-83CF-A117A438A6E5}"/>
+              </a:ext>
+            </a:extLst>
+          </p:cNvPr>
+          <p:cNvSpPr txBox="1"/>
+          <p:nvPr/>
+        </p:nvSpPr>
+        <p:spPr>
+          <a:xfrm>
+            <a:off x="5610431" y="1146554"/>
+            <a:ext cx="5320696" cy="2697480"/>
+          </a:xfrm>
+          <a:prstGeom prst="rect">
+            <a:avLst/>
+          </a:prstGeom>
+        </p:spPr>
+        <p:txBody>
+          <a:bodyPr vert="horz" lIns="91440" tIns="45720" rIns="91440" bIns="45720" rtlCol="0" anchor="ctr">
+            <a:normAutofit/>
+          </a:bodyPr>
+          <a:lstStyle/>
+          <a:p>
+            <a:pPr indent="-228600" defTabSz="914400">
+              <a:spcBef>
+                <a:spcPts val="1000"/>
+              </a:spcBef>
+              <a:buClr>
+                <a:schemeClr val="accent2"/>
+              </a:buClr>
+              <a:buFont typeface="Arial" panose="020B0604020202020204" pitchFamily="34" charset="0"/>
+              <a:buChar char="•"/>
+            </a:pPr>
+            <a:r>
+              <a:rPr lang="en-US" sz="2400" dirty="0">
+                <a:solidFill>
+                  <a:schemeClr val="tx1">
+                    <a:lumMod val="85000"/>
+                    <a:lumOff val="15000"/>
+                  </a:schemeClr>
+                </a:solidFill>
+              </a:rPr>
+              <a:t>Problem 2:</a:t>
+            </a:r>
+          </a:p>
+          <a:p>
+            <a:pPr indent="-228600" defTabSz="914400">
+              <a:spcBef>
+                <a:spcPts val="1000"/>
+              </a:spcBef>
+              <a:buClr>
+                <a:schemeClr val="accent2"/>
+              </a:buClr>
+              <a:buFont typeface="Arial" panose="020B0604020202020204" pitchFamily="34" charset="0"/>
+              <a:buChar char="•"/>
+            </a:pPr>
+            <a:r>
+              <a:rPr lang="en-US" sz="2400" dirty="0">
+                <a:solidFill>
+                  <a:schemeClr val="tx1">
+                    <a:lumMod val="85000"/>
+                    <a:lumOff val="15000"/>
+                  </a:schemeClr>
+                </a:solidFill>
+              </a:rPr>
+              <a:t>How can we turtle draw a hexagon so that the sides alternate red and blue?</a:t>
+            </a:r>
+          </a:p>
+        </p:txBody>
+      </p:sp>
+      <p:sp>
+        <p:nvSpPr>
+          <p:cNvPr id="5" name="TextBox 4">
+            <a:extLst>
+              <a:ext uri="{FF2B5EF4-FFF2-40B4-BE49-F238E27FC236}">
+                <a16:creationId xmlns:a16="http://schemas.microsoft.com/office/drawing/2014/main" id="{834AD7C2-BB2C-B46B-D616-E1DEAEBAFD1E}"/>
+              </a:ext>
+            </a:extLst>
+          </p:cNvPr>
+          <p:cNvSpPr txBox="1"/>
+          <p:nvPr/>
+        </p:nvSpPr>
+        <p:spPr>
+          <a:xfrm>
+            <a:off x="3916681" y="5775960"/>
+            <a:ext cx="7680960" cy="369332"/>
+          </a:xfrm>
+          <a:prstGeom prst="rect">
+            <a:avLst/>
+          </a:prstGeom>
+          <a:noFill/>
+          <a:ln>
+            <a:solidFill>
+              <a:schemeClr val="accent1"/>
+            </a:solidFill>
+          </a:ln>
+        </p:spPr>
+        <p:txBody>
+          <a:bodyPr wrap="square" rtlCol="0">
+            <a:spAutoFit/>
+          </a:bodyPr>
+          <a:lstStyle/>
+          <a:p>
+            <a:r>
+              <a:rPr lang="en-US" dirty="0"/>
+              <a:t>Difficulty Estimate: same as previous</a:t>
+            </a:r>
+          </a:p>
+        </p:txBody>
+      </p:sp>
+      <p:pic>
+        <p:nvPicPr>
+          <p:cNvPr id="13" name="Picture 12">
+            <a:extLst>
+              <a:ext uri="{FF2B5EF4-FFF2-40B4-BE49-F238E27FC236}">
+                <a16:creationId xmlns:a16="http://schemas.microsoft.com/office/drawing/2014/main" id="{83CC80B2-57AE-6C5A-4610-155F7193B942}"/>
+              </a:ext>
+            </a:extLst>
+          </p:cNvPr>
+          <p:cNvPicPr>
+            <a:picLocks noChangeAspect="1"/>
+          </p:cNvPicPr>
+          <p:nvPr/>
+        </p:nvPicPr>
+        <p:blipFill>
+          <a:blip r:embed="rId2"/>
+          <a:stretch>
+            <a:fillRect/>
+          </a:stretch>
+        </p:blipFill>
+        <p:spPr>
+          <a:xfrm>
+            <a:off x="6529003" y="3497721"/>
+            <a:ext cx="1914320" cy="1778191"/>
+          </a:xfrm>
+          <a:prstGeom prst="rect">
+            <a:avLst/>
+          </a:prstGeom>
+        </p:spPr>
+      </p:pic>
+      <p:sp>
+        <p:nvSpPr>
+          <p:cNvPr id="3" name="TextBox 2">
+            <a:extLst>
+              <a:ext uri="{FF2B5EF4-FFF2-40B4-BE49-F238E27FC236}">
+                <a16:creationId xmlns:a16="http://schemas.microsoft.com/office/drawing/2014/main" id="{DD2F631B-2D3A-6EA9-2FBF-6838528B099D}"/>
+              </a:ext>
+            </a:extLst>
+          </p:cNvPr>
+          <p:cNvSpPr txBox="1"/>
+          <p:nvPr/>
+        </p:nvSpPr>
+        <p:spPr>
+          <a:xfrm>
+            <a:off x="7631086" y="140014"/>
+            <a:ext cx="4293419" cy="369332"/>
+          </a:xfrm>
+          <a:prstGeom prst="rect">
+            <a:avLst/>
+          </a:prstGeom>
+          <a:noFill/>
+          <a:ln>
+            <a:solidFill>
+              <a:schemeClr val="accent1"/>
+            </a:solidFill>
+          </a:ln>
+        </p:spPr>
+        <p:txBody>
+          <a:bodyPr wrap="none" rtlCol="0">
+            <a:spAutoFit/>
+          </a:bodyPr>
+          <a:lstStyle/>
+          <a:p>
+            <a:r>
+              <a:rPr lang="en-US" dirty="0"/>
+              <a:t>Note: We aren’t using </a:t>
+            </a:r>
+            <a:r>
+              <a:rPr lang="en-US" b="1" dirty="0"/>
+              <a:t>if</a:t>
+            </a:r>
+            <a:r>
+              <a:rPr lang="en-US" dirty="0"/>
+              <a:t> statements just yet</a:t>
+            </a:r>
+          </a:p>
+        </p:txBody>
+      </p:sp>
+    </p:spTree>
+    <p:extLst>
+      <p:ext uri="{BB962C8B-B14F-4D97-AF65-F5344CB8AC3E}">
+        <p14:creationId xmlns:p14="http://schemas.microsoft.com/office/powerpoint/2010/main" val="104455661"/>
       </p:ext>
     </p:extLst>
   </p:cSld>
